--- a/media/exports/reports/2026-10/program-cost.pptx
+++ b/media/exports/reports/2026-10/program-cost.pptx
@@ -316,7 +316,9 @@
     <a:lstStyle/>
     <a:p>
       <a:pPr>
-        <a:defRPr sz="1800"/>
+        <a:defRPr sz="1800">
+          <a:latin typeface="Roboto"/>
+        </a:defRPr>
       </a:pPr>
       <a:endParaRPr lang="en-US"/>
     </a:p>
@@ -526,7 +528,9 @@
     <a:lstStyle/>
     <a:p>
       <a:pPr>
-        <a:defRPr sz="1800"/>
+        <a:defRPr sz="1800">
+          <a:latin typeface="Roboto"/>
+        </a:defRPr>
       </a:pPr>
       <a:endParaRPr lang="en-US"/>
     </a:p>
@@ -822,7 +826,9 @@
     <a:lstStyle/>
     <a:p>
       <a:pPr>
-        <a:defRPr sz="1800"/>
+        <a:defRPr sz="1800">
+          <a:latin typeface="Roboto"/>
+        </a:defRPr>
       </a:pPr>
       <a:endParaRPr/>
     </a:p>
@@ -3853,11 +3859,17 @@
           <a:bodyPr rtlCol="0" anchor="ctr"/>
           <a:lstStyle/>
           <a:p>
+            <a:pPr>
+              <a:defRPr>
+                <a:latin typeface="Roboto"/>
+              </a:defRPr>
+            </a:pPr>
             <a:r>
               <a:rPr sz="1600" b="1">
                 <a:solidFill>
                   <a:srgbClr val="FFFFFF"/>
                 </a:solidFill>
+                <a:latin typeface="Roboto"/>
               </a:rPr>
               <a:t>4th</a:t>
             </a:r>
@@ -3886,14 +3898,19 @@
           </a:bodyPr>
           <a:lstStyle/>
           <a:p>
+            <a:pPr>
+              <a:defRPr>
+                <a:latin typeface="Roboto"/>
+              </a:defRPr>
+            </a:pPr>
             <a:r>
               <a:rPr sz="1800" b="1">
                 <a:solidFill>
                   <a:srgbClr val="25342A"/>
                 </a:solidFill>
-                <a:latin typeface="Arial"/>
+                <a:latin typeface="Roboto"/>
               </a:rPr>
-              <a:t>The 4th Sheet</a:t>
+              <a:t>The Fourth Sheet</a:t>
             </a:r>
           </a:p>
         </p:txBody>
@@ -3920,12 +3937,17 @@
           </a:bodyPr>
           <a:lstStyle/>
           <a:p>
+            <a:pPr>
+              <a:defRPr>
+                <a:latin typeface="Roboto"/>
+              </a:defRPr>
+            </a:pPr>
             <a:r>
               <a:rPr sz="1100" b="1">
                 <a:solidFill>
                   <a:srgbClr val="8A7A52"/>
                 </a:solidFill>
-                <a:latin typeface="Arial"/>
+                <a:latin typeface="Roboto"/>
               </a:rPr>
               <a:t>SAMPLE DATA · invented figures for demonstration</a:t>
             </a:r>
@@ -3954,12 +3976,17 @@
           </a:bodyPr>
           <a:lstStyle/>
           <a:p>
+            <a:pPr>
+              <a:defRPr>
+                <a:latin typeface="Roboto"/>
+              </a:defRPr>
+            </a:pPr>
             <a:r>
               <a:rPr sz="3400" b="1">
                 <a:solidFill>
                   <a:srgbClr val="25342A"/>
                 </a:solidFill>
-                <a:latin typeface="Arial"/>
+                <a:latin typeface="Roboto"/>
               </a:rPr>
               <a:t>What does each program really cost?</a:t>
             </a:r>
@@ -3988,12 +4015,17 @@
           </a:bodyPr>
           <a:lstStyle/>
           <a:p>
+            <a:pPr>
+              <a:defRPr>
+                <a:latin typeface="Roboto"/>
+              </a:defRPr>
+            </a:pPr>
             <a:r>
               <a:rPr sz="1600" b="0">
                 <a:solidFill>
                   <a:srgbClr val="5F6F63"/>
                 </a:solidFill>
-                <a:latin typeface="Arial"/>
+                <a:latin typeface="Roboto"/>
               </a:rPr>
               <a:t>Sample Community Services Ltd</a:t>
             </a:r>
@@ -4022,12 +4054,17 @@
           </a:bodyPr>
           <a:lstStyle/>
           <a:p>
+            <a:pPr>
+              <a:defRPr>
+                <a:latin typeface="Roboto"/>
+              </a:defRPr>
+            </a:pPr>
             <a:r>
               <a:rPr sz="1400" b="0">
                 <a:solidFill>
                   <a:srgbClr val="25342A"/>
                 </a:solidFill>
-                <a:latin typeface="Arial"/>
+                <a:latin typeface="Roboto"/>
               </a:rPr>
               <a:t>Period: October 2026 to date. Each program's full cost: what its grant pays for, plus its fair share of the costs no single grant covers (untied program costs and administration, shared by grant spending). Pick a program and every chart and note follows it.</a:t>
             </a:r>
@@ -4056,34 +4093,49 @@
           </a:bodyPr>
           <a:lstStyle/>
           <a:p>
+            <a:pPr>
+              <a:defRPr>
+                <a:latin typeface="Roboto"/>
+              </a:defRPr>
+            </a:pPr>
             <a:r>
               <a:rPr sz="1100" b="0">
                 <a:solidFill>
                   <a:srgbClr val="5F6F63"/>
                 </a:solidFill>
-                <a:latin typeface="Arial"/>
+                <a:latin typeface="Roboto"/>
               </a:rPr>
               <a:t>How final is this data?</a:t>
             </a:r>
           </a:p>
           <a:p>
+            <a:pPr>
+              <a:defRPr>
+                <a:latin typeface="Roboto"/>
+              </a:defRPr>
+            </a:pPr>
             <a:r>
               <a:rPr sz="1100" b="0">
                 <a:solidFill>
                   <a:srgbClr val="5F6F63"/>
                 </a:solidFill>
-                <a:latin typeface="Arial"/>
+                <a:latin typeface="Roboto"/>
               </a:rPr>
               <a:t>September 2026: Locked. September 2026 is locked (closed 2 Oct 2026). These numbers won't change.</a:t>
             </a:r>
           </a:p>
           <a:p>
+            <a:pPr>
+              <a:defRPr>
+                <a:latin typeface="Roboto"/>
+              </a:defRPr>
+            </a:pPr>
             <a:r>
               <a:rPr sz="1100" b="0">
                 <a:solidFill>
                   <a:srgbClr val="5F6F63"/>
                 </a:solidFill>
-                <a:latin typeface="Arial"/>
+                <a:latin typeface="Roboto"/>
               </a:rPr>
               <a:t>October 2026: Incomplete. October 2026 is still in progress: figures to 6 Oct only.</a:t>
             </a:r>
@@ -4112,12 +4164,17 @@
           </a:bodyPr>
           <a:lstStyle/>
           <a:p>
+            <a:pPr>
+              <a:defRPr>
+                <a:latin typeface="Roboto"/>
+              </a:defRPr>
+            </a:pPr>
             <a:r>
               <a:rPr sz="900" b="0">
                 <a:solidFill>
                   <a:srgbClr val="5F6F63"/>
                 </a:solidFill>
-                <a:latin typeface="Arial"/>
+                <a:latin typeface="Roboto"/>
               </a:rPr>
               <a:t>program-cost.pptx</a:t>
             </a:r>
@@ -4146,13 +4203,17 @@
           </a:bodyPr>
           <a:lstStyle/>
           <a:p>
-            <a:pPr algn="ctr"/>
+            <a:pPr algn="ctr">
+              <a:defRPr>
+                <a:latin typeface="Roboto"/>
+              </a:defRPr>
+            </a:pPr>
             <a:r>
               <a:rPr sz="900" b="0">
                 <a:solidFill>
                   <a:srgbClr val="5F6F63"/>
                 </a:solidFill>
-                <a:latin typeface="Arial"/>
+                <a:latin typeface="Roboto"/>
               </a:rPr>
               <a:t>Data retrieved 2pm, Tue 6 Oct 2026 · Sample data</a:t>
             </a:r>
@@ -4181,13 +4242,17 @@
           </a:bodyPr>
           <a:lstStyle/>
           <a:p>
-            <a:pPr algn="r"/>
+            <a:pPr algn="r">
+              <a:defRPr>
+                <a:latin typeface="Roboto"/>
+              </a:defRPr>
+            </a:pPr>
             <a:r>
               <a:rPr sz="900" b="0">
                 <a:solidFill>
                   <a:srgbClr val="5F6F63"/>
                 </a:solidFill>
-                <a:latin typeface="Arial"/>
+                <a:latin typeface="Roboto"/>
               </a:rPr>
               <a:t>Slide 1 of 11</a:t>
             </a:r>
@@ -4251,7 +4316,11 @@
           <a:bodyPr rtlCol="0" anchor="ctr"/>
           <a:lstStyle/>
           <a:p>
-            <a:pPr algn="ctr"/>
+            <a:pPr algn="ctr">
+              <a:defRPr>
+                <a:latin typeface="Roboto"/>
+              </a:defRPr>
+            </a:pPr>
           </a:p>
         </p:txBody>
       </p:sp>
@@ -4277,12 +4346,17 @@
           </a:bodyPr>
           <a:lstStyle/>
           <a:p>
+            <a:pPr>
+              <a:defRPr>
+                <a:latin typeface="Roboto"/>
+              </a:defRPr>
+            </a:pPr>
             <a:r>
               <a:rPr sz="1000" b="0">
                 <a:solidFill>
                   <a:srgbClr val="5F6F63"/>
                 </a:solidFill>
-                <a:latin typeface="Arial"/>
+                <a:latin typeface="Roboto"/>
               </a:rPr>
               <a:t>Sample Community Services Ltd · What does each program really cost?</a:t>
             </a:r>
@@ -4311,12 +4385,17 @@
           </a:bodyPr>
           <a:lstStyle/>
           <a:p>
+            <a:pPr>
+              <a:defRPr>
+                <a:latin typeface="Roboto"/>
+              </a:defRPr>
+            </a:pPr>
             <a:r>
               <a:rPr sz="2400" b="1">
                 <a:solidFill>
                   <a:srgbClr val="25342A"/>
                 </a:solidFill>
-                <a:latin typeface="Arial"/>
+                <a:latin typeface="Roboto"/>
               </a:rPr>
               <a:t>What it shows · Program: Volunteer coordinator</a:t>
             </a:r>
@@ -4364,7 +4443,11 @@
           <a:bodyPr rtlCol="0" anchor="ctr"/>
           <a:lstStyle/>
           <a:p>
-            <a:pPr algn="ctr"/>
+            <a:pPr algn="ctr">
+              <a:defRPr>
+                <a:latin typeface="Roboto"/>
+              </a:defRPr>
+            </a:pPr>
           </a:p>
         </p:txBody>
       </p:sp>
@@ -4390,12 +4473,17 @@
           </a:bodyPr>
           <a:lstStyle/>
           <a:p>
+            <a:pPr>
+              <a:defRPr>
+                <a:latin typeface="Roboto"/>
+              </a:defRPr>
+            </a:pPr>
             <a:r>
               <a:rPr sz="1100" b="1">
                 <a:solidFill>
                   <a:srgbClr val="5F6F63"/>
                 </a:solidFill>
-                <a:latin typeface="Arial"/>
+                <a:latin typeface="Roboto"/>
               </a:rPr>
               <a:t>WHAT IT SHOWS</a:t>
             </a:r>
@@ -4424,12 +4512,17 @@
           </a:bodyPr>
           <a:lstStyle/>
           <a:p>
+            <a:pPr>
+              <a:defRPr>
+                <a:latin typeface="Roboto"/>
+              </a:defRPr>
+            </a:pPr>
             <a:r>
               <a:rPr sz="1600" b="0">
                 <a:solidFill>
                   <a:srgbClr val="25342A"/>
                 </a:solidFill>
-                <a:latin typeface="Arial"/>
+                <a:latin typeface="Roboto"/>
               </a:rPr>
               <a:t>Volunteer coordinator cost $1,061 in full in October so far: $429 paid by the State volunteering grant grant, and $632 of shared costs no grant covers. It has spent 89.3% of its budget to date, with $14,571 left and 4 months to go.</a:t>
             </a:r>
@@ -4477,7 +4570,11 @@
           <a:bodyPr rtlCol="0" anchor="ctr"/>
           <a:lstStyle/>
           <a:p>
-            <a:pPr algn="ctr"/>
+            <a:pPr algn="ctr">
+              <a:defRPr>
+                <a:latin typeface="Roboto"/>
+              </a:defRPr>
+            </a:pPr>
           </a:p>
         </p:txBody>
       </p:sp>
@@ -4503,12 +4600,17 @@
           </a:bodyPr>
           <a:lstStyle/>
           <a:p>
+            <a:pPr>
+              <a:defRPr>
+                <a:latin typeface="Roboto"/>
+              </a:defRPr>
+            </a:pPr>
             <a:r>
               <a:rPr sz="1100" b="1">
                 <a:solidFill>
                   <a:srgbClr val="5F6F63"/>
                 </a:solidFill>
-                <a:latin typeface="Arial"/>
+                <a:latin typeface="Roboto"/>
               </a:rPr>
               <a:t>WHAT YOU'D DO ABOUT IT</a:t>
             </a:r>
@@ -4537,12 +4639,17 @@
           </a:bodyPr>
           <a:lstStyle/>
           <a:p>
+            <a:pPr>
+              <a:defRPr>
+                <a:latin typeface="Roboto"/>
+              </a:defRPr>
+            </a:pPr>
             <a:r>
               <a:rPr sz="1600" b="0">
                 <a:solidFill>
                   <a:srgbClr val="25342A"/>
                 </a:solidFill>
-                <a:latin typeface="Arial"/>
+                <a:latin typeface="Roboto"/>
               </a:rPr>
               <a:t>The full cost is $1,061 a month; $632 of it is shared cost the grant doesn't pay for. Worth asking for as much of it as the funder allows at renewal.</a:t>
             </a:r>
@@ -4571,12 +4678,17 @@
           </a:bodyPr>
           <a:lstStyle/>
           <a:p>
+            <a:pPr>
+              <a:defRPr>
+                <a:latin typeface="Roboto"/>
+              </a:defRPr>
+            </a:pPr>
             <a:r>
               <a:rPr sz="900" b="0">
                 <a:solidFill>
                   <a:srgbClr val="5F6F63"/>
                 </a:solidFill>
-                <a:latin typeface="Arial"/>
+                <a:latin typeface="Roboto"/>
               </a:rPr>
               <a:t>program-cost.pptx</a:t>
             </a:r>
@@ -4605,13 +4717,17 @@
           </a:bodyPr>
           <a:lstStyle/>
           <a:p>
-            <a:pPr algn="ctr"/>
+            <a:pPr algn="ctr">
+              <a:defRPr>
+                <a:latin typeface="Roboto"/>
+              </a:defRPr>
+            </a:pPr>
             <a:r>
               <a:rPr sz="900" b="0">
                 <a:solidFill>
                   <a:srgbClr val="5F6F63"/>
                 </a:solidFill>
-                <a:latin typeface="Arial"/>
+                <a:latin typeface="Roboto"/>
               </a:rPr>
               <a:t>Data retrieved 2pm, Tue 6 Oct 2026 · Sample data</a:t>
             </a:r>
@@ -4640,13 +4756,17 @@
           </a:bodyPr>
           <a:lstStyle/>
           <a:p>
-            <a:pPr algn="r"/>
+            <a:pPr algn="r">
+              <a:defRPr>
+                <a:latin typeface="Roboto"/>
+              </a:defRPr>
+            </a:pPr>
             <a:r>
               <a:rPr sz="900" b="0">
                 <a:solidFill>
                   <a:srgbClr val="5F6F63"/>
                 </a:solidFill>
-                <a:latin typeface="Arial"/>
+                <a:latin typeface="Roboto"/>
               </a:rPr>
               <a:t>Slide 10 of 11</a:t>
             </a:r>
@@ -4710,7 +4830,11 @@
           <a:bodyPr rtlCol="0" anchor="ctr"/>
           <a:lstStyle/>
           <a:p>
-            <a:pPr algn="ctr"/>
+            <a:pPr algn="ctr">
+              <a:defRPr>
+                <a:latin typeface="Roboto"/>
+              </a:defRPr>
+            </a:pPr>
           </a:p>
         </p:txBody>
       </p:sp>
@@ -4736,12 +4860,17 @@
           </a:bodyPr>
           <a:lstStyle/>
           <a:p>
+            <a:pPr>
+              <a:defRPr>
+                <a:latin typeface="Roboto"/>
+              </a:defRPr>
+            </a:pPr>
             <a:r>
               <a:rPr sz="1000" b="0">
                 <a:solidFill>
                   <a:srgbClr val="5F6F63"/>
                 </a:solidFill>
-                <a:latin typeface="Arial"/>
+                <a:latin typeface="Roboto"/>
               </a:rPr>
               <a:t>Sample Community Services Ltd · What does each program really cost?</a:t>
             </a:r>
@@ -4770,12 +4899,17 @@
           </a:bodyPr>
           <a:lstStyle/>
           <a:p>
+            <a:pPr>
+              <a:defRPr>
+                <a:latin typeface="Roboto"/>
+              </a:defRPr>
+            </a:pPr>
             <a:r>
               <a:rPr sz="2400" b="1">
                 <a:solidFill>
                   <a:srgbClr val="25342A"/>
                 </a:solidFill>
-                <a:latin typeface="Arial"/>
+                <a:latin typeface="Roboto"/>
               </a:rPr>
               <a:t>Grant spending, by month · Spend $ · Every program at once</a:t>
             </a:r>
@@ -4804,12 +4938,17 @@
           </a:bodyPr>
           <a:lstStyle/>
           <a:p>
+            <a:pPr>
+              <a:defRPr>
+                <a:latin typeface="Roboto"/>
+              </a:defRPr>
+            </a:pPr>
             <a:r>
               <a:rPr sz="1200" b="0">
                 <a:solidFill>
                   <a:srgbClr val="5F6F63"/>
                 </a:solidFill>
-                <a:latin typeface="Arial"/>
+                <a:latin typeface="Roboto"/>
               </a:rPr>
               <a:t>Grant spending only (the program's direct cost). All programs includes grants that have finished.</a:t>
             </a:r>
@@ -4856,12 +4995,17 @@
           </a:bodyPr>
           <a:lstStyle/>
           <a:p>
+            <a:pPr>
+              <a:defRPr>
+                <a:latin typeface="Roboto"/>
+              </a:defRPr>
+            </a:pPr>
             <a:r>
               <a:rPr sz="900" b="0">
                 <a:solidFill>
                   <a:srgbClr val="5F6F63"/>
                 </a:solidFill>
-                <a:latin typeface="Arial"/>
+                <a:latin typeface="Roboto"/>
               </a:rPr>
               <a:t>program-cost.pptx</a:t>
             </a:r>
@@ -4890,13 +5034,17 @@
           </a:bodyPr>
           <a:lstStyle/>
           <a:p>
-            <a:pPr algn="ctr"/>
+            <a:pPr algn="ctr">
+              <a:defRPr>
+                <a:latin typeface="Roboto"/>
+              </a:defRPr>
+            </a:pPr>
             <a:r>
               <a:rPr sz="900" b="0">
                 <a:solidFill>
                   <a:srgbClr val="5F6F63"/>
                 </a:solidFill>
-                <a:latin typeface="Arial"/>
+                <a:latin typeface="Roboto"/>
               </a:rPr>
               <a:t>Data retrieved 2pm, Tue 6 Oct 2026 · Sample data</a:t>
             </a:r>
@@ -4925,13 +5073,17 @@
           </a:bodyPr>
           <a:lstStyle/>
           <a:p>
-            <a:pPr algn="r"/>
+            <a:pPr algn="r">
+              <a:defRPr>
+                <a:latin typeface="Roboto"/>
+              </a:defRPr>
+            </a:pPr>
             <a:r>
               <a:rPr sz="900" b="0">
                 <a:solidFill>
                   <a:srgbClr val="5F6F63"/>
                 </a:solidFill>
-                <a:latin typeface="Arial"/>
+                <a:latin typeface="Roboto"/>
               </a:rPr>
               <a:t>Slide 11 of 11</a:t>
             </a:r>
@@ -4995,7 +5147,11 @@
           <a:bodyPr rtlCol="0" anchor="ctr"/>
           <a:lstStyle/>
           <a:p>
-            <a:pPr algn="ctr"/>
+            <a:pPr algn="ctr">
+              <a:defRPr>
+                <a:latin typeface="Roboto"/>
+              </a:defRPr>
+            </a:pPr>
           </a:p>
         </p:txBody>
       </p:sp>
@@ -5021,12 +5177,17 @@
           </a:bodyPr>
           <a:lstStyle/>
           <a:p>
+            <a:pPr>
+              <a:defRPr>
+                <a:latin typeface="Roboto"/>
+              </a:defRPr>
+            </a:pPr>
             <a:r>
               <a:rPr sz="1000" b="0">
                 <a:solidFill>
                   <a:srgbClr val="5F6F63"/>
                 </a:solidFill>
-                <a:latin typeface="Arial"/>
+                <a:latin typeface="Roboto"/>
               </a:rPr>
               <a:t>Sample Community Services Ltd · What does each program really cost?</a:t>
             </a:r>
@@ -5055,12 +5216,17 @@
           </a:bodyPr>
           <a:lstStyle/>
           <a:p>
+            <a:pPr>
+              <a:defRPr>
+                <a:latin typeface="Roboto"/>
+              </a:defRPr>
+            </a:pPr>
             <a:r>
               <a:rPr sz="2400" b="1">
                 <a:solidFill>
                   <a:srgbClr val="25342A"/>
                 </a:solidFill>
-                <a:latin typeface="Arial"/>
+                <a:latin typeface="Roboto"/>
               </a:rPr>
               <a:t>Full cost of each program, October 2026 to date · $ · Program: All programs</a:t>
             </a:r>
@@ -5107,12 +5273,17 @@
           </a:bodyPr>
           <a:lstStyle/>
           <a:p>
+            <a:pPr>
+              <a:defRPr>
+                <a:latin typeface="Roboto"/>
+              </a:defRPr>
+            </a:pPr>
             <a:r>
               <a:rPr sz="900" b="0">
                 <a:solidFill>
                   <a:srgbClr val="5F6F63"/>
                 </a:solidFill>
-                <a:latin typeface="Arial"/>
+                <a:latin typeface="Roboto"/>
               </a:rPr>
               <a:t>program-cost.pptx</a:t>
             </a:r>
@@ -5141,13 +5312,17 @@
           </a:bodyPr>
           <a:lstStyle/>
           <a:p>
-            <a:pPr algn="ctr"/>
+            <a:pPr algn="ctr">
+              <a:defRPr>
+                <a:latin typeface="Roboto"/>
+              </a:defRPr>
+            </a:pPr>
             <a:r>
               <a:rPr sz="900" b="0">
                 <a:solidFill>
                   <a:srgbClr val="5F6F63"/>
                 </a:solidFill>
-                <a:latin typeface="Arial"/>
+                <a:latin typeface="Roboto"/>
               </a:rPr>
               <a:t>Data retrieved 2pm, Tue 6 Oct 2026 · Sample data</a:t>
             </a:r>
@@ -5176,13 +5351,17 @@
           </a:bodyPr>
           <a:lstStyle/>
           <a:p>
-            <a:pPr algn="r"/>
+            <a:pPr algn="r">
+              <a:defRPr>
+                <a:latin typeface="Roboto"/>
+              </a:defRPr>
+            </a:pPr>
             <a:r>
               <a:rPr sz="900" b="0">
                 <a:solidFill>
                   <a:srgbClr val="5F6F63"/>
                 </a:solidFill>
-                <a:latin typeface="Arial"/>
+                <a:latin typeface="Roboto"/>
               </a:rPr>
               <a:t>Slide 2 of 11</a:t>
             </a:r>
@@ -5246,7 +5425,11 @@
           <a:bodyPr rtlCol="0" anchor="ctr"/>
           <a:lstStyle/>
           <a:p>
-            <a:pPr algn="ctr"/>
+            <a:pPr algn="ctr">
+              <a:defRPr>
+                <a:latin typeface="Roboto"/>
+              </a:defRPr>
+            </a:pPr>
           </a:p>
         </p:txBody>
       </p:sp>
@@ -5272,12 +5455,17 @@
           </a:bodyPr>
           <a:lstStyle/>
           <a:p>
+            <a:pPr>
+              <a:defRPr>
+                <a:latin typeface="Roboto"/>
+              </a:defRPr>
+            </a:pPr>
             <a:r>
               <a:rPr sz="1000" b="0">
                 <a:solidFill>
                   <a:srgbClr val="5F6F63"/>
                 </a:solidFill>
-                <a:latin typeface="Arial"/>
+                <a:latin typeface="Roboto"/>
               </a:rPr>
               <a:t>Sample Community Services Ltd · What does each program really cost?</a:t>
             </a:r>
@@ -5306,12 +5494,17 @@
           </a:bodyPr>
           <a:lstStyle/>
           <a:p>
+            <a:pPr>
+              <a:defRPr>
+                <a:latin typeface="Roboto"/>
+              </a:defRPr>
+            </a:pPr>
             <a:r>
               <a:rPr sz="2400" b="1">
                 <a:solidFill>
                   <a:srgbClr val="25342A"/>
                 </a:solidFill>
-                <a:latin typeface="Arial"/>
+                <a:latin typeface="Roboto"/>
               </a:rPr>
               <a:t>Full cost of each program, October 2026 to date · % of total · Program: All programs</a:t>
             </a:r>
@@ -5358,12 +5551,17 @@
           </a:bodyPr>
           <a:lstStyle/>
           <a:p>
+            <a:pPr>
+              <a:defRPr>
+                <a:latin typeface="Roboto"/>
+              </a:defRPr>
+            </a:pPr>
             <a:r>
               <a:rPr sz="900" b="0">
                 <a:solidFill>
                   <a:srgbClr val="5F6F63"/>
                 </a:solidFill>
-                <a:latin typeface="Arial"/>
+                <a:latin typeface="Roboto"/>
               </a:rPr>
               <a:t>program-cost.pptx</a:t>
             </a:r>
@@ -5392,13 +5590,17 @@
           </a:bodyPr>
           <a:lstStyle/>
           <a:p>
-            <a:pPr algn="ctr"/>
+            <a:pPr algn="ctr">
+              <a:defRPr>
+                <a:latin typeface="Roboto"/>
+              </a:defRPr>
+            </a:pPr>
             <a:r>
               <a:rPr sz="900" b="0">
                 <a:solidFill>
                   <a:srgbClr val="5F6F63"/>
                 </a:solidFill>
-                <a:latin typeface="Arial"/>
+                <a:latin typeface="Roboto"/>
               </a:rPr>
               <a:t>Data retrieved 2pm, Tue 6 Oct 2026 · Sample data</a:t>
             </a:r>
@@ -5427,13 +5629,17 @@
           </a:bodyPr>
           <a:lstStyle/>
           <a:p>
-            <a:pPr algn="r"/>
+            <a:pPr algn="r">
+              <a:defRPr>
+                <a:latin typeface="Roboto"/>
+              </a:defRPr>
+            </a:pPr>
             <a:r>
               <a:rPr sz="900" b="0">
                 <a:solidFill>
                   <a:srgbClr val="5F6F63"/>
                 </a:solidFill>
-                <a:latin typeface="Arial"/>
+                <a:latin typeface="Roboto"/>
               </a:rPr>
               <a:t>Slide 3 of 11</a:t>
             </a:r>
@@ -5497,7 +5703,11 @@
           <a:bodyPr rtlCol="0" anchor="ctr"/>
           <a:lstStyle/>
           <a:p>
-            <a:pPr algn="ctr"/>
+            <a:pPr algn="ctr">
+              <a:defRPr>
+                <a:latin typeface="Roboto"/>
+              </a:defRPr>
+            </a:pPr>
           </a:p>
         </p:txBody>
       </p:sp>
@@ -5523,12 +5733,17 @@
           </a:bodyPr>
           <a:lstStyle/>
           <a:p>
+            <a:pPr>
+              <a:defRPr>
+                <a:latin typeface="Roboto"/>
+              </a:defRPr>
+            </a:pPr>
             <a:r>
               <a:rPr sz="1000" b="0">
                 <a:solidFill>
                   <a:srgbClr val="5F6F63"/>
                 </a:solidFill>
-                <a:latin typeface="Arial"/>
+                <a:latin typeface="Roboto"/>
               </a:rPr>
               <a:t>Sample Community Services Ltd · What does each program really cost?</a:t>
             </a:r>
@@ -5557,12 +5772,17 @@
           </a:bodyPr>
           <a:lstStyle/>
           <a:p>
+            <a:pPr>
+              <a:defRPr>
+                <a:latin typeface="Roboto"/>
+              </a:defRPr>
+            </a:pPr>
             <a:r>
               <a:rPr sz="2400" b="1">
                 <a:solidFill>
                   <a:srgbClr val="25342A"/>
                 </a:solidFill>
-                <a:latin typeface="Arial"/>
+                <a:latin typeface="Roboto"/>
               </a:rPr>
               <a:t>What it shows · Program: All programs</a:t>
             </a:r>
@@ -5610,7 +5830,11 @@
           <a:bodyPr rtlCol="0" anchor="ctr"/>
           <a:lstStyle/>
           <a:p>
-            <a:pPr algn="ctr"/>
+            <a:pPr algn="ctr">
+              <a:defRPr>
+                <a:latin typeface="Roboto"/>
+              </a:defRPr>
+            </a:pPr>
           </a:p>
         </p:txBody>
       </p:sp>
@@ -5636,12 +5860,17 @@
           </a:bodyPr>
           <a:lstStyle/>
           <a:p>
+            <a:pPr>
+              <a:defRPr>
+                <a:latin typeface="Roboto"/>
+              </a:defRPr>
+            </a:pPr>
             <a:r>
               <a:rPr sz="1100" b="1">
                 <a:solidFill>
                   <a:srgbClr val="5F6F63"/>
                 </a:solidFill>
-                <a:latin typeface="Arial"/>
+                <a:latin typeface="Roboto"/>
               </a:rPr>
               <a:t>WHAT IT SHOWS</a:t>
             </a:r>
@@ -5670,12 +5899,17 @@
           </a:bodyPr>
           <a:lstStyle/>
           <a:p>
+            <a:pPr>
+              <a:defRPr>
+                <a:latin typeface="Roboto"/>
+              </a:defRPr>
+            </a:pPr>
             <a:r>
               <a:rPr sz="1600" b="0">
                 <a:solidFill>
                   <a:srgbClr val="25342A"/>
                 </a:solidFill>
-                <a:latin typeface="Arial"/>
+                <a:latin typeface="Roboto"/>
               </a:rPr>
               <a:t>Housing support is the biggest program: $11,022 in October so far once its share of untied program costs and administration is added to $4,458 of grant spending. Shared costs add 147.2% on top of grant spending across all programs.</a:t>
             </a:r>
@@ -5723,7 +5957,11 @@
           <a:bodyPr rtlCol="0" anchor="ctr"/>
           <a:lstStyle/>
           <a:p>
-            <a:pPr algn="ctr"/>
+            <a:pPr algn="ctr">
+              <a:defRPr>
+                <a:latin typeface="Roboto"/>
+              </a:defRPr>
+            </a:pPr>
           </a:p>
         </p:txBody>
       </p:sp>
@@ -5749,12 +5987,17 @@
           </a:bodyPr>
           <a:lstStyle/>
           <a:p>
+            <a:pPr>
+              <a:defRPr>
+                <a:latin typeface="Roboto"/>
+              </a:defRPr>
+            </a:pPr>
             <a:r>
               <a:rPr sz="1100" b="1">
                 <a:solidFill>
                   <a:srgbClr val="5F6F63"/>
                 </a:solidFill>
-                <a:latin typeface="Arial"/>
+                <a:latin typeface="Roboto"/>
               </a:rPr>
               <a:t>WHAT YOU'D DO ABOUT IT</a:t>
             </a:r>
@@ -5783,12 +6026,17 @@
           </a:bodyPr>
           <a:lstStyle/>
           <a:p>
+            <a:pPr>
+              <a:defRPr>
+                <a:latin typeface="Roboto"/>
+              </a:defRPr>
+            </a:pPr>
             <a:r>
               <a:rPr sz="1600" b="0">
                 <a:solidFill>
                   <a:srgbClr val="25342A"/>
                 </a:solidFill>
-                <a:latin typeface="Arial"/>
+                <a:latin typeface="Roboto"/>
               </a:rPr>
               <a:t>The full cost (not just the grant line) is the number for renewal applications, where the funder lets you recover a share of overheads. Pick a program above to see it on its own.</a:t>
             </a:r>
@@ -5817,12 +6065,17 @@
           </a:bodyPr>
           <a:lstStyle/>
           <a:p>
+            <a:pPr>
+              <a:defRPr>
+                <a:latin typeface="Roboto"/>
+              </a:defRPr>
+            </a:pPr>
             <a:r>
               <a:rPr sz="900" b="0">
                 <a:solidFill>
                   <a:srgbClr val="5F6F63"/>
                 </a:solidFill>
-                <a:latin typeface="Arial"/>
+                <a:latin typeface="Roboto"/>
               </a:rPr>
               <a:t>program-cost.pptx</a:t>
             </a:r>
@@ -5851,13 +6104,17 @@
           </a:bodyPr>
           <a:lstStyle/>
           <a:p>
-            <a:pPr algn="ctr"/>
+            <a:pPr algn="ctr">
+              <a:defRPr>
+                <a:latin typeface="Roboto"/>
+              </a:defRPr>
+            </a:pPr>
             <a:r>
               <a:rPr sz="900" b="0">
                 <a:solidFill>
                   <a:srgbClr val="5F6F63"/>
                 </a:solidFill>
-                <a:latin typeface="Arial"/>
+                <a:latin typeface="Roboto"/>
               </a:rPr>
               <a:t>Data retrieved 2pm, Tue 6 Oct 2026 · Sample data</a:t>
             </a:r>
@@ -5886,13 +6143,17 @@
           </a:bodyPr>
           <a:lstStyle/>
           <a:p>
-            <a:pPr algn="r"/>
+            <a:pPr algn="r">
+              <a:defRPr>
+                <a:latin typeface="Roboto"/>
+              </a:defRPr>
+            </a:pPr>
             <a:r>
               <a:rPr sz="900" b="0">
                 <a:solidFill>
                   <a:srgbClr val="5F6F63"/>
                 </a:solidFill>
-                <a:latin typeface="Arial"/>
+                <a:latin typeface="Roboto"/>
               </a:rPr>
               <a:t>Slide 4 of 11</a:t>
             </a:r>
@@ -5956,7 +6217,11 @@
           <a:bodyPr rtlCol="0" anchor="ctr"/>
           <a:lstStyle/>
           <a:p>
-            <a:pPr algn="ctr"/>
+            <a:pPr algn="ctr">
+              <a:defRPr>
+                <a:latin typeface="Roboto"/>
+              </a:defRPr>
+            </a:pPr>
           </a:p>
         </p:txBody>
       </p:sp>
@@ -5982,12 +6247,17 @@
           </a:bodyPr>
           <a:lstStyle/>
           <a:p>
+            <a:pPr>
+              <a:defRPr>
+                <a:latin typeface="Roboto"/>
+              </a:defRPr>
+            </a:pPr>
             <a:r>
               <a:rPr sz="1000" b="0">
                 <a:solidFill>
                   <a:srgbClr val="5F6F63"/>
                 </a:solidFill>
-                <a:latin typeface="Arial"/>
+                <a:latin typeface="Roboto"/>
               </a:rPr>
               <a:t>Sample Community Services Ltd · What does each program really cost?</a:t>
             </a:r>
@@ -6016,12 +6286,17 @@
           </a:bodyPr>
           <a:lstStyle/>
           <a:p>
+            <a:pPr>
+              <a:defRPr>
+                <a:latin typeface="Roboto"/>
+              </a:defRPr>
+            </a:pPr>
             <a:r>
               <a:rPr sz="2400" b="1">
                 <a:solidFill>
                   <a:srgbClr val="25342A"/>
                 </a:solidFill>
-                <a:latin typeface="Arial"/>
+                <a:latin typeface="Roboto"/>
               </a:rPr>
               <a:t>What it shows · Program: Housing support</a:t>
             </a:r>
@@ -6069,7 +6344,11 @@
           <a:bodyPr rtlCol="0" anchor="ctr"/>
           <a:lstStyle/>
           <a:p>
-            <a:pPr algn="ctr"/>
+            <a:pPr algn="ctr">
+              <a:defRPr>
+                <a:latin typeface="Roboto"/>
+              </a:defRPr>
+            </a:pPr>
           </a:p>
         </p:txBody>
       </p:sp>
@@ -6095,12 +6374,17 @@
           </a:bodyPr>
           <a:lstStyle/>
           <a:p>
+            <a:pPr>
+              <a:defRPr>
+                <a:latin typeface="Roboto"/>
+              </a:defRPr>
+            </a:pPr>
             <a:r>
               <a:rPr sz="1100" b="1">
                 <a:solidFill>
                   <a:srgbClr val="5F6F63"/>
                 </a:solidFill>
-                <a:latin typeface="Arial"/>
+                <a:latin typeface="Roboto"/>
               </a:rPr>
               <a:t>WHAT IT SHOWS</a:t>
             </a:r>
@@ -6129,12 +6413,17 @@
           </a:bodyPr>
           <a:lstStyle/>
           <a:p>
+            <a:pPr>
+              <a:defRPr>
+                <a:latin typeface="Roboto"/>
+              </a:defRPr>
+            </a:pPr>
             <a:r>
               <a:rPr sz="1600" b="0">
                 <a:solidFill>
                   <a:srgbClr val="25342A"/>
                 </a:solidFill>
-                <a:latin typeface="Arial"/>
+                <a:latin typeface="Roboto"/>
               </a:rPr>
               <a:t>Housing support cost $11,022 in full in October so far: $4,458 paid by the State Housing Program grant, and $6,564 of shared costs no grant covers. It has spent 87.4% of its budget to date, with $97,842 left and 2 months to go.</a:t>
             </a:r>
@@ -6182,7 +6471,11 @@
           <a:bodyPr rtlCol="0" anchor="ctr"/>
           <a:lstStyle/>
           <a:p>
-            <a:pPr algn="ctr"/>
+            <a:pPr algn="ctr">
+              <a:defRPr>
+                <a:latin typeface="Roboto"/>
+              </a:defRPr>
+            </a:pPr>
           </a:p>
         </p:txBody>
       </p:sp>
@@ -6208,12 +6501,17 @@
           </a:bodyPr>
           <a:lstStyle/>
           <a:p>
+            <a:pPr>
+              <a:defRPr>
+                <a:latin typeface="Roboto"/>
+              </a:defRPr>
+            </a:pPr>
             <a:r>
               <a:rPr sz="1100" b="1">
                 <a:solidFill>
                   <a:srgbClr val="5F6F63"/>
                 </a:solidFill>
-                <a:latin typeface="Arial"/>
+                <a:latin typeface="Roboto"/>
               </a:rPr>
               <a:t>WHAT YOU'D DO ABOUT IT</a:t>
             </a:r>
@@ -6242,12 +6540,17 @@
           </a:bodyPr>
           <a:lstStyle/>
           <a:p>
+            <a:pPr>
+              <a:defRPr>
+                <a:latin typeface="Roboto"/>
+              </a:defRPr>
+            </a:pPr>
             <a:r>
               <a:rPr sz="1600" b="0">
                 <a:solidFill>
                   <a:srgbClr val="25342A"/>
                 </a:solidFill>
-                <a:latin typeface="Arial"/>
+                <a:latin typeface="Roboto"/>
               </a:rPr>
               <a:t>The full cost is $11,022 a month; $6,564 of it is shared cost the grant doesn't pay for. Worth asking for as much of it as the funder allows at renewal.</a:t>
             </a:r>
@@ -6276,12 +6579,17 @@
           </a:bodyPr>
           <a:lstStyle/>
           <a:p>
+            <a:pPr>
+              <a:defRPr>
+                <a:latin typeface="Roboto"/>
+              </a:defRPr>
+            </a:pPr>
             <a:r>
               <a:rPr sz="900" b="0">
                 <a:solidFill>
                   <a:srgbClr val="5F6F63"/>
                 </a:solidFill>
-                <a:latin typeface="Arial"/>
+                <a:latin typeface="Roboto"/>
               </a:rPr>
               <a:t>program-cost.pptx</a:t>
             </a:r>
@@ -6310,13 +6618,17 @@
           </a:bodyPr>
           <a:lstStyle/>
           <a:p>
-            <a:pPr algn="ctr"/>
+            <a:pPr algn="ctr">
+              <a:defRPr>
+                <a:latin typeface="Roboto"/>
+              </a:defRPr>
+            </a:pPr>
             <a:r>
               <a:rPr sz="900" b="0">
                 <a:solidFill>
                   <a:srgbClr val="5F6F63"/>
                 </a:solidFill>
-                <a:latin typeface="Arial"/>
+                <a:latin typeface="Roboto"/>
               </a:rPr>
               <a:t>Data retrieved 2pm, Tue 6 Oct 2026 · Sample data</a:t>
             </a:r>
@@ -6345,13 +6657,17 @@
           </a:bodyPr>
           <a:lstStyle/>
           <a:p>
-            <a:pPr algn="r"/>
+            <a:pPr algn="r">
+              <a:defRPr>
+                <a:latin typeface="Roboto"/>
+              </a:defRPr>
+            </a:pPr>
             <a:r>
               <a:rPr sz="900" b="0">
                 <a:solidFill>
                   <a:srgbClr val="5F6F63"/>
                 </a:solidFill>
-                <a:latin typeface="Arial"/>
+                <a:latin typeface="Roboto"/>
               </a:rPr>
               <a:t>Slide 5 of 11</a:t>
             </a:r>
@@ -6415,7 +6731,11 @@
           <a:bodyPr rtlCol="0" anchor="ctr"/>
           <a:lstStyle/>
           <a:p>
-            <a:pPr algn="ctr"/>
+            <a:pPr algn="ctr">
+              <a:defRPr>
+                <a:latin typeface="Roboto"/>
+              </a:defRPr>
+            </a:pPr>
           </a:p>
         </p:txBody>
       </p:sp>
@@ -6441,12 +6761,17 @@
           </a:bodyPr>
           <a:lstStyle/>
           <a:p>
+            <a:pPr>
+              <a:defRPr>
+                <a:latin typeface="Roboto"/>
+              </a:defRPr>
+            </a:pPr>
             <a:r>
               <a:rPr sz="1000" b="0">
                 <a:solidFill>
                   <a:srgbClr val="5F6F63"/>
                 </a:solidFill>
-                <a:latin typeface="Arial"/>
+                <a:latin typeface="Roboto"/>
               </a:rPr>
               <a:t>Sample Community Services Ltd · What does each program really cost?</a:t>
             </a:r>
@@ -6475,12 +6800,17 @@
           </a:bodyPr>
           <a:lstStyle/>
           <a:p>
+            <a:pPr>
+              <a:defRPr>
+                <a:latin typeface="Roboto"/>
+              </a:defRPr>
+            </a:pPr>
             <a:r>
               <a:rPr sz="2400" b="1">
                 <a:solidFill>
                   <a:srgbClr val="25342A"/>
                 </a:solidFill>
-                <a:latin typeface="Arial"/>
+                <a:latin typeface="Roboto"/>
               </a:rPr>
               <a:t>What it shows · Program: Youth outreach</a:t>
             </a:r>
@@ -6528,7 +6858,11 @@
           <a:bodyPr rtlCol="0" anchor="ctr"/>
           <a:lstStyle/>
           <a:p>
-            <a:pPr algn="ctr"/>
+            <a:pPr algn="ctr">
+              <a:defRPr>
+                <a:latin typeface="Roboto"/>
+              </a:defRPr>
+            </a:pPr>
           </a:p>
         </p:txBody>
       </p:sp>
@@ -6554,12 +6888,17 @@
           </a:bodyPr>
           <a:lstStyle/>
           <a:p>
+            <a:pPr>
+              <a:defRPr>
+                <a:latin typeface="Roboto"/>
+              </a:defRPr>
+            </a:pPr>
             <a:r>
               <a:rPr sz="1100" b="1">
                 <a:solidFill>
                   <a:srgbClr val="5F6F63"/>
                 </a:solidFill>
-                <a:latin typeface="Arial"/>
+                <a:latin typeface="Roboto"/>
               </a:rPr>
               <a:t>WHAT IT SHOWS</a:t>
             </a:r>
@@ -6588,12 +6927,17 @@
           </a:bodyPr>
           <a:lstStyle/>
           <a:p>
+            <a:pPr>
+              <a:defRPr>
+                <a:latin typeface="Roboto"/>
+              </a:defRPr>
+            </a:pPr>
             <a:r>
               <a:rPr sz="1600" b="0">
                 <a:solidFill>
                   <a:srgbClr val="25342A"/>
                 </a:solidFill>
-                <a:latin typeface="Arial"/>
+                <a:latin typeface="Roboto"/>
               </a:rPr>
               <a:t>Youth outreach cost $8,055 in full in October so far: $3,258 paid by the State Department of Families grant, and $4,797 of shared costs no grant covers. It has spent 96.7% of its budget to date, with $170,442 left and 8 months to go.</a:t>
             </a:r>
@@ -6641,7 +6985,11 @@
           <a:bodyPr rtlCol="0" anchor="ctr"/>
           <a:lstStyle/>
           <a:p>
-            <a:pPr algn="ctr"/>
+            <a:pPr algn="ctr">
+              <a:defRPr>
+                <a:latin typeface="Roboto"/>
+              </a:defRPr>
+            </a:pPr>
           </a:p>
         </p:txBody>
       </p:sp>
@@ -6667,12 +7015,17 @@
           </a:bodyPr>
           <a:lstStyle/>
           <a:p>
+            <a:pPr>
+              <a:defRPr>
+                <a:latin typeface="Roboto"/>
+              </a:defRPr>
+            </a:pPr>
             <a:r>
               <a:rPr sz="1100" b="1">
                 <a:solidFill>
                   <a:srgbClr val="5F6F63"/>
                 </a:solidFill>
-                <a:latin typeface="Arial"/>
+                <a:latin typeface="Roboto"/>
               </a:rPr>
               <a:t>WHAT YOU'D DO ABOUT IT</a:t>
             </a:r>
@@ -6701,12 +7054,17 @@
           </a:bodyPr>
           <a:lstStyle/>
           <a:p>
+            <a:pPr>
+              <a:defRPr>
+                <a:latin typeface="Roboto"/>
+              </a:defRPr>
+            </a:pPr>
             <a:r>
               <a:rPr sz="1600" b="0">
                 <a:solidFill>
                   <a:srgbClr val="25342A"/>
                 </a:solidFill>
-                <a:latin typeface="Arial"/>
+                <a:latin typeface="Roboto"/>
               </a:rPr>
               <a:t>The full cost is $8,055 a month; $4,797 of it is shared cost the grant doesn't pay for. Worth asking for as much of it as the funder allows at renewal.</a:t>
             </a:r>
@@ -6735,12 +7093,17 @@
           </a:bodyPr>
           <a:lstStyle/>
           <a:p>
+            <a:pPr>
+              <a:defRPr>
+                <a:latin typeface="Roboto"/>
+              </a:defRPr>
+            </a:pPr>
             <a:r>
               <a:rPr sz="900" b="0">
                 <a:solidFill>
                   <a:srgbClr val="5F6F63"/>
                 </a:solidFill>
-                <a:latin typeface="Arial"/>
+                <a:latin typeface="Roboto"/>
               </a:rPr>
               <a:t>program-cost.pptx</a:t>
             </a:r>
@@ -6769,13 +7132,17 @@
           </a:bodyPr>
           <a:lstStyle/>
           <a:p>
-            <a:pPr algn="ctr"/>
+            <a:pPr algn="ctr">
+              <a:defRPr>
+                <a:latin typeface="Roboto"/>
+              </a:defRPr>
+            </a:pPr>
             <a:r>
               <a:rPr sz="900" b="0">
                 <a:solidFill>
                   <a:srgbClr val="5F6F63"/>
                 </a:solidFill>
-                <a:latin typeface="Arial"/>
+                <a:latin typeface="Roboto"/>
               </a:rPr>
               <a:t>Data retrieved 2pm, Tue 6 Oct 2026 · Sample data</a:t>
             </a:r>
@@ -6804,13 +7171,17 @@
           </a:bodyPr>
           <a:lstStyle/>
           <a:p>
-            <a:pPr algn="r"/>
+            <a:pPr algn="r">
+              <a:defRPr>
+                <a:latin typeface="Roboto"/>
+              </a:defRPr>
+            </a:pPr>
             <a:r>
               <a:rPr sz="900" b="0">
                 <a:solidFill>
                   <a:srgbClr val="5F6F63"/>
                 </a:solidFill>
-                <a:latin typeface="Arial"/>
+                <a:latin typeface="Roboto"/>
               </a:rPr>
               <a:t>Slide 6 of 11</a:t>
             </a:r>
@@ -6874,7 +7245,11 @@
           <a:bodyPr rtlCol="0" anchor="ctr"/>
           <a:lstStyle/>
           <a:p>
-            <a:pPr algn="ctr"/>
+            <a:pPr algn="ctr">
+              <a:defRPr>
+                <a:latin typeface="Roboto"/>
+              </a:defRPr>
+            </a:pPr>
           </a:p>
         </p:txBody>
       </p:sp>
@@ -6900,12 +7275,17 @@
           </a:bodyPr>
           <a:lstStyle/>
           <a:p>
+            <a:pPr>
+              <a:defRPr>
+                <a:latin typeface="Roboto"/>
+              </a:defRPr>
+            </a:pPr>
             <a:r>
               <a:rPr sz="1000" b="0">
                 <a:solidFill>
                   <a:srgbClr val="5F6F63"/>
                 </a:solidFill>
-                <a:latin typeface="Arial"/>
+                <a:latin typeface="Roboto"/>
               </a:rPr>
               <a:t>Sample Community Services Ltd · What does each program really cost?</a:t>
             </a:r>
@@ -6934,12 +7314,17 @@
           </a:bodyPr>
           <a:lstStyle/>
           <a:p>
+            <a:pPr>
+              <a:defRPr>
+                <a:latin typeface="Roboto"/>
+              </a:defRPr>
+            </a:pPr>
             <a:r>
               <a:rPr sz="2400" b="1">
                 <a:solidFill>
                   <a:srgbClr val="25342A"/>
                 </a:solidFill>
-                <a:latin typeface="Arial"/>
+                <a:latin typeface="Roboto"/>
               </a:rPr>
               <a:t>What it shows · Program: Mental health first aid</a:t>
             </a:r>
@@ -6987,7 +7372,11 @@
           <a:bodyPr rtlCol="0" anchor="ctr"/>
           <a:lstStyle/>
           <a:p>
-            <a:pPr algn="ctr"/>
+            <a:pPr algn="ctr">
+              <a:defRPr>
+                <a:latin typeface="Roboto"/>
+              </a:defRPr>
+            </a:pPr>
           </a:p>
         </p:txBody>
       </p:sp>
@@ -7013,12 +7402,17 @@
           </a:bodyPr>
           <a:lstStyle/>
           <a:p>
+            <a:pPr>
+              <a:defRPr>
+                <a:latin typeface="Roboto"/>
+              </a:defRPr>
+            </a:pPr>
             <a:r>
               <a:rPr sz="1100" b="1">
                 <a:solidFill>
                   <a:srgbClr val="5F6F63"/>
                 </a:solidFill>
-                <a:latin typeface="Arial"/>
+                <a:latin typeface="Roboto"/>
               </a:rPr>
               <a:t>WHAT IT SHOWS</a:t>
             </a:r>
@@ -7047,12 +7441,17 @@
           </a:bodyPr>
           <a:lstStyle/>
           <a:p>
+            <a:pPr>
+              <a:defRPr>
+                <a:latin typeface="Roboto"/>
+              </a:defRPr>
+            </a:pPr>
             <a:r>
               <a:rPr sz="1600" b="0">
                 <a:solidFill>
                   <a:srgbClr val="25342A"/>
                 </a:solidFill>
-                <a:latin typeface="Arial"/>
+                <a:latin typeface="Roboto"/>
               </a:rPr>
               <a:t>Mental health first aid cost $3,820 in full in October so far: $1,545 paid by the Federal health program grant, and $2,275 of shared costs no grant covers. It has spent 83.9% of its budget to date, with $61,255 left and 5 months to go.</a:t>
             </a:r>
@@ -7100,7 +7499,11 @@
           <a:bodyPr rtlCol="0" anchor="ctr"/>
           <a:lstStyle/>
           <a:p>
-            <a:pPr algn="ctr"/>
+            <a:pPr algn="ctr">
+              <a:defRPr>
+                <a:latin typeface="Roboto"/>
+              </a:defRPr>
+            </a:pPr>
           </a:p>
         </p:txBody>
       </p:sp>
@@ -7126,12 +7529,17 @@
           </a:bodyPr>
           <a:lstStyle/>
           <a:p>
+            <a:pPr>
+              <a:defRPr>
+                <a:latin typeface="Roboto"/>
+              </a:defRPr>
+            </a:pPr>
             <a:r>
               <a:rPr sz="1100" b="1">
                 <a:solidFill>
                   <a:srgbClr val="5F6F63"/>
                 </a:solidFill>
-                <a:latin typeface="Arial"/>
+                <a:latin typeface="Roboto"/>
               </a:rPr>
               <a:t>WHAT YOU'D DO ABOUT IT</a:t>
             </a:r>
@@ -7160,12 +7568,17 @@
           </a:bodyPr>
           <a:lstStyle/>
           <a:p>
+            <a:pPr>
+              <a:defRPr>
+                <a:latin typeface="Roboto"/>
+              </a:defRPr>
+            </a:pPr>
             <a:r>
               <a:rPr sz="1600" b="0">
                 <a:solidFill>
                   <a:srgbClr val="25342A"/>
                 </a:solidFill>
-                <a:latin typeface="Arial"/>
+                <a:latin typeface="Roboto"/>
               </a:rPr>
               <a:t>The full cost is $3,820 a month; $2,275 of it is shared cost the grant doesn't pay for. Worth asking for as much of it as the funder allows at renewal.</a:t>
             </a:r>
@@ -7194,12 +7607,17 @@
           </a:bodyPr>
           <a:lstStyle/>
           <a:p>
+            <a:pPr>
+              <a:defRPr>
+                <a:latin typeface="Roboto"/>
+              </a:defRPr>
+            </a:pPr>
             <a:r>
               <a:rPr sz="900" b="0">
                 <a:solidFill>
                   <a:srgbClr val="5F6F63"/>
                 </a:solidFill>
-                <a:latin typeface="Arial"/>
+                <a:latin typeface="Roboto"/>
               </a:rPr>
               <a:t>program-cost.pptx</a:t>
             </a:r>
@@ -7228,13 +7646,17 @@
           </a:bodyPr>
           <a:lstStyle/>
           <a:p>
-            <a:pPr algn="ctr"/>
+            <a:pPr algn="ctr">
+              <a:defRPr>
+                <a:latin typeface="Roboto"/>
+              </a:defRPr>
+            </a:pPr>
             <a:r>
               <a:rPr sz="900" b="0">
                 <a:solidFill>
                   <a:srgbClr val="5F6F63"/>
                 </a:solidFill>
-                <a:latin typeface="Arial"/>
+                <a:latin typeface="Roboto"/>
               </a:rPr>
               <a:t>Data retrieved 2pm, Tue 6 Oct 2026 · Sample data</a:t>
             </a:r>
@@ -7263,13 +7685,17 @@
           </a:bodyPr>
           <a:lstStyle/>
           <a:p>
-            <a:pPr algn="r"/>
+            <a:pPr algn="r">
+              <a:defRPr>
+                <a:latin typeface="Roboto"/>
+              </a:defRPr>
+            </a:pPr>
             <a:r>
               <a:rPr sz="900" b="0">
                 <a:solidFill>
                   <a:srgbClr val="5F6F63"/>
                 </a:solidFill>
-                <a:latin typeface="Arial"/>
+                <a:latin typeface="Roboto"/>
               </a:rPr>
               <a:t>Slide 7 of 11</a:t>
             </a:r>
@@ -7333,7 +7759,11 @@
           <a:bodyPr rtlCol="0" anchor="ctr"/>
           <a:lstStyle/>
           <a:p>
-            <a:pPr algn="ctr"/>
+            <a:pPr algn="ctr">
+              <a:defRPr>
+                <a:latin typeface="Roboto"/>
+              </a:defRPr>
+            </a:pPr>
           </a:p>
         </p:txBody>
       </p:sp>
@@ -7359,12 +7789,17 @@
           </a:bodyPr>
           <a:lstStyle/>
           <a:p>
+            <a:pPr>
+              <a:defRPr>
+                <a:latin typeface="Roboto"/>
+              </a:defRPr>
+            </a:pPr>
             <a:r>
               <a:rPr sz="1000" b="0">
                 <a:solidFill>
                   <a:srgbClr val="5F6F63"/>
                 </a:solidFill>
-                <a:latin typeface="Arial"/>
+                <a:latin typeface="Roboto"/>
               </a:rPr>
               <a:t>Sample Community Services Ltd · What does each program really cost?</a:t>
             </a:r>
@@ -7393,12 +7828,17 @@
           </a:bodyPr>
           <a:lstStyle/>
           <a:p>
+            <a:pPr>
+              <a:defRPr>
+                <a:latin typeface="Roboto"/>
+              </a:defRPr>
+            </a:pPr>
             <a:r>
               <a:rPr sz="2400" b="1">
                 <a:solidFill>
                   <a:srgbClr val="25342A"/>
                 </a:solidFill>
-                <a:latin typeface="Arial"/>
+                <a:latin typeface="Roboto"/>
               </a:rPr>
               <a:t>What it shows · Program: Digital literacy</a:t>
             </a:r>
@@ -7446,7 +7886,11 @@
           <a:bodyPr rtlCol="0" anchor="ctr"/>
           <a:lstStyle/>
           <a:p>
-            <a:pPr algn="ctr"/>
+            <a:pPr algn="ctr">
+              <a:defRPr>
+                <a:latin typeface="Roboto"/>
+              </a:defRPr>
+            </a:pPr>
           </a:p>
         </p:txBody>
       </p:sp>
@@ -7472,12 +7916,17 @@
           </a:bodyPr>
           <a:lstStyle/>
           <a:p>
+            <a:pPr>
+              <a:defRPr>
+                <a:latin typeface="Roboto"/>
+              </a:defRPr>
+            </a:pPr>
             <a:r>
               <a:rPr sz="1100" b="1">
                 <a:solidFill>
                   <a:srgbClr val="5F6F63"/>
                 </a:solidFill>
-                <a:latin typeface="Arial"/>
+                <a:latin typeface="Roboto"/>
               </a:rPr>
               <a:t>WHAT IT SHOWS</a:t>
             </a:r>
@@ -7506,12 +7955,17 @@
           </a:bodyPr>
           <a:lstStyle/>
           <a:p>
+            <a:pPr>
+              <a:defRPr>
+                <a:latin typeface="Roboto"/>
+              </a:defRPr>
+            </a:pPr>
             <a:r>
               <a:rPr sz="1600" b="0">
                 <a:solidFill>
                   <a:srgbClr val="25342A"/>
                 </a:solidFill>
-                <a:latin typeface="Arial"/>
+                <a:latin typeface="Roboto"/>
               </a:rPr>
               <a:t>Digital literacy cost $1,736 in full in October so far: $702 paid by the Philanthropic foundation grant, and $1,034 of shared costs no grant covers. It has spent 92.8% of its budget to date, with $29,698 left and 5 months to go.</a:t>
             </a:r>
@@ -7559,7 +8013,11 @@
           <a:bodyPr rtlCol="0" anchor="ctr"/>
           <a:lstStyle/>
           <a:p>
-            <a:pPr algn="ctr"/>
+            <a:pPr algn="ctr">
+              <a:defRPr>
+                <a:latin typeface="Roboto"/>
+              </a:defRPr>
+            </a:pPr>
           </a:p>
         </p:txBody>
       </p:sp>
@@ -7585,12 +8043,17 @@
           </a:bodyPr>
           <a:lstStyle/>
           <a:p>
+            <a:pPr>
+              <a:defRPr>
+                <a:latin typeface="Roboto"/>
+              </a:defRPr>
+            </a:pPr>
             <a:r>
               <a:rPr sz="1100" b="1">
                 <a:solidFill>
                   <a:srgbClr val="5F6F63"/>
                 </a:solidFill>
-                <a:latin typeface="Arial"/>
+                <a:latin typeface="Roboto"/>
               </a:rPr>
               <a:t>WHAT YOU'D DO ABOUT IT</a:t>
             </a:r>
@@ -7619,12 +8082,17 @@
           </a:bodyPr>
           <a:lstStyle/>
           <a:p>
+            <a:pPr>
+              <a:defRPr>
+                <a:latin typeface="Roboto"/>
+              </a:defRPr>
+            </a:pPr>
             <a:r>
               <a:rPr sz="1600" b="0">
                 <a:solidFill>
                   <a:srgbClr val="25342A"/>
                 </a:solidFill>
-                <a:latin typeface="Arial"/>
+                <a:latin typeface="Roboto"/>
               </a:rPr>
               <a:t>The full cost is $1,736 a month; $1,034 of it is shared cost the grant doesn't pay for. Worth asking for as much of it as the funder allows at renewal.</a:t>
             </a:r>
@@ -7653,12 +8121,17 @@
           </a:bodyPr>
           <a:lstStyle/>
           <a:p>
+            <a:pPr>
+              <a:defRPr>
+                <a:latin typeface="Roboto"/>
+              </a:defRPr>
+            </a:pPr>
             <a:r>
               <a:rPr sz="900" b="0">
                 <a:solidFill>
                   <a:srgbClr val="5F6F63"/>
                 </a:solidFill>
-                <a:latin typeface="Arial"/>
+                <a:latin typeface="Roboto"/>
               </a:rPr>
               <a:t>program-cost.pptx</a:t>
             </a:r>
@@ -7687,13 +8160,17 @@
           </a:bodyPr>
           <a:lstStyle/>
           <a:p>
-            <a:pPr algn="ctr"/>
+            <a:pPr algn="ctr">
+              <a:defRPr>
+                <a:latin typeface="Roboto"/>
+              </a:defRPr>
+            </a:pPr>
             <a:r>
               <a:rPr sz="900" b="0">
                 <a:solidFill>
                   <a:srgbClr val="5F6F63"/>
                 </a:solidFill>
-                <a:latin typeface="Arial"/>
+                <a:latin typeface="Roboto"/>
               </a:rPr>
               <a:t>Data retrieved 2pm, Tue 6 Oct 2026 · Sample data</a:t>
             </a:r>
@@ -7722,13 +8199,17 @@
           </a:bodyPr>
           <a:lstStyle/>
           <a:p>
-            <a:pPr algn="r"/>
+            <a:pPr algn="r">
+              <a:defRPr>
+                <a:latin typeface="Roboto"/>
+              </a:defRPr>
+            </a:pPr>
             <a:r>
               <a:rPr sz="900" b="0">
                 <a:solidFill>
                   <a:srgbClr val="5F6F63"/>
                 </a:solidFill>
-                <a:latin typeface="Arial"/>
+                <a:latin typeface="Roboto"/>
               </a:rPr>
               <a:t>Slide 8 of 11</a:t>
             </a:r>
@@ -7792,7 +8273,11 @@
           <a:bodyPr rtlCol="0" anchor="ctr"/>
           <a:lstStyle/>
           <a:p>
-            <a:pPr algn="ctr"/>
+            <a:pPr algn="ctr">
+              <a:defRPr>
+                <a:latin typeface="Roboto"/>
+              </a:defRPr>
+            </a:pPr>
           </a:p>
         </p:txBody>
       </p:sp>
@@ -7818,12 +8303,17 @@
           </a:bodyPr>
           <a:lstStyle/>
           <a:p>
+            <a:pPr>
+              <a:defRPr>
+                <a:latin typeface="Roboto"/>
+              </a:defRPr>
+            </a:pPr>
             <a:r>
               <a:rPr sz="1000" b="0">
                 <a:solidFill>
                   <a:srgbClr val="5F6F63"/>
                 </a:solidFill>
-                <a:latin typeface="Arial"/>
+                <a:latin typeface="Roboto"/>
               </a:rPr>
               <a:t>Sample Community Services Ltd · What does each program really cost?</a:t>
             </a:r>
@@ -7852,12 +8342,17 @@
           </a:bodyPr>
           <a:lstStyle/>
           <a:p>
+            <a:pPr>
+              <a:defRPr>
+                <a:latin typeface="Roboto"/>
+              </a:defRPr>
+            </a:pPr>
             <a:r>
               <a:rPr sz="2400" b="1">
                 <a:solidFill>
                   <a:srgbClr val="25342A"/>
                 </a:solidFill>
-                <a:latin typeface="Arial"/>
+                <a:latin typeface="Roboto"/>
               </a:rPr>
               <a:t>What it shows · Program: Community meals</a:t>
             </a:r>
@@ -7905,7 +8400,11 @@
           <a:bodyPr rtlCol="0" anchor="ctr"/>
           <a:lstStyle/>
           <a:p>
-            <a:pPr algn="ctr"/>
+            <a:pPr algn="ctr">
+              <a:defRPr>
+                <a:latin typeface="Roboto"/>
+              </a:defRPr>
+            </a:pPr>
           </a:p>
         </p:txBody>
       </p:sp>
@@ -7931,12 +8430,17 @@
           </a:bodyPr>
           <a:lstStyle/>
           <a:p>
+            <a:pPr>
+              <a:defRPr>
+                <a:latin typeface="Roboto"/>
+              </a:defRPr>
+            </a:pPr>
             <a:r>
               <a:rPr sz="1100" b="1">
                 <a:solidFill>
                   <a:srgbClr val="5F6F63"/>
                 </a:solidFill>
-                <a:latin typeface="Arial"/>
+                <a:latin typeface="Roboto"/>
               </a:rPr>
               <a:t>WHAT IT SHOWS</a:t>
             </a:r>
@@ -7965,12 +8469,17 @@
           </a:bodyPr>
           <a:lstStyle/>
           <a:p>
+            <a:pPr>
+              <a:defRPr>
+                <a:latin typeface="Roboto"/>
+              </a:defRPr>
+            </a:pPr>
             <a:r>
               <a:rPr sz="1600" b="0">
                 <a:solidFill>
                   <a:srgbClr val="25342A"/>
                 </a:solidFill>
-                <a:latin typeface="Arial"/>
+                <a:latin typeface="Roboto"/>
               </a:rPr>
               <a:t>Community meals cost $1,521 in full in October so far: $615 paid by the Local council community grant grant, and $906 of shared costs no grant covers. It has spent 78.8% of its budget to date, with $35,385 left and 8 months to go.</a:t>
             </a:r>
@@ -8018,7 +8527,11 @@
           <a:bodyPr rtlCol="0" anchor="ctr"/>
           <a:lstStyle/>
           <a:p>
-            <a:pPr algn="ctr"/>
+            <a:pPr algn="ctr">
+              <a:defRPr>
+                <a:latin typeface="Roboto"/>
+              </a:defRPr>
+            </a:pPr>
           </a:p>
         </p:txBody>
       </p:sp>
@@ -8044,12 +8557,17 @@
           </a:bodyPr>
           <a:lstStyle/>
           <a:p>
+            <a:pPr>
+              <a:defRPr>
+                <a:latin typeface="Roboto"/>
+              </a:defRPr>
+            </a:pPr>
             <a:r>
               <a:rPr sz="1100" b="1">
                 <a:solidFill>
                   <a:srgbClr val="5F6F63"/>
                 </a:solidFill>
-                <a:latin typeface="Arial"/>
+                <a:latin typeface="Roboto"/>
               </a:rPr>
               <a:t>WHAT YOU'D DO ABOUT IT</a:t>
             </a:r>
@@ -8078,12 +8596,17 @@
           </a:bodyPr>
           <a:lstStyle/>
           <a:p>
+            <a:pPr>
+              <a:defRPr>
+                <a:latin typeface="Roboto"/>
+              </a:defRPr>
+            </a:pPr>
             <a:r>
               <a:rPr sz="1600" b="0">
                 <a:solidFill>
                   <a:srgbClr val="25342A"/>
                 </a:solidFill>
-                <a:latin typeface="Arial"/>
+                <a:latin typeface="Roboto"/>
               </a:rPr>
               <a:t>The full cost is $1,521 a month; $906 of it is shared cost the grant doesn't pay for. Worth asking for as much of it as the funder allows at renewal.</a:t>
             </a:r>
@@ -8112,12 +8635,17 @@
           </a:bodyPr>
           <a:lstStyle/>
           <a:p>
+            <a:pPr>
+              <a:defRPr>
+                <a:latin typeface="Roboto"/>
+              </a:defRPr>
+            </a:pPr>
             <a:r>
               <a:rPr sz="900" b="0">
                 <a:solidFill>
                   <a:srgbClr val="5F6F63"/>
                 </a:solidFill>
-                <a:latin typeface="Arial"/>
+                <a:latin typeface="Roboto"/>
               </a:rPr>
               <a:t>program-cost.pptx</a:t>
             </a:r>
@@ -8146,13 +8674,17 @@
           </a:bodyPr>
           <a:lstStyle/>
           <a:p>
-            <a:pPr algn="ctr"/>
+            <a:pPr algn="ctr">
+              <a:defRPr>
+                <a:latin typeface="Roboto"/>
+              </a:defRPr>
+            </a:pPr>
             <a:r>
               <a:rPr sz="900" b="0">
                 <a:solidFill>
                   <a:srgbClr val="5F6F63"/>
                 </a:solidFill>
-                <a:latin typeface="Arial"/>
+                <a:latin typeface="Roboto"/>
               </a:rPr>
               <a:t>Data retrieved 2pm, Tue 6 Oct 2026 · Sample data</a:t>
             </a:r>
@@ -8181,13 +8713,17 @@
           </a:bodyPr>
           <a:lstStyle/>
           <a:p>
-            <a:pPr algn="r"/>
+            <a:pPr algn="r">
+              <a:defRPr>
+                <a:latin typeface="Roboto"/>
+              </a:defRPr>
+            </a:pPr>
             <a:r>
               <a:rPr sz="900" b="0">
                 <a:solidFill>
                   <a:srgbClr val="5F6F63"/>
                 </a:solidFill>
-                <a:latin typeface="Arial"/>
+                <a:latin typeface="Roboto"/>
               </a:rPr>
               <a:t>Slide 9 of 11</a:t>
             </a:r>

--- a/media/exports/reports/2026-10/program-cost.pptx
+++ b/media/exports/reports/2026-10/program-cost.pptx
@@ -6,16 +6,13 @@
   </p:sldMasterIdLst>
   <p:sldIdLst>
     <p:sldId id="256" r:id="rId7"/>
-    <p:sldId id="257" r:id="rId8"/>
-    <p:sldId id="258" r:id="rId9"/>
-    <p:sldId id="259" r:id="rId10"/>
-    <p:sldId id="260" r:id="rId11"/>
-    <p:sldId id="261" r:id="rId12"/>
-    <p:sldId id="262" r:id="rId13"/>
-    <p:sldId id="263" r:id="rId14"/>
-    <p:sldId id="264" r:id="rId15"/>
-    <p:sldId id="265" r:id="rId16"/>
-    <p:sldId id="266" r:id="rId17"/>
+    <p:sldId id="257" r:id="rId9"/>
+    <p:sldId id="258" r:id="rId10"/>
+    <p:sldId id="259" r:id="rId11"/>
+    <p:sldId id="260" r:id="rId12"/>
+    <p:sldId id="261" r:id="rId13"/>
+    <p:sldId id="262" r:id="rId14"/>
+    <p:sldId id="263" r:id="rId15"/>
   </p:sldIdLst>
   <p:sldSz cx="12191695" cy="6858000" type="screen4x3"/>
   <p:notesSz cx="6858000" cy="9144000"/>
@@ -121,8 +118,19 @@
 <c:chartSpace xmlns:c="http://schemas.openxmlformats.org/drawingml/2006/chart" xmlns:a="http://schemas.openxmlformats.org/drawingml/2006/main" xmlns:r="http://schemas.openxmlformats.org/officeDocument/2006/relationships">
   <c:date1904 val="0"/>
   <c:chart>
-    <c:autoTitleDeleted val="0"/>
+    <c:autoTitleDeleted val="1"/>
     <c:plotArea>
+      <c:layout>
+        <c:manualLayout>
+          <c:layoutTarget val="inner"/>
+          <c:xMode val="edge"/>
+          <c:yMode val="edge"/>
+          <c:x val="0.3"/>
+          <c:y val="0.03"/>
+          <c:w val="0.58"/>
+          <c:h val="0.88"/>
+        </c:manualLayout>
+      </c:layout>
       <c:barChart>
         <c:barDir val="bar"/>
         <c:grouping val="clustered"/>
@@ -135,7 +143,7 @@
               <c:strCache>
                 <c:ptCount val="1"/>
                 <c:pt idx="0">
-                  <c:v>Value</c:v>
+                  <c:v>$</c:v>
                 </c:pt>
               </c:strCache>
             </c:strRef>
@@ -249,7 +257,7 @@
             <a:lstStyle/>
             <a:p>
               <a:pPr>
-                <a:defRPr sz="1100"/>
+                <a:defRPr sz="1000"/>
               </a:pPr>
             </a:p>
           </c:txPr>
@@ -286,7 +294,7 @@
           <a:lstStyle/>
           <a:p>
             <a:pPr>
-              <a:defRPr sz="1200"/>
+              <a:defRPr sz="1100"/>
             </a:pPr>
           </a:p>
         </c:txPr>
@@ -299,7 +307,10 @@
       </c:catAx>
       <c:valAx>
         <c:axId val="-2113994440"/>
-        <c:scaling/>
+        <c:scaling>
+          <c:max val="12675.3"/>
+          <c:min val="0.0"/>
+        </c:scaling>
         <c:delete/>
         <c:axPos val="b"/>
         <c:majorTickMark val="out"/>
@@ -332,223 +343,21 @@
 <file path=ppt/charts/chart2.xml><?xml version="1.0" encoding="utf-8"?>
 <c:chartSpace xmlns:c="http://schemas.openxmlformats.org/drawingml/2006/chart" xmlns:a="http://schemas.openxmlformats.org/drawingml/2006/main" xmlns:r="http://schemas.openxmlformats.org/officeDocument/2006/relationships">
   <c:date1904 val="0"/>
-  <c:chart>
-    <c:autoTitleDeleted val="0"/>
-    <c:plotArea>
-      <c:barChart>
-        <c:barDir val="bar"/>
-        <c:grouping val="clustered"/>
-        <c:ser>
-          <c:idx val="0"/>
-          <c:order val="0"/>
-          <c:tx>
-            <c:strRef>
-              <c:f>Sheet1!$B$1</c:f>
-              <c:strCache>
-                <c:ptCount val="1"/>
-                <c:pt idx="0">
-                  <c:v>Value</c:v>
-                </c:pt>
-              </c:strCache>
-            </c:strRef>
-          </c:tx>
-          <c:dPt>
-            <c:idx val="0"/>
-            <c:spPr>
-              <a:solidFill>
-                <a:srgbClr val="0E9F6E"/>
-              </a:solidFill>
-            </c:spPr>
-          </c:dPt>
-          <c:dPt>
-            <c:idx val="1"/>
-            <c:spPr>
-              <a:solidFill>
-                <a:srgbClr val="0E9F6E"/>
-              </a:solidFill>
-            </c:spPr>
-          </c:dPt>
-          <c:dPt>
-            <c:idx val="2"/>
-            <c:spPr>
-              <a:solidFill>
-                <a:srgbClr val="0E9F6E"/>
-              </a:solidFill>
-            </c:spPr>
-          </c:dPt>
-          <c:dPt>
-            <c:idx val="3"/>
-            <c:spPr>
-              <a:solidFill>
-                <a:srgbClr val="0E9F6E"/>
-              </a:solidFill>
-            </c:spPr>
-          </c:dPt>
-          <c:dPt>
-            <c:idx val="4"/>
-            <c:spPr>
-              <a:solidFill>
-                <a:srgbClr val="0E9F6E"/>
-              </a:solidFill>
-            </c:spPr>
-          </c:dPt>
-          <c:dPt>
-            <c:idx val="5"/>
-            <c:spPr>
-              <a:solidFill>
-                <a:srgbClr val="0E9F6E"/>
-              </a:solidFill>
-            </c:spPr>
-          </c:dPt>
-          <c:cat>
-            <c:strRef>
-              <c:f>Sheet1!$A$2:$A$7</c:f>
-              <c:strCache>
-                <c:ptCount val="6"/>
-                <c:pt idx="0">
-                  <c:v>Volunteer coordinator</c:v>
-                </c:pt>
-                <c:pt idx="1">
-                  <c:v>Community meals</c:v>
-                </c:pt>
-                <c:pt idx="2">
-                  <c:v>Digital literacy</c:v>
-                </c:pt>
-                <c:pt idx="3">
-                  <c:v>Mental health first aid</c:v>
-                </c:pt>
-                <c:pt idx="4">
-                  <c:v>Youth outreach</c:v>
-                </c:pt>
-                <c:pt idx="5">
-                  <c:v>Housing support</c:v>
-                </c:pt>
-              </c:strCache>
-            </c:strRef>
-          </c:cat>
-          <c:val>
-            <c:numRef>
-              <c:f>Sheet1!$B$2:$B$7</c:f>
-              <c:numCache>
-                <c:formatCode>0.0"%";[Red](0.0"%")</c:formatCode>
-                <c:ptCount val="6"/>
-                <c:pt idx="0">
-                  <c:v>3.9</c:v>
-                </c:pt>
-                <c:pt idx="1">
-                  <c:v>5.6</c:v>
-                </c:pt>
-                <c:pt idx="2">
-                  <c:v>6.4</c:v>
-                </c:pt>
-                <c:pt idx="3">
-                  <c:v>14.0</c:v>
-                </c:pt>
-                <c:pt idx="4">
-                  <c:v>29.6</c:v>
-                </c:pt>
-                <c:pt idx="5">
-                  <c:v>40.5</c:v>
-                </c:pt>
-              </c:numCache>
-            </c:numRef>
-          </c:val>
-        </c:ser>
-        <c:dLbls>
-          <c:numFmt formatCode="0.0&quot;%&quot;;[Red](0.0&quot;%&quot;)" sourceLinked="0"/>
-          <c:txPr>
-            <a:bodyPr/>
-            <a:lstStyle/>
-            <a:p>
-              <a:pPr>
-                <a:defRPr sz="1100"/>
-              </a:pPr>
-            </a:p>
-          </c:txPr>
-          <c:dLblPos val="outEnd"/>
-          <c:showLegendKey val="0"/>
-          <c:showVal val="1"/>
-          <c:showCatName val="0"/>
-          <c:showSerName val="0"/>
-          <c:showPercent val="0"/>
-          <c:showBubbleSize val="0"/>
-          <c:showLeaderLines val="1"/>
-        </c:dLbls>
-        <c:gapWidth val="60"/>
-        <c:axId val="-2068027336"/>
-        <c:axId val="-2113994440"/>
-      </c:barChart>
-      <c:catAx>
-        <c:axId val="-2068027336"/>
-        <c:scaling>
-          <c:orientation val="minMax"/>
-        </c:scaling>
-        <c:delete val="0"/>
-        <c:axPos val="l"/>
-        <c:majorTickMark val="out"/>
-        <c:minorTickMark val="none"/>
-        <c:tickLblPos val="nextTo"/>
-        <c:spPr>
-          <a:ln>
-            <a:noFill/>
-          </a:ln>
-        </c:spPr>
-        <c:txPr>
-          <a:bodyPr/>
-          <a:lstStyle/>
-          <a:p>
-            <a:pPr>
-              <a:defRPr sz="1200"/>
-            </a:pPr>
-          </a:p>
-        </c:txPr>
-        <c:crossAx val="-2113994440"/>
-        <c:crosses val="autoZero"/>
-        <c:auto val="1"/>
-        <c:lblAlgn val="ctr"/>
-        <c:lblOffset val="100"/>
-        <c:noMultiLvlLbl val="0"/>
-      </c:catAx>
-      <c:valAx>
-        <c:axId val="-2113994440"/>
-        <c:scaling/>
-        <c:delete/>
-        <c:axPos val="b"/>
-        <c:majorTickMark val="out"/>
-        <c:minorTickMark val="none"/>
-        <c:tickLblPos val="nextTo"/>
-        <c:crossAx val="-2068027336"/>
-        <c:crosses val="autoZero"/>
-      </c:valAx>
-    </c:plotArea>
-    <c:dispBlanksAs val="gap"/>
-  </c:chart>
-  <c:txPr>
-    <a:bodyPr/>
-    <a:lstStyle/>
-    <a:p>
-      <a:pPr>
-        <a:defRPr sz="1800">
-          <a:latin typeface="Roboto"/>
-        </a:defRPr>
-      </a:pPr>
-      <a:endParaRPr lang="en-US"/>
-    </a:p>
-  </c:txPr>
-  <c:externalData r:id="rId1">
-    <c:autoUpdate val="0"/>
-  </c:externalData>
-</c:chartSpace>
-</file>
-
-<file path=ppt/charts/chart3.xml><?xml version="1.0" encoding="utf-8"?>
-<c:chartSpace xmlns:c="http://schemas.openxmlformats.org/drawingml/2006/chart" xmlns:a="http://schemas.openxmlformats.org/drawingml/2006/main" xmlns:r="http://schemas.openxmlformats.org/officeDocument/2006/relationships">
-  <c:date1904 val="0"/>
   <c:roundedCorners val="0"/>
   <c:chart>
-    <c:autoTitleDeleted val="0"/>
+    <c:autoTitleDeleted val="1"/>
     <c:plotArea>
-      <c:layout/>
+      <c:layout>
+        <c:manualLayout>
+          <c:layoutTarget val="inner"/>
+          <c:xMode val="edge"/>
+          <c:yMode val="edge"/>
+          <c:x val="0.11"/>
+          <c:y val="0.05"/>
+          <c:w val="0.86"/>
+          <c:h val="0.8"/>
+        </c:manualLayout>
+      </c:layout>
       <c:areaChart>
         <c:grouping val="standard"/>
         <c:varyColors val="0"/>
@@ -561,7 +370,7 @@
               <c:strCache>
                 <c:ptCount val="1"/>
                 <c:pt idx="0">
-                  <c:v>Value</c:v>
+                  <c:v>Spend $</c:v>
                 </c:pt>
               </c:strCache>
             </c:strRef>
@@ -665,76 +474,76 @@
                 <c:formatCode>$#,##0;[Red]($#,##0);"-"</c:formatCode>
                 <c:ptCount val="24"/>
                 <c:pt idx="0">
-                  <c:v>31800</c:v>
+                  <c:v>0</c:v>
                 </c:pt>
                 <c:pt idx="1">
-                  <c:v>29700</c:v>
+                  <c:v>0</c:v>
                 </c:pt>
                 <c:pt idx="2">
-                  <c:v>62700</c:v>
+                  <c:v>0</c:v>
                 </c:pt>
                 <c:pt idx="3">
-                  <c:v>61700</c:v>
+                  <c:v>0</c:v>
                 </c:pt>
                 <c:pt idx="4">
-                  <c:v>54500</c:v>
+                  <c:v>0</c:v>
                 </c:pt>
                 <c:pt idx="5">
-                  <c:v>61500</c:v>
+                  <c:v>0</c:v>
                 </c:pt>
                 <c:pt idx="6">
-                  <c:v>61700</c:v>
+                  <c:v>0</c:v>
                 </c:pt>
                 <c:pt idx="7">
-                  <c:v>52200</c:v>
+                  <c:v>0</c:v>
                 </c:pt>
                 <c:pt idx="8">
-                  <c:v>59063</c:v>
+                  <c:v>0</c:v>
                 </c:pt>
                 <c:pt idx="9">
-                  <c:v>61544</c:v>
+                  <c:v>0</c:v>
                 </c:pt>
                 <c:pt idx="10">
-                  <c:v>62137</c:v>
+                  <c:v>0</c:v>
                 </c:pt>
                 <c:pt idx="11">
-                  <c:v>69185</c:v>
+                  <c:v>0</c:v>
                 </c:pt>
                 <c:pt idx="12">
-                  <c:v>70164</c:v>
+                  <c:v>0</c:v>
                 </c:pt>
                 <c:pt idx="13">
-                  <c:v>68793</c:v>
+                  <c:v>0</c:v>
                 </c:pt>
                 <c:pt idx="14">
-                  <c:v>59785</c:v>
+                  <c:v>30502</c:v>
                 </c:pt>
                 <c:pt idx="15">
-                  <c:v>55759</c:v>
+                  <c:v>26508</c:v>
                 </c:pt>
                 <c:pt idx="16">
-                  <c:v>53806</c:v>
+                  <c:v>24832</c:v>
                 </c:pt>
                 <c:pt idx="17">
-                  <c:v>66729</c:v>
+                  <c:v>23730</c:v>
                 </c:pt>
                 <c:pt idx="18">
-                  <c:v>72245</c:v>
+                  <c:v>31337</c:v>
                 </c:pt>
                 <c:pt idx="19">
-                  <c:v>70872</c:v>
+                  <c:v>29994</c:v>
                 </c:pt>
                 <c:pt idx="20">
-                  <c:v>72618</c:v>
+                  <c:v>29097</c:v>
                 </c:pt>
                 <c:pt idx="21">
-                  <c:v>73700</c:v>
+                  <c:v>30500</c:v>
                 </c:pt>
                 <c:pt idx="22">
-                  <c:v>77000</c:v>
+                  <c:v>31200</c:v>
                 </c:pt>
                 <c:pt idx="23">
-                  <c:v>11007</c:v>
+                  <c:v>4458</c:v>
                 </c:pt>
               </c:numCache>
             </c:numRef>
@@ -776,12 +585,15 @@
         <c:auto val="1"/>
         <c:lblAlgn val="ctr"/>
         <c:lblOffset val="100"/>
+        <c:tickLblSkip val="3"/>
         <c:noMultiLvlLbl val="0"/>
       </c:catAx>
       <c:valAx>
         <c:axId val="-2100718248"/>
         <c:scaling>
           <c:orientation val="minMax"/>
+          <c:max val="40000.0"/>
+          <c:min val="0.0"/>
         </c:scaling>
         <c:delete val="0"/>
         <c:axPos val="l"/>
@@ -815,6 +627,7 @@
         <c:crossAx val="-2101159928"/>
         <c:crosses val="autoZero"/>
         <c:crossBetween val="midCat"/>
+        <c:majorUnit val="10000.0"/>
       </c:valAx>
     </c:plotArea>
     <c:plotVisOnly val="1"/>
@@ -837,6 +650,2476 @@
     <c:autoUpdate val="0"/>
   </c:externalData>
 </c:chartSpace>
+</file>
+
+<file path=ppt/charts/chart3.xml><?xml version="1.0" encoding="utf-8"?>
+<c:chartSpace xmlns:c="http://schemas.openxmlformats.org/drawingml/2006/chart" xmlns:a="http://schemas.openxmlformats.org/drawingml/2006/main" xmlns:r="http://schemas.openxmlformats.org/officeDocument/2006/relationships">
+  <c:date1904 val="0"/>
+  <c:roundedCorners val="0"/>
+  <c:chart>
+    <c:autoTitleDeleted val="1"/>
+    <c:plotArea>
+      <c:layout>
+        <c:manualLayout>
+          <c:layoutTarget val="inner"/>
+          <c:xMode val="edge"/>
+          <c:yMode val="edge"/>
+          <c:x val="0.11"/>
+          <c:y val="0.05"/>
+          <c:w val="0.86"/>
+          <c:h val="0.8"/>
+        </c:manualLayout>
+      </c:layout>
+      <c:areaChart>
+        <c:grouping val="standard"/>
+        <c:varyColors val="0"/>
+        <c:ser>
+          <c:idx val="0"/>
+          <c:order val="0"/>
+          <c:tx>
+            <c:strRef>
+              <c:f>Sheet1!$B$1</c:f>
+              <c:strCache>
+                <c:ptCount val="1"/>
+                <c:pt idx="0">
+                  <c:v>Spend $</c:v>
+                </c:pt>
+              </c:strCache>
+            </c:strRef>
+          </c:tx>
+          <c:spPr>
+            <a:solidFill>
+              <a:srgbClr val="0E9F6E">
+                <a:alpha val="25000"/>
+              </a:srgbClr>
+            </a:solidFill>
+            <a:ln w="31750">
+              <a:solidFill>
+                <a:srgbClr val="0E9F6E"/>
+              </a:solidFill>
+            </a:ln>
+          </c:spPr>
+          <c:cat>
+            <c:strRef>
+              <c:f>Sheet1!$A$2:$A$25</c:f>
+              <c:strCache>
+                <c:ptCount val="24"/>
+                <c:pt idx="0">
+                  <c:v>Nov 24</c:v>
+                </c:pt>
+                <c:pt idx="1">
+                  <c:v>Dec 24</c:v>
+                </c:pt>
+                <c:pt idx="2">
+                  <c:v>Jan 25</c:v>
+                </c:pt>
+                <c:pt idx="3">
+                  <c:v>Feb 25</c:v>
+                </c:pt>
+                <c:pt idx="4">
+                  <c:v>Mar 25</c:v>
+                </c:pt>
+                <c:pt idx="5">
+                  <c:v>Apr 25</c:v>
+                </c:pt>
+                <c:pt idx="6">
+                  <c:v>May 25</c:v>
+                </c:pt>
+                <c:pt idx="7">
+                  <c:v>Jun 25</c:v>
+                </c:pt>
+                <c:pt idx="8">
+                  <c:v>Jul 25</c:v>
+                </c:pt>
+                <c:pt idx="9">
+                  <c:v>Aug 25</c:v>
+                </c:pt>
+                <c:pt idx="10">
+                  <c:v>Sep 25</c:v>
+                </c:pt>
+                <c:pt idx="11">
+                  <c:v>Oct 25</c:v>
+                </c:pt>
+                <c:pt idx="12">
+                  <c:v>Nov 25</c:v>
+                </c:pt>
+                <c:pt idx="13">
+                  <c:v>Dec 25</c:v>
+                </c:pt>
+                <c:pt idx="14">
+                  <c:v>Jan 26</c:v>
+                </c:pt>
+                <c:pt idx="15">
+                  <c:v>Feb 26</c:v>
+                </c:pt>
+                <c:pt idx="16">
+                  <c:v>Mar 26</c:v>
+                </c:pt>
+                <c:pt idx="17">
+                  <c:v>Apr 26</c:v>
+                </c:pt>
+                <c:pt idx="18">
+                  <c:v>May 26</c:v>
+                </c:pt>
+                <c:pt idx="19">
+                  <c:v>Jun 26</c:v>
+                </c:pt>
+                <c:pt idx="20">
+                  <c:v>Jul 26</c:v>
+                </c:pt>
+                <c:pt idx="21">
+                  <c:v>Aug 26</c:v>
+                </c:pt>
+                <c:pt idx="22">
+                  <c:v>Sep 26</c:v>
+                </c:pt>
+                <c:pt idx="23">
+                  <c:v>Oct 26</c:v>
+                </c:pt>
+              </c:strCache>
+            </c:strRef>
+          </c:cat>
+          <c:val>
+            <c:numRef>
+              <c:f>Sheet1!$B$2:$B$25</c:f>
+              <c:numCache>
+                <c:formatCode>$#,##0;[Red]($#,##0);"-"</c:formatCode>
+                <c:ptCount val="24"/>
+                <c:pt idx="0">
+                  <c:v>0</c:v>
+                </c:pt>
+                <c:pt idx="1">
+                  <c:v>0</c:v>
+                </c:pt>
+                <c:pt idx="2">
+                  <c:v>0</c:v>
+                </c:pt>
+                <c:pt idx="3">
+                  <c:v>0</c:v>
+                </c:pt>
+                <c:pt idx="4">
+                  <c:v>0</c:v>
+                </c:pt>
+                <c:pt idx="5">
+                  <c:v>0</c:v>
+                </c:pt>
+                <c:pt idx="6">
+                  <c:v>0</c:v>
+                </c:pt>
+                <c:pt idx="7">
+                  <c:v>0</c:v>
+                </c:pt>
+                <c:pt idx="8">
+                  <c:v>17363</c:v>
+                </c:pt>
+                <c:pt idx="9">
+                  <c:v>21144</c:v>
+                </c:pt>
+                <c:pt idx="10">
+                  <c:v>17537</c:v>
+                </c:pt>
+                <c:pt idx="11">
+                  <c:v>21925</c:v>
+                </c:pt>
+                <c:pt idx="12">
+                  <c:v>21079</c:v>
+                </c:pt>
+                <c:pt idx="13">
+                  <c:v>19272</c:v>
+                </c:pt>
+                <c:pt idx="14">
+                  <c:v>21157</c:v>
+                </c:pt>
+                <c:pt idx="15">
+                  <c:v>20743</c:v>
+                </c:pt>
+                <c:pt idx="16">
+                  <c:v>16515</c:v>
+                </c:pt>
+                <c:pt idx="17">
+                  <c:v>20451</c:v>
+                </c:pt>
+                <c:pt idx="18">
+                  <c:v>21174</c:v>
+                </c:pt>
+                <c:pt idx="19">
+                  <c:v>20366</c:v>
+                </c:pt>
+                <c:pt idx="20">
+                  <c:v>23274</c:v>
+                </c:pt>
+                <c:pt idx="21">
+                  <c:v>21500</c:v>
+                </c:pt>
+                <c:pt idx="22">
+                  <c:v>22800</c:v>
+                </c:pt>
+                <c:pt idx="23">
+                  <c:v>3258</c:v>
+                </c:pt>
+              </c:numCache>
+            </c:numRef>
+          </c:val>
+        </c:ser>
+        <c:dLbls>
+          <c:showLegendKey val="0"/>
+          <c:showVal val="0"/>
+          <c:showCatName val="0"/>
+          <c:showSerName val="0"/>
+          <c:showPercent val="0"/>
+          <c:showBubbleSize val="0"/>
+        </c:dLbls>
+        <c:axId val="-2101159928"/>
+        <c:axId val="-2100718248"/>
+      </c:areaChart>
+      <c:catAx>
+        <c:axId val="-2101159928"/>
+        <c:scaling>
+          <c:orientation val="minMax"/>
+        </c:scaling>
+        <c:delete val="0"/>
+        <c:axPos val="b"/>
+        <c:numFmt formatCode="General" sourceLinked="1"/>
+        <c:majorTickMark val="out"/>
+        <c:minorTickMark val="none"/>
+        <c:tickLblPos val="nextTo"/>
+        <c:txPr>
+          <a:bodyPr/>
+          <a:lstStyle/>
+          <a:p>
+            <a:pPr>
+              <a:defRPr sz="1000"/>
+            </a:pPr>
+          </a:p>
+        </c:txPr>
+        <c:crossAx val="-2100718248"/>
+        <c:crosses val="autoZero"/>
+        <c:auto val="1"/>
+        <c:lblAlgn val="ctr"/>
+        <c:lblOffset val="100"/>
+        <c:tickLblSkip val="3"/>
+        <c:noMultiLvlLbl val="0"/>
+      </c:catAx>
+      <c:valAx>
+        <c:axId val="-2100718248"/>
+        <c:scaling>
+          <c:orientation val="minMax"/>
+          <c:max val="25000.0"/>
+          <c:min val="0.0"/>
+        </c:scaling>
+        <c:delete val="0"/>
+        <c:axPos val="l"/>
+        <c:majorGridlines>
+          <c:spPr>
+            <a:ln>
+              <a:solidFill>
+                <a:srgbClr val="E6EAE7"/>
+              </a:solidFill>
+            </a:ln>
+          </c:spPr>
+        </c:majorGridlines>
+        <c:numFmt formatCode="$#,##0;[Red]($#,##0);&quot;-&quot;" sourceLinked="0"/>
+        <c:majorTickMark val="out"/>
+        <c:minorTickMark val="none"/>
+        <c:tickLblPos val="nextTo"/>
+        <c:spPr>
+          <a:ln>
+            <a:noFill/>
+          </a:ln>
+        </c:spPr>
+        <c:txPr>
+          <a:bodyPr/>
+          <a:lstStyle/>
+          <a:p>
+            <a:pPr>
+              <a:defRPr sz="1000"/>
+            </a:pPr>
+          </a:p>
+        </c:txPr>
+        <c:crossAx val="-2101159928"/>
+        <c:crosses val="autoZero"/>
+        <c:crossBetween val="midCat"/>
+        <c:majorUnit val="5000.0"/>
+      </c:valAx>
+    </c:plotArea>
+    <c:plotVisOnly val="1"/>
+    <c:dispBlanksAs val="zero"/>
+    <c:showDLblsOverMax val="0"/>
+  </c:chart>
+  <c:txPr>
+    <a:bodyPr/>
+    <a:lstStyle/>
+    <a:p>
+      <a:pPr>
+        <a:defRPr sz="1800">
+          <a:latin typeface="Roboto"/>
+        </a:defRPr>
+      </a:pPr>
+      <a:endParaRPr/>
+    </a:p>
+  </c:txPr>
+  <c:externalData r:id="rId1">
+    <c:autoUpdate val="0"/>
+  </c:externalData>
+</c:chartSpace>
+</file>
+
+<file path=ppt/charts/chart4.xml><?xml version="1.0" encoding="utf-8"?>
+<c:chartSpace xmlns:c="http://schemas.openxmlformats.org/drawingml/2006/chart" xmlns:a="http://schemas.openxmlformats.org/drawingml/2006/main" xmlns:r="http://schemas.openxmlformats.org/officeDocument/2006/relationships">
+  <c:date1904 val="0"/>
+  <c:roundedCorners val="0"/>
+  <c:chart>
+    <c:autoTitleDeleted val="1"/>
+    <c:plotArea>
+      <c:layout>
+        <c:manualLayout>
+          <c:layoutTarget val="inner"/>
+          <c:xMode val="edge"/>
+          <c:yMode val="edge"/>
+          <c:x val="0.11"/>
+          <c:y val="0.05"/>
+          <c:w val="0.86"/>
+          <c:h val="0.8"/>
+        </c:manualLayout>
+      </c:layout>
+      <c:areaChart>
+        <c:grouping val="standard"/>
+        <c:varyColors val="0"/>
+        <c:ser>
+          <c:idx val="0"/>
+          <c:order val="0"/>
+          <c:tx>
+            <c:strRef>
+              <c:f>Sheet1!$B$1</c:f>
+              <c:strCache>
+                <c:ptCount val="1"/>
+                <c:pt idx="0">
+                  <c:v>Spend $</c:v>
+                </c:pt>
+              </c:strCache>
+            </c:strRef>
+          </c:tx>
+          <c:spPr>
+            <a:solidFill>
+              <a:srgbClr val="0E9F6E">
+                <a:alpha val="25000"/>
+              </a:srgbClr>
+            </a:solidFill>
+            <a:ln w="31750">
+              <a:solidFill>
+                <a:srgbClr val="0E9F6E"/>
+              </a:solidFill>
+            </a:ln>
+          </c:spPr>
+          <c:cat>
+            <c:strRef>
+              <c:f>Sheet1!$A$2:$A$25</c:f>
+              <c:strCache>
+                <c:ptCount val="24"/>
+                <c:pt idx="0">
+                  <c:v>Nov 24</c:v>
+                </c:pt>
+                <c:pt idx="1">
+                  <c:v>Dec 24</c:v>
+                </c:pt>
+                <c:pt idx="2">
+                  <c:v>Jan 25</c:v>
+                </c:pt>
+                <c:pt idx="3">
+                  <c:v>Feb 25</c:v>
+                </c:pt>
+                <c:pt idx="4">
+                  <c:v>Mar 25</c:v>
+                </c:pt>
+                <c:pt idx="5">
+                  <c:v>Apr 25</c:v>
+                </c:pt>
+                <c:pt idx="6">
+                  <c:v>May 25</c:v>
+                </c:pt>
+                <c:pt idx="7">
+                  <c:v>Jun 25</c:v>
+                </c:pt>
+                <c:pt idx="8">
+                  <c:v>Jul 25</c:v>
+                </c:pt>
+                <c:pt idx="9">
+                  <c:v>Aug 25</c:v>
+                </c:pt>
+                <c:pt idx="10">
+                  <c:v>Sep 25</c:v>
+                </c:pt>
+                <c:pt idx="11">
+                  <c:v>Oct 25</c:v>
+                </c:pt>
+                <c:pt idx="12">
+                  <c:v>Nov 25</c:v>
+                </c:pt>
+                <c:pt idx="13">
+                  <c:v>Dec 25</c:v>
+                </c:pt>
+                <c:pt idx="14">
+                  <c:v>Jan 26</c:v>
+                </c:pt>
+                <c:pt idx="15">
+                  <c:v>Feb 26</c:v>
+                </c:pt>
+                <c:pt idx="16">
+                  <c:v>Mar 26</c:v>
+                </c:pt>
+                <c:pt idx="17">
+                  <c:v>Apr 26</c:v>
+                </c:pt>
+                <c:pt idx="18">
+                  <c:v>May 26</c:v>
+                </c:pt>
+                <c:pt idx="19">
+                  <c:v>Jun 26</c:v>
+                </c:pt>
+                <c:pt idx="20">
+                  <c:v>Jul 26</c:v>
+                </c:pt>
+                <c:pt idx="21">
+                  <c:v>Aug 26</c:v>
+                </c:pt>
+                <c:pt idx="22">
+                  <c:v>Sep 26</c:v>
+                </c:pt>
+                <c:pt idx="23">
+                  <c:v>Oct 26</c:v>
+                </c:pt>
+              </c:strCache>
+            </c:strRef>
+          </c:cat>
+          <c:val>
+            <c:numRef>
+              <c:f>Sheet1!$B$2:$B$25</c:f>
+              <c:numCache>
+                <c:formatCode>$#,##0;[Red]($#,##0);"-"</c:formatCode>
+                <c:ptCount val="24"/>
+                <c:pt idx="0">
+                  <c:v>0</c:v>
+                </c:pt>
+                <c:pt idx="1">
+                  <c:v>0</c:v>
+                </c:pt>
+                <c:pt idx="2">
+                  <c:v>0</c:v>
+                </c:pt>
+                <c:pt idx="3">
+                  <c:v>0</c:v>
+                </c:pt>
+                <c:pt idx="4">
+                  <c:v>0</c:v>
+                </c:pt>
+                <c:pt idx="5">
+                  <c:v>0</c:v>
+                </c:pt>
+                <c:pt idx="6">
+                  <c:v>0</c:v>
+                </c:pt>
+                <c:pt idx="7">
+                  <c:v>0</c:v>
+                </c:pt>
+                <c:pt idx="8">
+                  <c:v>0</c:v>
+                </c:pt>
+                <c:pt idx="9">
+                  <c:v>0</c:v>
+                </c:pt>
+                <c:pt idx="10">
+                  <c:v>0</c:v>
+                </c:pt>
+                <c:pt idx="11">
+                  <c:v>0</c:v>
+                </c:pt>
+                <c:pt idx="12">
+                  <c:v>0</c:v>
+                </c:pt>
+                <c:pt idx="13">
+                  <c:v>0</c:v>
+                </c:pt>
+                <c:pt idx="14">
+                  <c:v>0</c:v>
+                </c:pt>
+                <c:pt idx="15">
+                  <c:v>0</c:v>
+                </c:pt>
+                <c:pt idx="16">
+                  <c:v>0</c:v>
+                </c:pt>
+                <c:pt idx="17">
+                  <c:v>9584</c:v>
+                </c:pt>
+                <c:pt idx="18">
+                  <c:v>8950</c:v>
+                </c:pt>
+                <c:pt idx="19">
+                  <c:v>9797</c:v>
+                </c:pt>
+                <c:pt idx="20">
+                  <c:v>8669</c:v>
+                </c:pt>
+                <c:pt idx="21">
+                  <c:v>9400</c:v>
+                </c:pt>
+                <c:pt idx="22">
+                  <c:v>10800</c:v>
+                </c:pt>
+                <c:pt idx="23">
+                  <c:v>1545</c:v>
+                </c:pt>
+              </c:numCache>
+            </c:numRef>
+          </c:val>
+        </c:ser>
+        <c:dLbls>
+          <c:showLegendKey val="0"/>
+          <c:showVal val="0"/>
+          <c:showCatName val="0"/>
+          <c:showSerName val="0"/>
+          <c:showPercent val="0"/>
+          <c:showBubbleSize val="0"/>
+        </c:dLbls>
+        <c:axId val="-2101159928"/>
+        <c:axId val="-2100718248"/>
+      </c:areaChart>
+      <c:catAx>
+        <c:axId val="-2101159928"/>
+        <c:scaling>
+          <c:orientation val="minMax"/>
+        </c:scaling>
+        <c:delete val="0"/>
+        <c:axPos val="b"/>
+        <c:numFmt formatCode="General" sourceLinked="1"/>
+        <c:majorTickMark val="out"/>
+        <c:minorTickMark val="none"/>
+        <c:tickLblPos val="nextTo"/>
+        <c:txPr>
+          <a:bodyPr/>
+          <a:lstStyle/>
+          <a:p>
+            <a:pPr>
+              <a:defRPr sz="1000"/>
+            </a:pPr>
+          </a:p>
+        </c:txPr>
+        <c:crossAx val="-2100718248"/>
+        <c:crosses val="autoZero"/>
+        <c:auto val="1"/>
+        <c:lblAlgn val="ctr"/>
+        <c:lblOffset val="100"/>
+        <c:tickLblSkip val="3"/>
+        <c:noMultiLvlLbl val="0"/>
+      </c:catAx>
+      <c:valAx>
+        <c:axId val="-2100718248"/>
+        <c:scaling>
+          <c:orientation val="minMax"/>
+          <c:max val="12500.0"/>
+          <c:min val="0.0"/>
+        </c:scaling>
+        <c:delete val="0"/>
+        <c:axPos val="l"/>
+        <c:majorGridlines>
+          <c:spPr>
+            <a:ln>
+              <a:solidFill>
+                <a:srgbClr val="E6EAE7"/>
+              </a:solidFill>
+            </a:ln>
+          </c:spPr>
+        </c:majorGridlines>
+        <c:numFmt formatCode="$#,##0;[Red]($#,##0);&quot;-&quot;" sourceLinked="0"/>
+        <c:majorTickMark val="out"/>
+        <c:minorTickMark val="none"/>
+        <c:tickLblPos val="nextTo"/>
+        <c:spPr>
+          <a:ln>
+            <a:noFill/>
+          </a:ln>
+        </c:spPr>
+        <c:txPr>
+          <a:bodyPr/>
+          <a:lstStyle/>
+          <a:p>
+            <a:pPr>
+              <a:defRPr sz="1000"/>
+            </a:pPr>
+          </a:p>
+        </c:txPr>
+        <c:crossAx val="-2101159928"/>
+        <c:crosses val="autoZero"/>
+        <c:crossBetween val="midCat"/>
+        <c:majorUnit val="2500.0"/>
+      </c:valAx>
+    </c:plotArea>
+    <c:plotVisOnly val="1"/>
+    <c:dispBlanksAs val="zero"/>
+    <c:showDLblsOverMax val="0"/>
+  </c:chart>
+  <c:txPr>
+    <a:bodyPr/>
+    <a:lstStyle/>
+    <a:p>
+      <a:pPr>
+        <a:defRPr sz="1800">
+          <a:latin typeface="Roboto"/>
+        </a:defRPr>
+      </a:pPr>
+      <a:endParaRPr/>
+    </a:p>
+  </c:txPr>
+  <c:externalData r:id="rId1">
+    <c:autoUpdate val="0"/>
+  </c:externalData>
+</c:chartSpace>
+</file>
+
+<file path=ppt/charts/chart5.xml><?xml version="1.0" encoding="utf-8"?>
+<c:chartSpace xmlns:c="http://schemas.openxmlformats.org/drawingml/2006/chart" xmlns:a="http://schemas.openxmlformats.org/drawingml/2006/main" xmlns:r="http://schemas.openxmlformats.org/officeDocument/2006/relationships">
+  <c:date1904 val="0"/>
+  <c:roundedCorners val="0"/>
+  <c:chart>
+    <c:autoTitleDeleted val="1"/>
+    <c:plotArea>
+      <c:layout>
+        <c:manualLayout>
+          <c:layoutTarget val="inner"/>
+          <c:xMode val="edge"/>
+          <c:yMode val="edge"/>
+          <c:x val="0.11"/>
+          <c:y val="0.05"/>
+          <c:w val="0.86"/>
+          <c:h val="0.8"/>
+        </c:manualLayout>
+      </c:layout>
+      <c:areaChart>
+        <c:grouping val="standard"/>
+        <c:varyColors val="0"/>
+        <c:ser>
+          <c:idx val="0"/>
+          <c:order val="0"/>
+          <c:tx>
+            <c:strRef>
+              <c:f>Sheet1!$B$1</c:f>
+              <c:strCache>
+                <c:ptCount val="1"/>
+                <c:pt idx="0">
+                  <c:v>Spend $</c:v>
+                </c:pt>
+              </c:strCache>
+            </c:strRef>
+          </c:tx>
+          <c:spPr>
+            <a:solidFill>
+              <a:srgbClr val="0E9F6E">
+                <a:alpha val="25000"/>
+              </a:srgbClr>
+            </a:solidFill>
+            <a:ln w="31750">
+              <a:solidFill>
+                <a:srgbClr val="0E9F6E"/>
+              </a:solidFill>
+            </a:ln>
+          </c:spPr>
+          <c:cat>
+            <c:strRef>
+              <c:f>Sheet1!$A$2:$A$25</c:f>
+              <c:strCache>
+                <c:ptCount val="24"/>
+                <c:pt idx="0">
+                  <c:v>Nov 24</c:v>
+                </c:pt>
+                <c:pt idx="1">
+                  <c:v>Dec 24</c:v>
+                </c:pt>
+                <c:pt idx="2">
+                  <c:v>Jan 25</c:v>
+                </c:pt>
+                <c:pt idx="3">
+                  <c:v>Feb 25</c:v>
+                </c:pt>
+                <c:pt idx="4">
+                  <c:v>Mar 25</c:v>
+                </c:pt>
+                <c:pt idx="5">
+                  <c:v>Apr 25</c:v>
+                </c:pt>
+                <c:pt idx="6">
+                  <c:v>May 25</c:v>
+                </c:pt>
+                <c:pt idx="7">
+                  <c:v>Jun 25</c:v>
+                </c:pt>
+                <c:pt idx="8">
+                  <c:v>Jul 25</c:v>
+                </c:pt>
+                <c:pt idx="9">
+                  <c:v>Aug 25</c:v>
+                </c:pt>
+                <c:pt idx="10">
+                  <c:v>Sep 25</c:v>
+                </c:pt>
+                <c:pt idx="11">
+                  <c:v>Oct 25</c:v>
+                </c:pt>
+                <c:pt idx="12">
+                  <c:v>Nov 25</c:v>
+                </c:pt>
+                <c:pt idx="13">
+                  <c:v>Dec 25</c:v>
+                </c:pt>
+                <c:pt idx="14">
+                  <c:v>Jan 26</c:v>
+                </c:pt>
+                <c:pt idx="15">
+                  <c:v>Feb 26</c:v>
+                </c:pt>
+                <c:pt idx="16">
+                  <c:v>Mar 26</c:v>
+                </c:pt>
+                <c:pt idx="17">
+                  <c:v>Apr 26</c:v>
+                </c:pt>
+                <c:pt idx="18">
+                  <c:v>May 26</c:v>
+                </c:pt>
+                <c:pt idx="19">
+                  <c:v>Jun 26</c:v>
+                </c:pt>
+                <c:pt idx="20">
+                  <c:v>Jul 26</c:v>
+                </c:pt>
+                <c:pt idx="21">
+                  <c:v>Aug 26</c:v>
+                </c:pt>
+                <c:pt idx="22">
+                  <c:v>Sep 26</c:v>
+                </c:pt>
+                <c:pt idx="23">
+                  <c:v>Oct 26</c:v>
+                </c:pt>
+              </c:strCache>
+            </c:strRef>
+          </c:cat>
+          <c:val>
+            <c:numRef>
+              <c:f>Sheet1!$B$2:$B$25</c:f>
+              <c:numCache>
+                <c:formatCode>$#,##0;[Red]($#,##0);"-"</c:formatCode>
+                <c:ptCount val="24"/>
+                <c:pt idx="0">
+                  <c:v>0</c:v>
+                </c:pt>
+                <c:pt idx="1">
+                  <c:v>0</c:v>
+                </c:pt>
+                <c:pt idx="2">
+                  <c:v>0</c:v>
+                </c:pt>
+                <c:pt idx="3">
+                  <c:v>0</c:v>
+                </c:pt>
+                <c:pt idx="4">
+                  <c:v>0</c:v>
+                </c:pt>
+                <c:pt idx="5">
+                  <c:v>0</c:v>
+                </c:pt>
+                <c:pt idx="6">
+                  <c:v>0</c:v>
+                </c:pt>
+                <c:pt idx="7">
+                  <c:v>0</c:v>
+                </c:pt>
+                <c:pt idx="8">
+                  <c:v>0</c:v>
+                </c:pt>
+                <c:pt idx="9">
+                  <c:v>0</c:v>
+                </c:pt>
+                <c:pt idx="10">
+                  <c:v>0</c:v>
+                </c:pt>
+                <c:pt idx="11">
+                  <c:v>5160</c:v>
+                </c:pt>
+                <c:pt idx="12">
+                  <c:v>4585</c:v>
+                </c:pt>
+                <c:pt idx="13">
+                  <c:v>5221</c:v>
+                </c:pt>
+                <c:pt idx="14">
+                  <c:v>4426</c:v>
+                </c:pt>
+                <c:pt idx="15">
+                  <c:v>5408</c:v>
+                </c:pt>
+                <c:pt idx="16">
+                  <c:v>5427</c:v>
+                </c:pt>
+                <c:pt idx="17">
+                  <c:v>5509</c:v>
+                </c:pt>
+                <c:pt idx="18">
+                  <c:v>4635</c:v>
+                </c:pt>
+                <c:pt idx="19">
+                  <c:v>4316</c:v>
+                </c:pt>
+                <c:pt idx="20">
+                  <c:v>4813</c:v>
+                </c:pt>
+                <c:pt idx="21">
+                  <c:v>5200</c:v>
+                </c:pt>
+                <c:pt idx="22">
+                  <c:v>4900</c:v>
+                </c:pt>
+                <c:pt idx="23">
+                  <c:v>702</c:v>
+                </c:pt>
+              </c:numCache>
+            </c:numRef>
+          </c:val>
+        </c:ser>
+        <c:dLbls>
+          <c:showLegendKey val="0"/>
+          <c:showVal val="0"/>
+          <c:showCatName val="0"/>
+          <c:showSerName val="0"/>
+          <c:showPercent val="0"/>
+          <c:showBubbleSize val="0"/>
+        </c:dLbls>
+        <c:axId val="-2101159928"/>
+        <c:axId val="-2100718248"/>
+      </c:areaChart>
+      <c:catAx>
+        <c:axId val="-2101159928"/>
+        <c:scaling>
+          <c:orientation val="minMax"/>
+        </c:scaling>
+        <c:delete val="0"/>
+        <c:axPos val="b"/>
+        <c:numFmt formatCode="General" sourceLinked="1"/>
+        <c:majorTickMark val="out"/>
+        <c:minorTickMark val="none"/>
+        <c:tickLblPos val="nextTo"/>
+        <c:txPr>
+          <a:bodyPr/>
+          <a:lstStyle/>
+          <a:p>
+            <a:pPr>
+              <a:defRPr sz="1000"/>
+            </a:pPr>
+          </a:p>
+        </c:txPr>
+        <c:crossAx val="-2100718248"/>
+        <c:crosses val="autoZero"/>
+        <c:auto val="1"/>
+        <c:lblAlgn val="ctr"/>
+        <c:lblOffset val="100"/>
+        <c:tickLblSkip val="3"/>
+        <c:noMultiLvlLbl val="0"/>
+      </c:catAx>
+      <c:valAx>
+        <c:axId val="-2100718248"/>
+        <c:scaling>
+          <c:orientation val="minMax"/>
+          <c:max val="6000.0"/>
+          <c:min val="0.0"/>
+        </c:scaling>
+        <c:delete val="0"/>
+        <c:axPos val="l"/>
+        <c:majorGridlines>
+          <c:spPr>
+            <a:ln>
+              <a:solidFill>
+                <a:srgbClr val="E6EAE7"/>
+              </a:solidFill>
+            </a:ln>
+          </c:spPr>
+        </c:majorGridlines>
+        <c:numFmt formatCode="$#,##0;[Red]($#,##0);&quot;-&quot;" sourceLinked="0"/>
+        <c:majorTickMark val="out"/>
+        <c:minorTickMark val="none"/>
+        <c:tickLblPos val="nextTo"/>
+        <c:spPr>
+          <a:ln>
+            <a:noFill/>
+          </a:ln>
+        </c:spPr>
+        <c:txPr>
+          <a:bodyPr/>
+          <a:lstStyle/>
+          <a:p>
+            <a:pPr>
+              <a:defRPr sz="1000"/>
+            </a:pPr>
+          </a:p>
+        </c:txPr>
+        <c:crossAx val="-2101159928"/>
+        <c:crosses val="autoZero"/>
+        <c:crossBetween val="midCat"/>
+        <c:majorUnit val="2000.0"/>
+      </c:valAx>
+    </c:plotArea>
+    <c:plotVisOnly val="1"/>
+    <c:dispBlanksAs val="zero"/>
+    <c:showDLblsOverMax val="0"/>
+  </c:chart>
+  <c:txPr>
+    <a:bodyPr/>
+    <a:lstStyle/>
+    <a:p>
+      <a:pPr>
+        <a:defRPr sz="1800">
+          <a:latin typeface="Roboto"/>
+        </a:defRPr>
+      </a:pPr>
+      <a:endParaRPr/>
+    </a:p>
+  </c:txPr>
+  <c:externalData r:id="rId1">
+    <c:autoUpdate val="0"/>
+  </c:externalData>
+</c:chartSpace>
+</file>
+
+<file path=ppt/charts/chart6.xml><?xml version="1.0" encoding="utf-8"?>
+<c:chartSpace xmlns:c="http://schemas.openxmlformats.org/drawingml/2006/chart" xmlns:a="http://schemas.openxmlformats.org/drawingml/2006/main" xmlns:r="http://schemas.openxmlformats.org/officeDocument/2006/relationships">
+  <c:date1904 val="0"/>
+  <c:roundedCorners val="0"/>
+  <c:chart>
+    <c:autoTitleDeleted val="1"/>
+    <c:plotArea>
+      <c:layout>
+        <c:manualLayout>
+          <c:layoutTarget val="inner"/>
+          <c:xMode val="edge"/>
+          <c:yMode val="edge"/>
+          <c:x val="0.11"/>
+          <c:y val="0.05"/>
+          <c:w val="0.86"/>
+          <c:h val="0.8"/>
+        </c:manualLayout>
+      </c:layout>
+      <c:areaChart>
+        <c:grouping val="standard"/>
+        <c:varyColors val="0"/>
+        <c:ser>
+          <c:idx val="0"/>
+          <c:order val="0"/>
+          <c:tx>
+            <c:strRef>
+              <c:f>Sheet1!$B$1</c:f>
+              <c:strCache>
+                <c:ptCount val="1"/>
+                <c:pt idx="0">
+                  <c:v>Spend $</c:v>
+                </c:pt>
+              </c:strCache>
+            </c:strRef>
+          </c:tx>
+          <c:spPr>
+            <a:solidFill>
+              <a:srgbClr val="0E9F6E">
+                <a:alpha val="25000"/>
+              </a:srgbClr>
+            </a:solidFill>
+            <a:ln w="31750">
+              <a:solidFill>
+                <a:srgbClr val="0E9F6E"/>
+              </a:solidFill>
+            </a:ln>
+          </c:spPr>
+          <c:cat>
+            <c:strRef>
+              <c:f>Sheet1!$A$2:$A$25</c:f>
+              <c:strCache>
+                <c:ptCount val="24"/>
+                <c:pt idx="0">
+                  <c:v>Nov 24</c:v>
+                </c:pt>
+                <c:pt idx="1">
+                  <c:v>Dec 24</c:v>
+                </c:pt>
+                <c:pt idx="2">
+                  <c:v>Jan 25</c:v>
+                </c:pt>
+                <c:pt idx="3">
+                  <c:v>Feb 25</c:v>
+                </c:pt>
+                <c:pt idx="4">
+                  <c:v>Mar 25</c:v>
+                </c:pt>
+                <c:pt idx="5">
+                  <c:v>Apr 25</c:v>
+                </c:pt>
+                <c:pt idx="6">
+                  <c:v>May 25</c:v>
+                </c:pt>
+                <c:pt idx="7">
+                  <c:v>Jun 25</c:v>
+                </c:pt>
+                <c:pt idx="8">
+                  <c:v>Jul 25</c:v>
+                </c:pt>
+                <c:pt idx="9">
+                  <c:v>Aug 25</c:v>
+                </c:pt>
+                <c:pt idx="10">
+                  <c:v>Sep 25</c:v>
+                </c:pt>
+                <c:pt idx="11">
+                  <c:v>Oct 25</c:v>
+                </c:pt>
+                <c:pt idx="12">
+                  <c:v>Nov 25</c:v>
+                </c:pt>
+                <c:pt idx="13">
+                  <c:v>Dec 25</c:v>
+                </c:pt>
+                <c:pt idx="14">
+                  <c:v>Jan 26</c:v>
+                </c:pt>
+                <c:pt idx="15">
+                  <c:v>Feb 26</c:v>
+                </c:pt>
+                <c:pt idx="16">
+                  <c:v>Mar 26</c:v>
+                </c:pt>
+                <c:pt idx="17">
+                  <c:v>Apr 26</c:v>
+                </c:pt>
+                <c:pt idx="18">
+                  <c:v>May 26</c:v>
+                </c:pt>
+                <c:pt idx="19">
+                  <c:v>Jun 26</c:v>
+                </c:pt>
+                <c:pt idx="20">
+                  <c:v>Jul 26</c:v>
+                </c:pt>
+                <c:pt idx="21">
+                  <c:v>Aug 26</c:v>
+                </c:pt>
+                <c:pt idx="22">
+                  <c:v>Sep 26</c:v>
+                </c:pt>
+                <c:pt idx="23">
+                  <c:v>Oct 26</c:v>
+                </c:pt>
+              </c:strCache>
+            </c:strRef>
+          </c:cat>
+          <c:val>
+            <c:numRef>
+              <c:f>Sheet1!$B$2:$B$25</c:f>
+              <c:numCache>
+                <c:formatCode>$#,##0;[Red]($#,##0);"-"</c:formatCode>
+                <c:ptCount val="24"/>
+                <c:pt idx="0">
+                  <c:v>0</c:v>
+                </c:pt>
+                <c:pt idx="1">
+                  <c:v>0</c:v>
+                </c:pt>
+                <c:pt idx="2">
+                  <c:v>0</c:v>
+                </c:pt>
+                <c:pt idx="3">
+                  <c:v>0</c:v>
+                </c:pt>
+                <c:pt idx="4">
+                  <c:v>0</c:v>
+                </c:pt>
+                <c:pt idx="5">
+                  <c:v>0</c:v>
+                </c:pt>
+                <c:pt idx="6">
+                  <c:v>0</c:v>
+                </c:pt>
+                <c:pt idx="7">
+                  <c:v>0</c:v>
+                </c:pt>
+                <c:pt idx="8">
+                  <c:v>0</c:v>
+                </c:pt>
+                <c:pt idx="9">
+                  <c:v>0</c:v>
+                </c:pt>
+                <c:pt idx="10">
+                  <c:v>0</c:v>
+                </c:pt>
+                <c:pt idx="11">
+                  <c:v>0</c:v>
+                </c:pt>
+                <c:pt idx="12">
+                  <c:v>0</c:v>
+                </c:pt>
+                <c:pt idx="13">
+                  <c:v>0</c:v>
+                </c:pt>
+                <c:pt idx="14">
+                  <c:v>0</c:v>
+                </c:pt>
+                <c:pt idx="15">
+                  <c:v>0</c:v>
+                </c:pt>
+                <c:pt idx="16">
+                  <c:v>0</c:v>
+                </c:pt>
+                <c:pt idx="17">
+                  <c:v>0</c:v>
+                </c:pt>
+                <c:pt idx="18">
+                  <c:v>0</c:v>
+                </c:pt>
+                <c:pt idx="19">
+                  <c:v>0</c:v>
+                </c:pt>
+                <c:pt idx="20">
+                  <c:v>3600</c:v>
+                </c:pt>
+                <c:pt idx="21">
+                  <c:v>4100</c:v>
+                </c:pt>
+                <c:pt idx="22">
+                  <c:v>4300</c:v>
+                </c:pt>
+                <c:pt idx="23">
+                  <c:v>615</c:v>
+                </c:pt>
+              </c:numCache>
+            </c:numRef>
+          </c:val>
+        </c:ser>
+        <c:dLbls>
+          <c:showLegendKey val="0"/>
+          <c:showVal val="0"/>
+          <c:showCatName val="0"/>
+          <c:showSerName val="0"/>
+          <c:showPercent val="0"/>
+          <c:showBubbleSize val="0"/>
+        </c:dLbls>
+        <c:axId val="-2101159928"/>
+        <c:axId val="-2100718248"/>
+      </c:areaChart>
+      <c:catAx>
+        <c:axId val="-2101159928"/>
+        <c:scaling>
+          <c:orientation val="minMax"/>
+        </c:scaling>
+        <c:delete val="0"/>
+        <c:axPos val="b"/>
+        <c:numFmt formatCode="General" sourceLinked="1"/>
+        <c:majorTickMark val="out"/>
+        <c:minorTickMark val="none"/>
+        <c:tickLblPos val="nextTo"/>
+        <c:txPr>
+          <a:bodyPr/>
+          <a:lstStyle/>
+          <a:p>
+            <a:pPr>
+              <a:defRPr sz="1000"/>
+            </a:pPr>
+          </a:p>
+        </c:txPr>
+        <c:crossAx val="-2100718248"/>
+        <c:crosses val="autoZero"/>
+        <c:auto val="1"/>
+        <c:lblAlgn val="ctr"/>
+        <c:lblOffset val="100"/>
+        <c:tickLblSkip val="3"/>
+        <c:noMultiLvlLbl val="0"/>
+      </c:catAx>
+      <c:valAx>
+        <c:axId val="-2100718248"/>
+        <c:scaling>
+          <c:orientation val="minMax"/>
+          <c:max val="5000.0"/>
+          <c:min val="0.0"/>
+        </c:scaling>
+        <c:delete val="0"/>
+        <c:axPos val="l"/>
+        <c:majorGridlines>
+          <c:spPr>
+            <a:ln>
+              <a:solidFill>
+                <a:srgbClr val="E6EAE7"/>
+              </a:solidFill>
+            </a:ln>
+          </c:spPr>
+        </c:majorGridlines>
+        <c:numFmt formatCode="$#,##0;[Red]($#,##0);&quot;-&quot;" sourceLinked="0"/>
+        <c:majorTickMark val="out"/>
+        <c:minorTickMark val="none"/>
+        <c:tickLblPos val="nextTo"/>
+        <c:spPr>
+          <a:ln>
+            <a:noFill/>
+          </a:ln>
+        </c:spPr>
+        <c:txPr>
+          <a:bodyPr/>
+          <a:lstStyle/>
+          <a:p>
+            <a:pPr>
+              <a:defRPr sz="1000"/>
+            </a:pPr>
+          </a:p>
+        </c:txPr>
+        <c:crossAx val="-2101159928"/>
+        <c:crosses val="autoZero"/>
+        <c:crossBetween val="midCat"/>
+        <c:majorUnit val="1000.0"/>
+      </c:valAx>
+    </c:plotArea>
+    <c:plotVisOnly val="1"/>
+    <c:dispBlanksAs val="zero"/>
+    <c:showDLblsOverMax val="0"/>
+  </c:chart>
+  <c:txPr>
+    <a:bodyPr/>
+    <a:lstStyle/>
+    <a:p>
+      <a:pPr>
+        <a:defRPr sz="1800">
+          <a:latin typeface="Roboto"/>
+        </a:defRPr>
+      </a:pPr>
+      <a:endParaRPr/>
+    </a:p>
+  </c:txPr>
+  <c:externalData r:id="rId1">
+    <c:autoUpdate val="0"/>
+  </c:externalData>
+</c:chartSpace>
+</file>
+
+<file path=ppt/charts/chart7.xml><?xml version="1.0" encoding="utf-8"?>
+<c:chartSpace xmlns:c="http://schemas.openxmlformats.org/drawingml/2006/chart" xmlns:a="http://schemas.openxmlformats.org/drawingml/2006/main" xmlns:r="http://schemas.openxmlformats.org/officeDocument/2006/relationships">
+  <c:date1904 val="0"/>
+  <c:roundedCorners val="0"/>
+  <c:chart>
+    <c:autoTitleDeleted val="1"/>
+    <c:plotArea>
+      <c:layout>
+        <c:manualLayout>
+          <c:layoutTarget val="inner"/>
+          <c:xMode val="edge"/>
+          <c:yMode val="edge"/>
+          <c:x val="0.11"/>
+          <c:y val="0.05"/>
+          <c:w val="0.86"/>
+          <c:h val="0.8"/>
+        </c:manualLayout>
+      </c:layout>
+      <c:areaChart>
+        <c:grouping val="standard"/>
+        <c:varyColors val="0"/>
+        <c:ser>
+          <c:idx val="0"/>
+          <c:order val="0"/>
+          <c:tx>
+            <c:strRef>
+              <c:f>Sheet1!$B$1</c:f>
+              <c:strCache>
+                <c:ptCount val="1"/>
+                <c:pt idx="0">
+                  <c:v>Spend $</c:v>
+                </c:pt>
+              </c:strCache>
+            </c:strRef>
+          </c:tx>
+          <c:spPr>
+            <a:solidFill>
+              <a:srgbClr val="0E9F6E">
+                <a:alpha val="25000"/>
+              </a:srgbClr>
+            </a:solidFill>
+            <a:ln w="31750">
+              <a:solidFill>
+                <a:srgbClr val="0E9F6E"/>
+              </a:solidFill>
+            </a:ln>
+          </c:spPr>
+          <c:cat>
+            <c:strRef>
+              <c:f>Sheet1!$A$2:$A$25</c:f>
+              <c:strCache>
+                <c:ptCount val="24"/>
+                <c:pt idx="0">
+                  <c:v>Nov 24</c:v>
+                </c:pt>
+                <c:pt idx="1">
+                  <c:v>Dec 24</c:v>
+                </c:pt>
+                <c:pt idx="2">
+                  <c:v>Jan 25</c:v>
+                </c:pt>
+                <c:pt idx="3">
+                  <c:v>Feb 25</c:v>
+                </c:pt>
+                <c:pt idx="4">
+                  <c:v>Mar 25</c:v>
+                </c:pt>
+                <c:pt idx="5">
+                  <c:v>Apr 25</c:v>
+                </c:pt>
+                <c:pt idx="6">
+                  <c:v>May 25</c:v>
+                </c:pt>
+                <c:pt idx="7">
+                  <c:v>Jun 25</c:v>
+                </c:pt>
+                <c:pt idx="8">
+                  <c:v>Jul 25</c:v>
+                </c:pt>
+                <c:pt idx="9">
+                  <c:v>Aug 25</c:v>
+                </c:pt>
+                <c:pt idx="10">
+                  <c:v>Sep 25</c:v>
+                </c:pt>
+                <c:pt idx="11">
+                  <c:v>Oct 25</c:v>
+                </c:pt>
+                <c:pt idx="12">
+                  <c:v>Nov 25</c:v>
+                </c:pt>
+                <c:pt idx="13">
+                  <c:v>Dec 25</c:v>
+                </c:pt>
+                <c:pt idx="14">
+                  <c:v>Jan 26</c:v>
+                </c:pt>
+                <c:pt idx="15">
+                  <c:v>Feb 26</c:v>
+                </c:pt>
+                <c:pt idx="16">
+                  <c:v>Mar 26</c:v>
+                </c:pt>
+                <c:pt idx="17">
+                  <c:v>Apr 26</c:v>
+                </c:pt>
+                <c:pt idx="18">
+                  <c:v>May 26</c:v>
+                </c:pt>
+                <c:pt idx="19">
+                  <c:v>Jun 26</c:v>
+                </c:pt>
+                <c:pt idx="20">
+                  <c:v>Jul 26</c:v>
+                </c:pt>
+                <c:pt idx="21">
+                  <c:v>Aug 26</c:v>
+                </c:pt>
+                <c:pt idx="22">
+                  <c:v>Sep 26</c:v>
+                </c:pt>
+                <c:pt idx="23">
+                  <c:v>Oct 26</c:v>
+                </c:pt>
+              </c:strCache>
+            </c:strRef>
+          </c:cat>
+          <c:val>
+            <c:numRef>
+              <c:f>Sheet1!$B$2:$B$25</c:f>
+              <c:numCache>
+                <c:formatCode>$#,##0;[Red]($#,##0);"-"</c:formatCode>
+                <c:ptCount val="24"/>
+                <c:pt idx="0">
+                  <c:v>0</c:v>
+                </c:pt>
+                <c:pt idx="1">
+                  <c:v>0</c:v>
+                </c:pt>
+                <c:pt idx="2">
+                  <c:v>0</c:v>
+                </c:pt>
+                <c:pt idx="3">
+                  <c:v>0</c:v>
+                </c:pt>
+                <c:pt idx="4">
+                  <c:v>0</c:v>
+                </c:pt>
+                <c:pt idx="5">
+                  <c:v>0</c:v>
+                </c:pt>
+                <c:pt idx="6">
+                  <c:v>0</c:v>
+                </c:pt>
+                <c:pt idx="7">
+                  <c:v>0</c:v>
+                </c:pt>
+                <c:pt idx="8">
+                  <c:v>0</c:v>
+                </c:pt>
+                <c:pt idx="9">
+                  <c:v>0</c:v>
+                </c:pt>
+                <c:pt idx="10">
+                  <c:v>0</c:v>
+                </c:pt>
+                <c:pt idx="11">
+                  <c:v>0</c:v>
+                </c:pt>
+                <c:pt idx="12">
+                  <c:v>0</c:v>
+                </c:pt>
+                <c:pt idx="13">
+                  <c:v>0</c:v>
+                </c:pt>
+                <c:pt idx="14">
+                  <c:v>0</c:v>
+                </c:pt>
+                <c:pt idx="15">
+                  <c:v>0</c:v>
+                </c:pt>
+                <c:pt idx="16">
+                  <c:v>2932</c:v>
+                </c:pt>
+                <c:pt idx="17">
+                  <c:v>3555</c:v>
+                </c:pt>
+                <c:pt idx="18">
+                  <c:v>2649</c:v>
+                </c:pt>
+                <c:pt idx="19">
+                  <c:v>2699</c:v>
+                </c:pt>
+                <c:pt idx="20">
+                  <c:v>3165</c:v>
+                </c:pt>
+                <c:pt idx="21">
+                  <c:v>3000</c:v>
+                </c:pt>
+                <c:pt idx="22">
+                  <c:v>3000</c:v>
+                </c:pt>
+                <c:pt idx="23">
+                  <c:v>429</c:v>
+                </c:pt>
+              </c:numCache>
+            </c:numRef>
+          </c:val>
+        </c:ser>
+        <c:dLbls>
+          <c:showLegendKey val="0"/>
+          <c:showVal val="0"/>
+          <c:showCatName val="0"/>
+          <c:showSerName val="0"/>
+          <c:showPercent val="0"/>
+          <c:showBubbleSize val="0"/>
+        </c:dLbls>
+        <c:axId val="-2101159928"/>
+        <c:axId val="-2100718248"/>
+      </c:areaChart>
+      <c:catAx>
+        <c:axId val="-2101159928"/>
+        <c:scaling>
+          <c:orientation val="minMax"/>
+        </c:scaling>
+        <c:delete val="0"/>
+        <c:axPos val="b"/>
+        <c:numFmt formatCode="General" sourceLinked="1"/>
+        <c:majorTickMark val="out"/>
+        <c:minorTickMark val="none"/>
+        <c:tickLblPos val="nextTo"/>
+        <c:txPr>
+          <a:bodyPr/>
+          <a:lstStyle/>
+          <a:p>
+            <a:pPr>
+              <a:defRPr sz="1000"/>
+            </a:pPr>
+          </a:p>
+        </c:txPr>
+        <c:crossAx val="-2100718248"/>
+        <c:crosses val="autoZero"/>
+        <c:auto val="1"/>
+        <c:lblAlgn val="ctr"/>
+        <c:lblOffset val="100"/>
+        <c:tickLblSkip val="3"/>
+        <c:noMultiLvlLbl val="0"/>
+      </c:catAx>
+      <c:valAx>
+        <c:axId val="-2100718248"/>
+        <c:scaling>
+          <c:orientation val="minMax"/>
+          <c:max val="4000.0"/>
+          <c:min val="0.0"/>
+        </c:scaling>
+        <c:delete val="0"/>
+        <c:axPos val="l"/>
+        <c:majorGridlines>
+          <c:spPr>
+            <a:ln>
+              <a:solidFill>
+                <a:srgbClr val="E6EAE7"/>
+              </a:solidFill>
+            </a:ln>
+          </c:spPr>
+        </c:majorGridlines>
+        <c:numFmt formatCode="$#,##0;[Red]($#,##0);&quot;-&quot;" sourceLinked="0"/>
+        <c:majorTickMark val="out"/>
+        <c:minorTickMark val="none"/>
+        <c:tickLblPos val="nextTo"/>
+        <c:spPr>
+          <a:ln>
+            <a:noFill/>
+          </a:ln>
+        </c:spPr>
+        <c:txPr>
+          <a:bodyPr/>
+          <a:lstStyle/>
+          <a:p>
+            <a:pPr>
+              <a:defRPr sz="1000"/>
+            </a:pPr>
+          </a:p>
+        </c:txPr>
+        <c:crossAx val="-2101159928"/>
+        <c:crosses val="autoZero"/>
+        <c:crossBetween val="midCat"/>
+        <c:majorUnit val="1000.0"/>
+      </c:valAx>
+    </c:plotArea>
+    <c:plotVisOnly val="1"/>
+    <c:dispBlanksAs val="zero"/>
+    <c:showDLblsOverMax val="0"/>
+  </c:chart>
+  <c:txPr>
+    <a:bodyPr/>
+    <a:lstStyle/>
+    <a:p>
+      <a:pPr>
+        <a:defRPr sz="1800">
+          <a:latin typeface="Roboto"/>
+        </a:defRPr>
+      </a:pPr>
+      <a:endParaRPr/>
+    </a:p>
+  </c:txPr>
+  <c:externalData r:id="rId1">
+    <c:autoUpdate val="0"/>
+  </c:externalData>
+</c:chartSpace>
+</file>
+
+<file path=ppt/notesMasters/notesMaster1.xml><?xml version="1.0" encoding="utf-8"?>
+<p:notesMaster xmlns:a="http://schemas.openxmlformats.org/drawingml/2006/main" xmlns:p="http://schemas.openxmlformats.org/presentationml/2006/main" xmlns:r="http://schemas.openxmlformats.org/officeDocument/2006/relationships">
+  <p:cSld>
+    <p:bg>
+      <p:bgRef idx="1001">
+        <a:schemeClr val="bg1"/>
+      </p:bgRef>
+    </p:bg>
+    <p:spTree>
+      <p:nvGrpSpPr>
+        <p:cNvPr id="1" name=""/>
+        <p:cNvGrpSpPr/>
+        <p:nvPr/>
+      </p:nvGrpSpPr>
+      <p:grpSpPr>
+        <a:xfrm>
+          <a:off x="0" y="0"/>
+          <a:ext cx="0" cy="0"/>
+          <a:chOff x="0" y="0"/>
+          <a:chExt cx="0" cy="0"/>
+        </a:xfrm>
+      </p:grpSpPr>
+      <p:sp>
+        <p:nvSpPr>
+          <p:cNvPr id="2" name="Header Placeholder 1"/>
+          <p:cNvSpPr>
+            <a:spLocks noGrp="1"/>
+          </p:cNvSpPr>
+          <p:nvPr>
+            <p:ph type="hdr" sz="quarter"/>
+          </p:nvPr>
+        </p:nvSpPr>
+        <p:spPr>
+          <a:xfrm>
+            <a:off x="0" y="0"/>
+            <a:ext cx="2971800" cy="457200"/>
+          </a:xfrm>
+          <a:prstGeom prst="rect">
+            <a:avLst/>
+          </a:prstGeom>
+        </p:spPr>
+        <p:txBody>
+          <a:bodyPr vert="horz" lIns="91440" tIns="45720" rIns="91440" bIns="45720" rtlCol="0"/>
+          <a:lstStyle>
+            <a:lvl1pPr algn="l">
+              <a:defRPr sz="1200"/>
+            </a:lvl1pPr>
+          </a:lstStyle>
+          <a:p>
+            <a:endParaRPr lang="en-US"/>
+          </a:p>
+        </p:txBody>
+      </p:sp>
+      <p:sp>
+        <p:nvSpPr>
+          <p:cNvPr id="3" name="Date Placeholder 2"/>
+          <p:cNvSpPr>
+            <a:spLocks noGrp="1"/>
+          </p:cNvSpPr>
+          <p:nvPr>
+            <p:ph type="dt" idx="1"/>
+          </p:nvPr>
+        </p:nvSpPr>
+        <p:spPr>
+          <a:xfrm>
+            <a:off x="3884613" y="0"/>
+            <a:ext cx="2971800" cy="457200"/>
+          </a:xfrm>
+          <a:prstGeom prst="rect">
+            <a:avLst/>
+          </a:prstGeom>
+        </p:spPr>
+        <p:txBody>
+          <a:bodyPr vert="horz" lIns="91440" tIns="45720" rIns="91440" bIns="45720" rtlCol="0"/>
+          <a:lstStyle>
+            <a:lvl1pPr algn="r">
+              <a:defRPr sz="1200"/>
+            </a:lvl1pPr>
+          </a:lstStyle>
+          <a:p>
+            <a:fld id="{0F89C1C7-3DCD-1040-A9CF-14679D8B5DDD}" type="datetimeFigureOut">
+              <a:rPr lang="en-US" smtClean="0"/>
+              <a:t>10/17/16</a:t>
+            </a:fld>
+            <a:endParaRPr lang="en-US"/>
+          </a:p>
+        </p:txBody>
+      </p:sp>
+      <p:sp>
+        <p:nvSpPr>
+          <p:cNvPr id="4" name="Slide Image Placeholder 3"/>
+          <p:cNvSpPr>
+            <a:spLocks noGrp="1" noRot="1" noChangeAspect="1"/>
+          </p:cNvSpPr>
+          <p:nvPr>
+            <p:ph type="sldImg" idx="2"/>
+          </p:nvPr>
+        </p:nvSpPr>
+        <p:spPr>
+          <a:xfrm>
+            <a:off x="1143000" y="685800"/>
+            <a:ext cx="4572000" cy="3429000"/>
+          </a:xfrm>
+          <a:prstGeom prst="rect">
+            <a:avLst/>
+          </a:prstGeom>
+          <a:noFill/>
+          <a:ln w="12700">
+            <a:solidFill>
+              <a:prstClr val="black"/>
+            </a:solidFill>
+          </a:ln>
+        </p:spPr>
+        <p:txBody>
+          <a:bodyPr vert="horz" lIns="91440" tIns="45720" rIns="91440" bIns="45720" rtlCol="0" anchor="ctr"/>
+          <a:lstStyle/>
+          <a:p>
+            <a:endParaRPr lang="en-US"/>
+          </a:p>
+        </p:txBody>
+      </p:sp>
+      <p:sp>
+        <p:nvSpPr>
+          <p:cNvPr id="5" name="Notes Placeholder 4"/>
+          <p:cNvSpPr>
+            <a:spLocks noGrp="1"/>
+          </p:cNvSpPr>
+          <p:nvPr>
+            <p:ph type="body" sz="quarter" idx="3"/>
+          </p:nvPr>
+        </p:nvSpPr>
+        <p:spPr>
+          <a:xfrm>
+            <a:off x="685800" y="4343400"/>
+            <a:ext cx="5486400" cy="4114800"/>
+          </a:xfrm>
+          <a:prstGeom prst="rect">
+            <a:avLst/>
+          </a:prstGeom>
+        </p:spPr>
+        <p:txBody>
+          <a:bodyPr vert="horz" lIns="91440" tIns="45720" rIns="91440" bIns="45720" rtlCol="0"/>
+          <a:lstStyle/>
+          <a:p>
+            <a:pPr lvl="0"/>
+            <a:r>
+              <a:rPr lang="en-US" smtClean="0"/>
+              <a:t>Click to edit Master text styles</a:t>
+            </a:r>
+          </a:p>
+          <a:p>
+            <a:pPr lvl="1"/>
+            <a:r>
+              <a:rPr lang="en-US" smtClean="0"/>
+              <a:t>Second level</a:t>
+            </a:r>
+          </a:p>
+          <a:p>
+            <a:pPr lvl="2"/>
+            <a:r>
+              <a:rPr lang="en-US" smtClean="0"/>
+              <a:t>Third level</a:t>
+            </a:r>
+          </a:p>
+          <a:p>
+            <a:pPr lvl="3"/>
+            <a:r>
+              <a:rPr lang="en-US" smtClean="0"/>
+              <a:t>Fourth level</a:t>
+            </a:r>
+          </a:p>
+          <a:p>
+            <a:pPr lvl="4"/>
+            <a:r>
+              <a:rPr lang="en-US" smtClean="0"/>
+              <a:t>Fifth level</a:t>
+            </a:r>
+            <a:endParaRPr lang="en-US"/>
+          </a:p>
+        </p:txBody>
+      </p:sp>
+      <p:sp>
+        <p:nvSpPr>
+          <p:cNvPr id="6" name="Footer Placeholder 5"/>
+          <p:cNvSpPr>
+            <a:spLocks noGrp="1"/>
+          </p:cNvSpPr>
+          <p:nvPr>
+            <p:ph type="ftr" sz="quarter" idx="4"/>
+          </p:nvPr>
+        </p:nvSpPr>
+        <p:spPr>
+          <a:xfrm>
+            <a:off x="0" y="8685213"/>
+            <a:ext cx="2971800" cy="457200"/>
+          </a:xfrm>
+          <a:prstGeom prst="rect">
+            <a:avLst/>
+          </a:prstGeom>
+        </p:spPr>
+        <p:txBody>
+          <a:bodyPr vert="horz" lIns="91440" tIns="45720" rIns="91440" bIns="45720" rtlCol="0" anchor="b"/>
+          <a:lstStyle>
+            <a:lvl1pPr algn="l">
+              <a:defRPr sz="1200"/>
+            </a:lvl1pPr>
+          </a:lstStyle>
+          <a:p>
+            <a:endParaRPr lang="en-US"/>
+          </a:p>
+        </p:txBody>
+      </p:sp>
+      <p:sp>
+        <p:nvSpPr>
+          <p:cNvPr id="7" name="Slide Number Placeholder 6"/>
+          <p:cNvSpPr>
+            <a:spLocks noGrp="1"/>
+          </p:cNvSpPr>
+          <p:nvPr>
+            <p:ph type="sldNum" sz="quarter" idx="5"/>
+          </p:nvPr>
+        </p:nvSpPr>
+        <p:spPr>
+          <a:xfrm>
+            <a:off x="3884613" y="8685213"/>
+            <a:ext cx="2971800" cy="457200"/>
+          </a:xfrm>
+          <a:prstGeom prst="rect">
+            <a:avLst/>
+          </a:prstGeom>
+        </p:spPr>
+        <p:txBody>
+          <a:bodyPr vert="horz" lIns="91440" tIns="45720" rIns="91440" bIns="45720" rtlCol="0" anchor="b"/>
+          <a:lstStyle>
+            <a:lvl1pPr algn="r">
+              <a:defRPr sz="1200"/>
+            </a:lvl1pPr>
+          </a:lstStyle>
+          <a:p>
+            <a:fld id="{BB5E49A5-4136-284D-997B-48E1D791AD67}" type="slidenum">
+              <a:rPr lang="en-US" smtClean="0"/>
+              <a:t>‹#›</a:t>
+            </a:fld>
+            <a:endParaRPr lang="en-US"/>
+          </a:p>
+        </p:txBody>
+      </p:sp>
+    </p:spTree>
+    <p:extLst>
+      <p:ext uri="{BB962C8B-B14F-4D97-AF65-F5344CB8AC3E}">
+        <p14:creationId xmlns:p14="http://schemas.microsoft.com/office/powerpoint/2010/main" val="2623252185"/>
+      </p:ext>
+    </p:extLst>
+  </p:cSld>
+  <p:clrMap bg1="lt1" tx1="dk1" bg2="lt2" tx2="dk2" accent1="accent1" accent2="accent2" accent3="accent3" accent4="accent4" accent5="accent5" accent6="accent6" hlink="hlink" folHlink="folHlink"/>
+  <p:notesStyle>
+    <a:lvl1pPr marL="0" algn="l" defTabSz="457200" rtl="0" eaLnBrk="1" latinLnBrk="0" hangingPunct="1">
+      <a:defRPr sz="1200" kern="1200">
+        <a:solidFill>
+          <a:schemeClr val="tx1"/>
+        </a:solidFill>
+        <a:latin typeface="+mn-lt"/>
+        <a:ea typeface="+mn-ea"/>
+        <a:cs typeface="+mn-cs"/>
+      </a:defRPr>
+    </a:lvl1pPr>
+    <a:lvl2pPr marL="457200" algn="l" defTabSz="457200" rtl="0" eaLnBrk="1" latinLnBrk="0" hangingPunct="1">
+      <a:defRPr sz="1200" kern="1200">
+        <a:solidFill>
+          <a:schemeClr val="tx1"/>
+        </a:solidFill>
+        <a:latin typeface="+mn-lt"/>
+        <a:ea typeface="+mn-ea"/>
+        <a:cs typeface="+mn-cs"/>
+      </a:defRPr>
+    </a:lvl2pPr>
+    <a:lvl3pPr marL="914400" algn="l" defTabSz="457200" rtl="0" eaLnBrk="1" latinLnBrk="0" hangingPunct="1">
+      <a:defRPr sz="1200" kern="1200">
+        <a:solidFill>
+          <a:schemeClr val="tx1"/>
+        </a:solidFill>
+        <a:latin typeface="+mn-lt"/>
+        <a:ea typeface="+mn-ea"/>
+        <a:cs typeface="+mn-cs"/>
+      </a:defRPr>
+    </a:lvl3pPr>
+    <a:lvl4pPr marL="1371600" algn="l" defTabSz="457200" rtl="0" eaLnBrk="1" latinLnBrk="0" hangingPunct="1">
+      <a:defRPr sz="1200" kern="1200">
+        <a:solidFill>
+          <a:schemeClr val="tx1"/>
+        </a:solidFill>
+        <a:latin typeface="+mn-lt"/>
+        <a:ea typeface="+mn-ea"/>
+        <a:cs typeface="+mn-cs"/>
+      </a:defRPr>
+    </a:lvl4pPr>
+    <a:lvl5pPr marL="1828800" algn="l" defTabSz="457200" rtl="0" eaLnBrk="1" latinLnBrk="0" hangingPunct="1">
+      <a:defRPr sz="1200" kern="1200">
+        <a:solidFill>
+          <a:schemeClr val="tx1"/>
+        </a:solidFill>
+        <a:latin typeface="+mn-lt"/>
+        <a:ea typeface="+mn-ea"/>
+        <a:cs typeface="+mn-cs"/>
+      </a:defRPr>
+    </a:lvl5pPr>
+    <a:lvl6pPr marL="2286000" algn="l" defTabSz="457200" rtl="0" eaLnBrk="1" latinLnBrk="0" hangingPunct="1">
+      <a:defRPr sz="1200" kern="1200">
+        <a:solidFill>
+          <a:schemeClr val="tx1"/>
+        </a:solidFill>
+        <a:latin typeface="+mn-lt"/>
+        <a:ea typeface="+mn-ea"/>
+        <a:cs typeface="+mn-cs"/>
+      </a:defRPr>
+    </a:lvl6pPr>
+    <a:lvl7pPr marL="2743200" algn="l" defTabSz="457200" rtl="0" eaLnBrk="1" latinLnBrk="0" hangingPunct="1">
+      <a:defRPr sz="1200" kern="1200">
+        <a:solidFill>
+          <a:schemeClr val="tx1"/>
+        </a:solidFill>
+        <a:latin typeface="+mn-lt"/>
+        <a:ea typeface="+mn-ea"/>
+        <a:cs typeface="+mn-cs"/>
+      </a:defRPr>
+    </a:lvl7pPr>
+    <a:lvl8pPr marL="3200400" algn="l" defTabSz="457200" rtl="0" eaLnBrk="1" latinLnBrk="0" hangingPunct="1">
+      <a:defRPr sz="1200" kern="1200">
+        <a:solidFill>
+          <a:schemeClr val="tx1"/>
+        </a:solidFill>
+        <a:latin typeface="+mn-lt"/>
+        <a:ea typeface="+mn-ea"/>
+        <a:cs typeface="+mn-cs"/>
+      </a:defRPr>
+    </a:lvl8pPr>
+    <a:lvl9pPr marL="3657600" algn="l" defTabSz="457200" rtl="0" eaLnBrk="1" latinLnBrk="0" hangingPunct="1">
+      <a:defRPr sz="1200" kern="1200">
+        <a:solidFill>
+          <a:schemeClr val="tx1"/>
+        </a:solidFill>
+        <a:latin typeface="+mn-lt"/>
+        <a:ea typeface="+mn-ea"/>
+        <a:cs typeface="+mn-cs"/>
+      </a:defRPr>
+    </a:lvl9pPr>
+  </p:notesStyle>
+</p:notesMaster>
+</file>
+
+<file path=ppt/notesSlides/notesSlide1.xml><?xml version="1.0" encoding="utf-8"?>
+<p:notes xmlns:a="http://schemas.openxmlformats.org/drawingml/2006/main" xmlns:p="http://schemas.openxmlformats.org/presentationml/2006/main" xmlns:r="http://schemas.openxmlformats.org/officeDocument/2006/relationships">
+  <p:cSld>
+    <p:spTree>
+      <p:nvGrpSpPr>
+        <p:cNvPr id="1" name=""/>
+        <p:cNvGrpSpPr/>
+        <p:nvPr/>
+      </p:nvGrpSpPr>
+      <p:grpSpPr>
+        <a:xfrm>
+          <a:off x="0" y="0"/>
+          <a:ext cx="0" cy="0"/>
+          <a:chOff x="0" y="0"/>
+          <a:chExt cx="0" cy="0"/>
+        </a:xfrm>
+      </p:grpSpPr>
+      <p:sp>
+        <p:nvSpPr>
+          <p:cNvPr id="2" name="Slide Image Placeholder 1"/>
+          <p:cNvSpPr>
+            <a:spLocks noGrp="1"/>
+          </p:cNvSpPr>
+          <p:nvPr>
+            <p:ph type="sldImg" idx="2"/>
+          </p:nvPr>
+        </p:nvSpPr>
+        <p:spPr/>
+      </p:sp>
+      <p:sp>
+        <p:nvSpPr>
+          <p:cNvPr id="3" name="Notes Placeholder 2"/>
+          <p:cNvSpPr>
+            <a:spLocks noGrp="1"/>
+          </p:cNvSpPr>
+          <p:nvPr>
+            <p:ph type="body" idx="3" sz="quarter"/>
+          </p:nvPr>
+        </p:nvSpPr>
+        <p:spPr/>
+        <p:txBody>
+          <a:bodyPr/>
+          <a:lstStyle/>
+          <a:p>
+            <a:r>
+              <a:t>What does each program really cost?. Sample Community Services Ltd. Period: October 2026 to date. Each program's full cost: what its grant pays for, plus its fair share of the costs no single grant covers (untied program costs and administration, shared by grant spending). Pick a program and every chart and note follows it.</a:t>
+            </a:r>
+          </a:p>
+        </p:txBody>
+      </p:sp>
+      <p:sp>
+        <p:nvSpPr>
+          <p:cNvPr id="4" name="Slide Number Placeholder 3"/>
+          <p:cNvSpPr>
+            <a:spLocks noGrp="1"/>
+          </p:cNvSpPr>
+          <p:nvPr>
+            <p:ph type="sldNum" idx="5" sz="quarter"/>
+          </p:nvPr>
+        </p:nvSpPr>
+        <p:spPr/>
+      </p:sp>
+    </p:spTree>
+  </p:cSld>
+  <p:clrMapOvr>
+    <a:masterClrMapping/>
+  </p:clrMapOvr>
+</p:notes>
+</file>
+
+<file path=ppt/notesSlides/notesSlide2.xml><?xml version="1.0" encoding="utf-8"?>
+<p:notes xmlns:a="http://schemas.openxmlformats.org/drawingml/2006/main" xmlns:p="http://schemas.openxmlformats.org/presentationml/2006/main" xmlns:r="http://schemas.openxmlformats.org/officeDocument/2006/relationships">
+  <p:cSld>
+    <p:spTree>
+      <p:nvGrpSpPr>
+        <p:cNvPr id="1" name=""/>
+        <p:cNvGrpSpPr/>
+        <p:nvPr/>
+      </p:nvGrpSpPr>
+      <p:grpSpPr>
+        <a:xfrm>
+          <a:off x="0" y="0"/>
+          <a:ext cx="0" cy="0"/>
+          <a:chOff x="0" y="0"/>
+          <a:chExt cx="0" cy="0"/>
+        </a:xfrm>
+      </p:grpSpPr>
+      <p:sp>
+        <p:nvSpPr>
+          <p:cNvPr id="2" name="Slide Image Placeholder 1"/>
+          <p:cNvSpPr>
+            <a:spLocks noGrp="1"/>
+          </p:cNvSpPr>
+          <p:nvPr>
+            <p:ph type="sldImg" idx="2"/>
+          </p:nvPr>
+        </p:nvSpPr>
+        <p:spPr/>
+      </p:sp>
+      <p:sp>
+        <p:nvSpPr>
+          <p:cNvPr id="3" name="Notes Placeholder 2"/>
+          <p:cNvSpPr>
+            <a:spLocks noGrp="1"/>
+          </p:cNvSpPr>
+          <p:nvPr>
+            <p:ph type="body" idx="3" sz="quarter"/>
+          </p:nvPr>
+        </p:nvSpPr>
+        <p:spPr/>
+        <p:txBody>
+          <a:bodyPr/>
+          <a:lstStyle/>
+          <a:p>
+            <a:r>
+              <a:t>All programs. Housing support is the biggest program: $11,022 in October so far once its share of untied program costs and administration is added to $4,458 of grant spending. Shared costs add 147.2% on top of grant spending across all programs. The full cost (not just the grant line) is the number for renewal applications, where the funder lets you recover a share of overheads. Pick a program above to see it on its own.</a:t>
+            </a:r>
+          </a:p>
+        </p:txBody>
+      </p:sp>
+      <p:sp>
+        <p:nvSpPr>
+          <p:cNvPr id="4" name="Slide Number Placeholder 3"/>
+          <p:cNvSpPr>
+            <a:spLocks noGrp="1"/>
+          </p:cNvSpPr>
+          <p:nvPr>
+            <p:ph type="sldNum" idx="5" sz="quarter"/>
+          </p:nvPr>
+        </p:nvSpPr>
+        <p:spPr/>
+      </p:sp>
+    </p:spTree>
+  </p:cSld>
+  <p:clrMapOvr>
+    <a:masterClrMapping/>
+  </p:clrMapOvr>
+</p:notes>
+</file>
+
+<file path=ppt/notesSlides/notesSlide3.xml><?xml version="1.0" encoding="utf-8"?>
+<p:notes xmlns:a="http://schemas.openxmlformats.org/drawingml/2006/main" xmlns:p="http://schemas.openxmlformats.org/presentationml/2006/main" xmlns:r="http://schemas.openxmlformats.org/officeDocument/2006/relationships">
+  <p:cSld>
+    <p:spTree>
+      <p:nvGrpSpPr>
+        <p:cNvPr id="1" name=""/>
+        <p:cNvGrpSpPr/>
+        <p:nvPr/>
+      </p:nvGrpSpPr>
+      <p:grpSpPr>
+        <a:xfrm>
+          <a:off x="0" y="0"/>
+          <a:ext cx="0" cy="0"/>
+          <a:chOff x="0" y="0"/>
+          <a:chExt cx="0" cy="0"/>
+        </a:xfrm>
+      </p:grpSpPr>
+      <p:sp>
+        <p:nvSpPr>
+          <p:cNvPr id="2" name="Slide Image Placeholder 1"/>
+          <p:cNvSpPr>
+            <a:spLocks noGrp="1"/>
+          </p:cNvSpPr>
+          <p:nvPr>
+            <p:ph type="sldImg" idx="2"/>
+          </p:nvPr>
+        </p:nvSpPr>
+        <p:spPr/>
+      </p:sp>
+      <p:sp>
+        <p:nvSpPr>
+          <p:cNvPr id="3" name="Notes Placeholder 2"/>
+          <p:cNvSpPr>
+            <a:spLocks noGrp="1"/>
+          </p:cNvSpPr>
+          <p:nvPr>
+            <p:ph type="body" idx="3" sz="quarter"/>
+          </p:nvPr>
+        </p:nvSpPr>
+        <p:spPr/>
+        <p:txBody>
+          <a:bodyPr/>
+          <a:lstStyle/>
+          <a:p>
+            <a:r>
+              <a:t>Housing support. Housing support cost $11,022 in full in October so far: $4,458 paid by the State Housing Program grant, and $6,564 of shared costs no grant covers. It has spent 87.4% of its budget to date, with $97,842 left and 2 months to go. The full cost is $11,022 a month; $6,564 of it is shared cost the grant doesn't pay for. Worth asking for as much of it as the funder allows at renewal.</a:t>
+            </a:r>
+          </a:p>
+        </p:txBody>
+      </p:sp>
+      <p:sp>
+        <p:nvSpPr>
+          <p:cNvPr id="4" name="Slide Number Placeholder 3"/>
+          <p:cNvSpPr>
+            <a:spLocks noGrp="1"/>
+          </p:cNvSpPr>
+          <p:nvPr>
+            <p:ph type="sldNum" idx="5" sz="quarter"/>
+          </p:nvPr>
+        </p:nvSpPr>
+        <p:spPr/>
+      </p:sp>
+    </p:spTree>
+  </p:cSld>
+  <p:clrMapOvr>
+    <a:masterClrMapping/>
+  </p:clrMapOvr>
+</p:notes>
+</file>
+
+<file path=ppt/notesSlides/notesSlide4.xml><?xml version="1.0" encoding="utf-8"?>
+<p:notes xmlns:a="http://schemas.openxmlformats.org/drawingml/2006/main" xmlns:p="http://schemas.openxmlformats.org/presentationml/2006/main" xmlns:r="http://schemas.openxmlformats.org/officeDocument/2006/relationships">
+  <p:cSld>
+    <p:spTree>
+      <p:nvGrpSpPr>
+        <p:cNvPr id="1" name=""/>
+        <p:cNvGrpSpPr/>
+        <p:nvPr/>
+      </p:nvGrpSpPr>
+      <p:grpSpPr>
+        <a:xfrm>
+          <a:off x="0" y="0"/>
+          <a:ext cx="0" cy="0"/>
+          <a:chOff x="0" y="0"/>
+          <a:chExt cx="0" cy="0"/>
+        </a:xfrm>
+      </p:grpSpPr>
+      <p:sp>
+        <p:nvSpPr>
+          <p:cNvPr id="2" name="Slide Image Placeholder 1"/>
+          <p:cNvSpPr>
+            <a:spLocks noGrp="1"/>
+          </p:cNvSpPr>
+          <p:nvPr>
+            <p:ph type="sldImg" idx="2"/>
+          </p:nvPr>
+        </p:nvSpPr>
+        <p:spPr/>
+      </p:sp>
+      <p:sp>
+        <p:nvSpPr>
+          <p:cNvPr id="3" name="Notes Placeholder 2"/>
+          <p:cNvSpPr>
+            <a:spLocks noGrp="1"/>
+          </p:cNvSpPr>
+          <p:nvPr>
+            <p:ph type="body" idx="3" sz="quarter"/>
+          </p:nvPr>
+        </p:nvSpPr>
+        <p:spPr/>
+        <p:txBody>
+          <a:bodyPr/>
+          <a:lstStyle/>
+          <a:p>
+            <a:r>
+              <a:t>Youth outreach. Youth outreach cost $8,055 in full in October so far: $3,258 paid by the State Department of Families grant, and $4,797 of shared costs no grant covers. It has spent 96.7% of its budget to date, with $170,442 left and 8 months to go. The full cost is $8,055 a month; $4,797 of it is shared cost the grant doesn't pay for. Worth asking for as much of it as the funder allows at renewal.</a:t>
+            </a:r>
+          </a:p>
+        </p:txBody>
+      </p:sp>
+      <p:sp>
+        <p:nvSpPr>
+          <p:cNvPr id="4" name="Slide Number Placeholder 3"/>
+          <p:cNvSpPr>
+            <a:spLocks noGrp="1"/>
+          </p:cNvSpPr>
+          <p:nvPr>
+            <p:ph type="sldNum" idx="5" sz="quarter"/>
+          </p:nvPr>
+        </p:nvSpPr>
+        <p:spPr/>
+      </p:sp>
+    </p:spTree>
+  </p:cSld>
+  <p:clrMapOvr>
+    <a:masterClrMapping/>
+  </p:clrMapOvr>
+</p:notes>
+</file>
+
+<file path=ppt/notesSlides/notesSlide5.xml><?xml version="1.0" encoding="utf-8"?>
+<p:notes xmlns:a="http://schemas.openxmlformats.org/drawingml/2006/main" xmlns:p="http://schemas.openxmlformats.org/presentationml/2006/main" xmlns:r="http://schemas.openxmlformats.org/officeDocument/2006/relationships">
+  <p:cSld>
+    <p:spTree>
+      <p:nvGrpSpPr>
+        <p:cNvPr id="1" name=""/>
+        <p:cNvGrpSpPr/>
+        <p:nvPr/>
+      </p:nvGrpSpPr>
+      <p:grpSpPr>
+        <a:xfrm>
+          <a:off x="0" y="0"/>
+          <a:ext cx="0" cy="0"/>
+          <a:chOff x="0" y="0"/>
+          <a:chExt cx="0" cy="0"/>
+        </a:xfrm>
+      </p:grpSpPr>
+      <p:sp>
+        <p:nvSpPr>
+          <p:cNvPr id="2" name="Slide Image Placeholder 1"/>
+          <p:cNvSpPr>
+            <a:spLocks noGrp="1"/>
+          </p:cNvSpPr>
+          <p:nvPr>
+            <p:ph type="sldImg" idx="2"/>
+          </p:nvPr>
+        </p:nvSpPr>
+        <p:spPr/>
+      </p:sp>
+      <p:sp>
+        <p:nvSpPr>
+          <p:cNvPr id="3" name="Notes Placeholder 2"/>
+          <p:cNvSpPr>
+            <a:spLocks noGrp="1"/>
+          </p:cNvSpPr>
+          <p:nvPr>
+            <p:ph type="body" idx="3" sz="quarter"/>
+          </p:nvPr>
+        </p:nvSpPr>
+        <p:spPr/>
+        <p:txBody>
+          <a:bodyPr/>
+          <a:lstStyle/>
+          <a:p>
+            <a:r>
+              <a:t>Mental health first aid. Mental health first aid cost $3,820 in full in October so far: $1,545 paid by the Federal health program grant, and $2,275 of shared costs no grant covers. It has spent 83.9% of its budget to date, with $61,255 left and 5 months to go. The full cost is $3,820 a month; $2,275 of it is shared cost the grant doesn't pay for. Worth asking for as much of it as the funder allows at renewal.</a:t>
+            </a:r>
+          </a:p>
+        </p:txBody>
+      </p:sp>
+      <p:sp>
+        <p:nvSpPr>
+          <p:cNvPr id="4" name="Slide Number Placeholder 3"/>
+          <p:cNvSpPr>
+            <a:spLocks noGrp="1"/>
+          </p:cNvSpPr>
+          <p:nvPr>
+            <p:ph type="sldNum" idx="5" sz="quarter"/>
+          </p:nvPr>
+        </p:nvSpPr>
+        <p:spPr/>
+      </p:sp>
+    </p:spTree>
+  </p:cSld>
+  <p:clrMapOvr>
+    <a:masterClrMapping/>
+  </p:clrMapOvr>
+</p:notes>
+</file>
+
+<file path=ppt/notesSlides/notesSlide6.xml><?xml version="1.0" encoding="utf-8"?>
+<p:notes xmlns:a="http://schemas.openxmlformats.org/drawingml/2006/main" xmlns:p="http://schemas.openxmlformats.org/presentationml/2006/main" xmlns:r="http://schemas.openxmlformats.org/officeDocument/2006/relationships">
+  <p:cSld>
+    <p:spTree>
+      <p:nvGrpSpPr>
+        <p:cNvPr id="1" name=""/>
+        <p:cNvGrpSpPr/>
+        <p:nvPr/>
+      </p:nvGrpSpPr>
+      <p:grpSpPr>
+        <a:xfrm>
+          <a:off x="0" y="0"/>
+          <a:ext cx="0" cy="0"/>
+          <a:chOff x="0" y="0"/>
+          <a:chExt cx="0" cy="0"/>
+        </a:xfrm>
+      </p:grpSpPr>
+      <p:sp>
+        <p:nvSpPr>
+          <p:cNvPr id="2" name="Slide Image Placeholder 1"/>
+          <p:cNvSpPr>
+            <a:spLocks noGrp="1"/>
+          </p:cNvSpPr>
+          <p:nvPr>
+            <p:ph type="sldImg" idx="2"/>
+          </p:nvPr>
+        </p:nvSpPr>
+        <p:spPr/>
+      </p:sp>
+      <p:sp>
+        <p:nvSpPr>
+          <p:cNvPr id="3" name="Notes Placeholder 2"/>
+          <p:cNvSpPr>
+            <a:spLocks noGrp="1"/>
+          </p:cNvSpPr>
+          <p:nvPr>
+            <p:ph type="body" idx="3" sz="quarter"/>
+          </p:nvPr>
+        </p:nvSpPr>
+        <p:spPr/>
+        <p:txBody>
+          <a:bodyPr/>
+          <a:lstStyle/>
+          <a:p>
+            <a:r>
+              <a:t>Digital literacy. Digital literacy cost $1,736 in full in October so far: $702 paid by the Philanthropic foundation grant, and $1,034 of shared costs no grant covers. It has spent 92.8% of its budget to date, with $29,698 left and 5 months to go. The full cost is $1,736 a month; $1,034 of it is shared cost the grant doesn't pay for. Worth asking for as much of it as the funder allows at renewal.</a:t>
+            </a:r>
+          </a:p>
+        </p:txBody>
+      </p:sp>
+      <p:sp>
+        <p:nvSpPr>
+          <p:cNvPr id="4" name="Slide Number Placeholder 3"/>
+          <p:cNvSpPr>
+            <a:spLocks noGrp="1"/>
+          </p:cNvSpPr>
+          <p:nvPr>
+            <p:ph type="sldNum" idx="5" sz="quarter"/>
+          </p:nvPr>
+        </p:nvSpPr>
+        <p:spPr/>
+      </p:sp>
+    </p:spTree>
+  </p:cSld>
+  <p:clrMapOvr>
+    <a:masterClrMapping/>
+  </p:clrMapOvr>
+</p:notes>
+</file>
+
+<file path=ppt/notesSlides/notesSlide7.xml><?xml version="1.0" encoding="utf-8"?>
+<p:notes xmlns:a="http://schemas.openxmlformats.org/drawingml/2006/main" xmlns:p="http://schemas.openxmlformats.org/presentationml/2006/main" xmlns:r="http://schemas.openxmlformats.org/officeDocument/2006/relationships">
+  <p:cSld>
+    <p:spTree>
+      <p:nvGrpSpPr>
+        <p:cNvPr id="1" name=""/>
+        <p:cNvGrpSpPr/>
+        <p:nvPr/>
+      </p:nvGrpSpPr>
+      <p:grpSpPr>
+        <a:xfrm>
+          <a:off x="0" y="0"/>
+          <a:ext cx="0" cy="0"/>
+          <a:chOff x="0" y="0"/>
+          <a:chExt cx="0" cy="0"/>
+        </a:xfrm>
+      </p:grpSpPr>
+      <p:sp>
+        <p:nvSpPr>
+          <p:cNvPr id="2" name="Slide Image Placeholder 1"/>
+          <p:cNvSpPr>
+            <a:spLocks noGrp="1"/>
+          </p:cNvSpPr>
+          <p:nvPr>
+            <p:ph type="sldImg" idx="2"/>
+          </p:nvPr>
+        </p:nvSpPr>
+        <p:spPr/>
+      </p:sp>
+      <p:sp>
+        <p:nvSpPr>
+          <p:cNvPr id="3" name="Notes Placeholder 2"/>
+          <p:cNvSpPr>
+            <a:spLocks noGrp="1"/>
+          </p:cNvSpPr>
+          <p:nvPr>
+            <p:ph type="body" idx="3" sz="quarter"/>
+          </p:nvPr>
+        </p:nvSpPr>
+        <p:spPr/>
+        <p:txBody>
+          <a:bodyPr/>
+          <a:lstStyle/>
+          <a:p>
+            <a:r>
+              <a:t>Community meals. Community meals cost $1,521 in full in October so far: $615 paid by the Local council community grant grant, and $906 of shared costs no grant covers. It has spent 78.8% of its budget to date, with $35,385 left and 8 months to go. The full cost is $1,521 a month; $906 of it is shared cost the grant doesn't pay for. Worth asking for as much of it as the funder allows at renewal.</a:t>
+            </a:r>
+          </a:p>
+        </p:txBody>
+      </p:sp>
+      <p:sp>
+        <p:nvSpPr>
+          <p:cNvPr id="4" name="Slide Number Placeholder 3"/>
+          <p:cNvSpPr>
+            <a:spLocks noGrp="1"/>
+          </p:cNvSpPr>
+          <p:nvPr>
+            <p:ph type="sldNum" idx="5" sz="quarter"/>
+          </p:nvPr>
+        </p:nvSpPr>
+        <p:spPr/>
+      </p:sp>
+    </p:spTree>
+  </p:cSld>
+  <p:clrMapOvr>
+    <a:masterClrMapping/>
+  </p:clrMapOvr>
+</p:notes>
+</file>
+
+<file path=ppt/notesSlides/notesSlide8.xml><?xml version="1.0" encoding="utf-8"?>
+<p:notes xmlns:a="http://schemas.openxmlformats.org/drawingml/2006/main" xmlns:p="http://schemas.openxmlformats.org/presentationml/2006/main" xmlns:r="http://schemas.openxmlformats.org/officeDocument/2006/relationships">
+  <p:cSld>
+    <p:spTree>
+      <p:nvGrpSpPr>
+        <p:cNvPr id="1" name=""/>
+        <p:cNvGrpSpPr/>
+        <p:nvPr/>
+      </p:nvGrpSpPr>
+      <p:grpSpPr>
+        <a:xfrm>
+          <a:off x="0" y="0"/>
+          <a:ext cx="0" cy="0"/>
+          <a:chOff x="0" y="0"/>
+          <a:chExt cx="0" cy="0"/>
+        </a:xfrm>
+      </p:grpSpPr>
+      <p:sp>
+        <p:nvSpPr>
+          <p:cNvPr id="2" name="Slide Image Placeholder 1"/>
+          <p:cNvSpPr>
+            <a:spLocks noGrp="1"/>
+          </p:cNvSpPr>
+          <p:nvPr>
+            <p:ph type="sldImg" idx="2"/>
+          </p:nvPr>
+        </p:nvSpPr>
+        <p:spPr/>
+      </p:sp>
+      <p:sp>
+        <p:nvSpPr>
+          <p:cNvPr id="3" name="Notes Placeholder 2"/>
+          <p:cNvSpPr>
+            <a:spLocks noGrp="1"/>
+          </p:cNvSpPr>
+          <p:nvPr>
+            <p:ph type="body" idx="3" sz="quarter"/>
+          </p:nvPr>
+        </p:nvSpPr>
+        <p:spPr/>
+        <p:txBody>
+          <a:bodyPr/>
+          <a:lstStyle/>
+          <a:p>
+            <a:r>
+              <a:t>Volunteer coordinator. Volunteer coordinator cost $1,061 in full in October so far: $429 paid by the State volunteering grant grant, and $632 of shared costs no grant covers. It has spent 89.3% of its budget to date, with $14,571 left and 4 months to go. The full cost is $1,061 a month; $632 of it is shared cost the grant doesn't pay for. Worth asking for as much of it as the funder allows at renewal.</a:t>
+            </a:r>
+          </a:p>
+        </p:txBody>
+      </p:sp>
+      <p:sp>
+        <p:nvSpPr>
+          <p:cNvPr id="4" name="Slide Number Placeholder 3"/>
+          <p:cNvSpPr>
+            <a:spLocks noGrp="1"/>
+          </p:cNvSpPr>
+          <p:nvPr>
+            <p:ph type="sldNum" idx="5" sz="quarter"/>
+          </p:nvPr>
+        </p:nvSpPr>
+        <p:spPr/>
+      </p:sp>
+    </p:spTree>
+  </p:cSld>
+  <p:clrMapOvr>
+    <a:masterClrMapping/>
+  </p:clrMapOvr>
+</p:notes>
 </file>
 
 <file path=ppt/slideLayouts/slideLayout1.xml><?xml version="1.0" encoding="utf-8"?>
@@ -3822,7 +6105,44 @@
       <p:grpSpPr/>
       <p:sp>
         <p:nvSpPr>
-          <p:cNvPr id="2" name="Rectangle 1"/>
+          <p:cNvPr id="2" name="Title 1"/>
+          <p:cNvSpPr>
+            <a:spLocks noGrp="1"/>
+          </p:cNvSpPr>
+          <p:nvPr>
+            <p:ph type="ctrTitle"/>
+          </p:nvPr>
+        </p:nvSpPr>
+        <p:spPr>
+          <a:xfrm>
+            <a:off x="457200" y="1965960"/>
+            <a:ext cx="11277295" cy="1097280"/>
+          </a:xfrm>
+        </p:spPr>
+        <p:txBody>
+          <a:bodyPr wrap="square"/>
+          <a:lstStyle/>
+          <a:p>
+            <a:pPr algn="l">
+              <a:defRPr>
+                <a:latin typeface="Roboto"/>
+              </a:defRPr>
+            </a:pPr>
+            <a:r>
+              <a:rPr sz="3400" b="1">
+                <a:solidFill>
+                  <a:srgbClr val="25342A"/>
+                </a:solidFill>
+                <a:latin typeface="Roboto"/>
+              </a:rPr>
+              <a:t>What does each program really cost?</a:t>
+            </a:r>
+          </a:p>
+        </p:txBody>
+      </p:sp>
+      <p:sp>
+        <p:nvSpPr>
+          <p:cNvPr id="3" name="Rectangle 2"/>
           <p:cNvSpPr/>
           <p:nvPr/>
         </p:nvSpPr>
@@ -3878,7 +6198,7 @@
       </p:sp>
       <p:sp>
         <p:nvSpPr>
-          <p:cNvPr id="3" name="TextBox 2"/>
+          <p:cNvPr id="4" name="TextBox 3"/>
           <p:cNvSpPr txBox="1"/>
           <p:nvPr/>
         </p:nvSpPr>
@@ -3893,7 +6213,7 @@
           <a:noFill/>
         </p:spPr>
         <p:txBody>
-          <a:bodyPr wrap="square">
+          <a:bodyPr wrap="square" lIns="45720" rIns="45720">
             <a:spAutoFit/>
           </a:bodyPr>
           <a:lstStyle/>
@@ -3917,7 +6237,7 @@
       </p:sp>
       <p:sp>
         <p:nvSpPr>
-          <p:cNvPr id="4" name="TextBox 3"/>
+          <p:cNvPr id="5" name="TextBox 4"/>
           <p:cNvSpPr txBox="1"/>
           <p:nvPr/>
         </p:nvSpPr>
@@ -3932,7 +6252,7 @@
           <a:noFill/>
         </p:spPr>
         <p:txBody>
-          <a:bodyPr wrap="square">
+          <a:bodyPr wrap="square" lIns="45720" rIns="45720">
             <a:spAutoFit/>
           </a:bodyPr>
           <a:lstStyle/>
@@ -3956,14 +6276,14 @@
       </p:sp>
       <p:sp>
         <p:nvSpPr>
-          <p:cNvPr id="5" name="TextBox 4"/>
+          <p:cNvPr id="6" name="TextBox 5"/>
           <p:cNvSpPr txBox="1"/>
           <p:nvPr/>
         </p:nvSpPr>
         <p:spPr>
           <a:xfrm>
-            <a:off x="457200" y="2011680"/>
-            <a:ext cx="11247120" cy="1097280"/>
+            <a:off x="457200" y="3154680"/>
+            <a:ext cx="11277295" cy="457200"/>
           </a:xfrm>
           <a:prstGeom prst="rect">
             <a:avLst/>
@@ -3971,7 +6291,7 @@
           <a:noFill/>
         </p:spPr>
         <p:txBody>
-          <a:bodyPr wrap="square">
+          <a:bodyPr wrap="square" lIns="45720" rIns="45720">
             <a:spAutoFit/>
           </a:bodyPr>
           <a:lstStyle/>
@@ -3982,27 +6302,27 @@
               </a:defRPr>
             </a:pPr>
             <a:r>
-              <a:rPr sz="3400" b="1">
+              <a:rPr sz="1600" b="0">
                 <a:solidFill>
-                  <a:srgbClr val="25342A"/>
+                  <a:srgbClr val="5F6F63"/>
                 </a:solidFill>
                 <a:latin typeface="Roboto"/>
               </a:rPr>
-              <a:t>What does each program really cost?</a:t>
-            </a:r>
-          </a:p>
-        </p:txBody>
-      </p:sp>
-      <p:sp>
-        <p:nvSpPr>
-          <p:cNvPr id="6" name="TextBox 5"/>
+              <a:t>Sample Community Services Ltd</a:t>
+            </a:r>
+          </a:p>
+        </p:txBody>
+      </p:sp>
+      <p:sp>
+        <p:nvSpPr>
+          <p:cNvPr id="7" name="TextBox 6"/>
           <p:cNvSpPr txBox="1"/>
           <p:nvPr/>
         </p:nvSpPr>
         <p:spPr>
           <a:xfrm>
-            <a:off x="457200" y="3154680"/>
-            <a:ext cx="11247120" cy="457200"/>
+            <a:off x="457200" y="3703320"/>
+            <a:ext cx="11277295" cy="758190"/>
           </a:xfrm>
           <a:prstGeom prst="rect">
             <a:avLst/>
@@ -4010,7 +6330,7 @@
           <a:noFill/>
         </p:spPr>
         <p:txBody>
-          <a:bodyPr wrap="square">
+          <a:bodyPr wrap="square" lIns="45720" rIns="45720">
             <a:spAutoFit/>
           </a:bodyPr>
           <a:lstStyle/>
@@ -4021,27 +6341,27 @@
               </a:defRPr>
             </a:pPr>
             <a:r>
-              <a:rPr sz="1600" b="0">
+              <a:rPr sz="1400" b="0">
                 <a:solidFill>
-                  <a:srgbClr val="5F6F63"/>
+                  <a:srgbClr val="25342A"/>
                 </a:solidFill>
                 <a:latin typeface="Roboto"/>
               </a:rPr>
-              <a:t>Sample Community Services Ltd</a:t>
-            </a:r>
-          </a:p>
-        </p:txBody>
-      </p:sp>
-      <p:sp>
-        <p:nvSpPr>
-          <p:cNvPr id="7" name="TextBox 6"/>
+              <a:t>Period: October 2026 to date. Each program's full cost: what its grant pays for, plus its fair share of the costs no single grant covers (untied program costs and administration, shared by grant spending). Pick a program and every chart and note follows it.</a:t>
+            </a:r>
+          </a:p>
+        </p:txBody>
+      </p:sp>
+      <p:sp>
+        <p:nvSpPr>
+          <p:cNvPr id="8" name="TextBox 7"/>
           <p:cNvSpPr txBox="1"/>
           <p:nvPr/>
         </p:nvSpPr>
         <p:spPr>
           <a:xfrm>
-            <a:off x="457200" y="3703320"/>
-            <a:ext cx="11247120" cy="1097280"/>
+            <a:off x="457200" y="4552950"/>
+            <a:ext cx="11277295" cy="1097280"/>
           </a:xfrm>
           <a:prstGeom prst="rect">
             <a:avLst/>
@@ -4049,7 +6369,7 @@
           <a:noFill/>
         </p:spPr>
         <p:txBody>
-          <a:bodyPr wrap="square">
+          <a:bodyPr wrap="square" lIns="45720" rIns="45720">
             <a:spAutoFit/>
           </a:bodyPr>
           <a:lstStyle/>
@@ -4060,27 +6380,59 @@
               </a:defRPr>
             </a:pPr>
             <a:r>
-              <a:rPr sz="1400" b="0">
+              <a:rPr sz="1100" b="0">
                 <a:solidFill>
-                  <a:srgbClr val="25342A"/>
+                  <a:srgbClr val="5F6F63"/>
                 </a:solidFill>
                 <a:latin typeface="Roboto"/>
               </a:rPr>
-              <a:t>Period: October 2026 to date. Each program's full cost: what its grant pays for, plus its fair share of the costs no single grant covers (untied program costs and administration, shared by grant spending). Pick a program and every chart and note follows it.</a:t>
-            </a:r>
-          </a:p>
-        </p:txBody>
-      </p:sp>
-      <p:sp>
-        <p:nvSpPr>
-          <p:cNvPr id="8" name="TextBox 7"/>
+              <a:t>How final is this data?</a:t>
+            </a:r>
+          </a:p>
+          <a:p>
+            <a:pPr>
+              <a:defRPr>
+                <a:latin typeface="Roboto"/>
+              </a:defRPr>
+            </a:pPr>
+            <a:r>
+              <a:rPr sz="1100" b="0">
+                <a:solidFill>
+                  <a:srgbClr val="5F6F63"/>
+                </a:solidFill>
+                <a:latin typeface="Roboto"/>
+              </a:rPr>
+              <a:t>September 2026: Locked. September 2026 is locked (closed 2 Oct 2026). These numbers won't change.</a:t>
+            </a:r>
+          </a:p>
+          <a:p>
+            <a:pPr>
+              <a:defRPr>
+                <a:latin typeface="Roboto"/>
+              </a:defRPr>
+            </a:pPr>
+            <a:r>
+              <a:rPr sz="1100" b="0">
+                <a:solidFill>
+                  <a:srgbClr val="5F6F63"/>
+                </a:solidFill>
+                <a:latin typeface="Roboto"/>
+              </a:rPr>
+              <a:t>October 2026: Incomplete. October 2026 is still in progress: figures to 6 Oct only.</a:t>
+            </a:r>
+          </a:p>
+        </p:txBody>
+      </p:sp>
+      <p:sp>
+        <p:nvSpPr>
+          <p:cNvPr id="9" name="TextBox 8"/>
           <p:cNvSpPr txBox="1"/>
           <p:nvPr/>
         </p:nvSpPr>
         <p:spPr>
           <a:xfrm>
-            <a:off x="457200" y="4937760"/>
-            <a:ext cx="11247120" cy="1097280"/>
+            <a:off x="457200" y="6492240"/>
+            <a:ext cx="2926080" cy="274320"/>
           </a:xfrm>
           <a:prstGeom prst="rect">
             <a:avLst/>
@@ -4088,7 +6440,7 @@
           <a:noFill/>
         </p:spPr>
         <p:txBody>
-          <a:bodyPr wrap="square">
+          <a:bodyPr wrap="square" lIns="45720" rIns="45720">
             <a:spAutoFit/>
           </a:bodyPr>
           <a:lstStyle/>
@@ -4099,59 +6451,27 @@
               </a:defRPr>
             </a:pPr>
             <a:r>
-              <a:rPr sz="1100" b="0">
+              <a:rPr sz="900" b="0">
                 <a:solidFill>
                   <a:srgbClr val="5F6F63"/>
                 </a:solidFill>
                 <a:latin typeface="Roboto"/>
               </a:rPr>
-              <a:t>How final is this data?</a:t>
-            </a:r>
-          </a:p>
-          <a:p>
-            <a:pPr>
-              <a:defRPr>
-                <a:latin typeface="Roboto"/>
-              </a:defRPr>
-            </a:pPr>
-            <a:r>
-              <a:rPr sz="1100" b="0">
-                <a:solidFill>
-                  <a:srgbClr val="5F6F63"/>
-                </a:solidFill>
-                <a:latin typeface="Roboto"/>
-              </a:rPr>
-              <a:t>September 2026: Locked. September 2026 is locked (closed 2 Oct 2026). These numbers won't change.</a:t>
-            </a:r>
-          </a:p>
-          <a:p>
-            <a:pPr>
-              <a:defRPr>
-                <a:latin typeface="Roboto"/>
-              </a:defRPr>
-            </a:pPr>
-            <a:r>
-              <a:rPr sz="1100" b="0">
-                <a:solidFill>
-                  <a:srgbClr val="5F6F63"/>
-                </a:solidFill>
-                <a:latin typeface="Roboto"/>
-              </a:rPr>
-              <a:t>October 2026: Incomplete. October 2026 is still in progress: figures to 6 Oct only.</a:t>
-            </a:r>
-          </a:p>
-        </p:txBody>
-      </p:sp>
-      <p:sp>
-        <p:nvSpPr>
-          <p:cNvPr id="9" name="TextBox 8"/>
+              <a:t>program-cost.pptx</a:t>
+            </a:r>
+          </a:p>
+        </p:txBody>
+      </p:sp>
+      <p:sp>
+        <p:nvSpPr>
+          <p:cNvPr id="10" name="TextBox 9"/>
           <p:cNvSpPr txBox="1"/>
           <p:nvPr/>
         </p:nvSpPr>
         <p:spPr>
           <a:xfrm>
-            <a:off x="457200" y="6492240"/>
-            <a:ext cx="3657600" cy="274320"/>
+            <a:off x="3108960" y="6492240"/>
+            <a:ext cx="5943600" cy="274320"/>
           </a:xfrm>
           <a:prstGeom prst="rect">
             <a:avLst/>
@@ -4159,12 +6479,12 @@
           <a:noFill/>
         </p:spPr>
         <p:txBody>
-          <a:bodyPr wrap="square">
+          <a:bodyPr wrap="square" lIns="45720" rIns="45720">
             <a:spAutoFit/>
           </a:bodyPr>
           <a:lstStyle/>
           <a:p>
-            <a:pPr>
+            <a:pPr algn="ctr">
               <a:defRPr>
                 <a:latin typeface="Roboto"/>
               </a:defRPr>
@@ -4176,21 +6496,21 @@
                 </a:solidFill>
                 <a:latin typeface="Roboto"/>
               </a:rPr>
-              <a:t>program-cost.pptx</a:t>
-            </a:r>
-          </a:p>
-        </p:txBody>
-      </p:sp>
-      <p:sp>
-        <p:nvSpPr>
-          <p:cNvPr id="10" name="TextBox 9"/>
+              <a:t>Data retrieved 2pm, Tue 6 Oct 2026 · Generated 8 Oct 2026, 9:35am · Sample data · Made with Python (python-pptx)</a:t>
+            </a:r>
+          </a:p>
+        </p:txBody>
+      </p:sp>
+      <p:sp>
+        <p:nvSpPr>
+          <p:cNvPr id="11" name="TextBox 10"/>
           <p:cNvSpPr txBox="1"/>
           <p:nvPr/>
         </p:nvSpPr>
         <p:spPr>
           <a:xfrm>
-            <a:off x="4297680" y="6492240"/>
-            <a:ext cx="3657600" cy="274320"/>
+            <a:off x="8503920" y="6492240"/>
+            <a:ext cx="3200400" cy="274320"/>
           </a:xfrm>
           <a:prstGeom prst="rect">
             <a:avLst/>
@@ -4198,12 +6518,12 @@
           <a:noFill/>
         </p:spPr>
         <p:txBody>
-          <a:bodyPr wrap="square">
+          <a:bodyPr wrap="square" lIns="45720" rIns="45720">
             <a:spAutoFit/>
           </a:bodyPr>
           <a:lstStyle/>
           <a:p>
-            <a:pPr algn="ctr">
+            <a:pPr algn="r">
               <a:defRPr>
                 <a:latin typeface="Roboto"/>
               </a:defRPr>
@@ -4215,877 +6535,7 @@
                 </a:solidFill>
                 <a:latin typeface="Roboto"/>
               </a:rPr>
-              <a:t>Data retrieved 2pm, Tue 6 Oct 2026 · Sample data</a:t>
-            </a:r>
-          </a:p>
-        </p:txBody>
-      </p:sp>
-      <p:sp>
-        <p:nvSpPr>
-          <p:cNvPr id="11" name="TextBox 10"/>
-          <p:cNvSpPr txBox="1"/>
-          <p:nvPr/>
-        </p:nvSpPr>
-        <p:spPr>
-          <a:xfrm>
-            <a:off x="8503920" y="6492240"/>
-            <a:ext cx="3200400" cy="274320"/>
-          </a:xfrm>
-          <a:prstGeom prst="rect">
-            <a:avLst/>
-          </a:prstGeom>
-          <a:noFill/>
-        </p:spPr>
-        <p:txBody>
-          <a:bodyPr wrap="square">
-            <a:spAutoFit/>
-          </a:bodyPr>
-          <a:lstStyle/>
-          <a:p>
-            <a:pPr algn="r">
-              <a:defRPr>
-                <a:latin typeface="Roboto"/>
-              </a:defRPr>
-            </a:pPr>
-            <a:r>
-              <a:rPr sz="900" b="0">
-                <a:solidFill>
-                  <a:srgbClr val="5F6F63"/>
-                </a:solidFill>
-                <a:latin typeface="Roboto"/>
-              </a:rPr>
-              <a:t>Slide 1 of 11</a:t>
-            </a:r>
-          </a:p>
-        </p:txBody>
-      </p:sp>
-    </p:spTree>
-  </p:cSld>
-  <p:clrMapOvr>
-    <a:masterClrMapping/>
-  </p:clrMapOvr>
-</p:sld>
-</file>
-
-<file path=ppt/slides/slide10.xml><?xml version="1.0" encoding="utf-8"?>
-<p:sld xmlns:a="http://schemas.openxmlformats.org/drawingml/2006/main" xmlns:p="http://schemas.openxmlformats.org/presentationml/2006/main" xmlns:r="http://schemas.openxmlformats.org/officeDocument/2006/relationships">
-  <p:cSld>
-    <p:spTree>
-      <p:nvGrpSpPr>
-        <p:cNvPr id="1" name=""/>
-        <p:cNvGrpSpPr/>
-        <p:nvPr/>
-      </p:nvGrpSpPr>
-      <p:grpSpPr/>
-      <p:sp>
-        <p:nvSpPr>
-          <p:cNvPr id="2" name="Rectangle 1"/>
-          <p:cNvSpPr/>
-          <p:nvPr/>
-        </p:nvSpPr>
-        <p:spPr>
-          <a:xfrm>
-            <a:off x="0" y="0"/>
-            <a:ext cx="12191695" cy="73152"/>
-          </a:xfrm>
-          <a:prstGeom prst="rect">
-            <a:avLst/>
-          </a:prstGeom>
-          <a:solidFill>
-            <a:srgbClr val="2F7A5D"/>
-          </a:solidFill>
-          <a:ln>
-            <a:noFill/>
-          </a:ln>
-        </p:spPr>
-        <p:style>
-          <a:lnRef idx="1">
-            <a:schemeClr val="accent1"/>
-          </a:lnRef>
-          <a:fillRef idx="3">
-            <a:schemeClr val="accent1"/>
-          </a:fillRef>
-          <a:effectRef idx="2">
-            <a:schemeClr val="accent1"/>
-          </a:effectRef>
-          <a:fontRef idx="minor">
-            <a:schemeClr val="lt1"/>
-          </a:fontRef>
-        </p:style>
-        <p:txBody>
-          <a:bodyPr rtlCol="0" anchor="ctr"/>
-          <a:lstStyle/>
-          <a:p>
-            <a:pPr algn="ctr">
-              <a:defRPr>
-                <a:latin typeface="Roboto"/>
-              </a:defRPr>
-            </a:pPr>
-          </a:p>
-        </p:txBody>
-      </p:sp>
-      <p:sp>
-        <p:nvSpPr>
-          <p:cNvPr id="3" name="TextBox 2"/>
-          <p:cNvSpPr txBox="1"/>
-          <p:nvPr/>
-        </p:nvSpPr>
-        <p:spPr>
-          <a:xfrm>
-            <a:off x="457200" y="164592"/>
-            <a:ext cx="7315200" cy="274320"/>
-          </a:xfrm>
-          <a:prstGeom prst="rect">
-            <a:avLst/>
-          </a:prstGeom>
-          <a:noFill/>
-        </p:spPr>
-        <p:txBody>
-          <a:bodyPr wrap="square">
-            <a:spAutoFit/>
-          </a:bodyPr>
-          <a:lstStyle/>
-          <a:p>
-            <a:pPr>
-              <a:defRPr>
-                <a:latin typeface="Roboto"/>
-              </a:defRPr>
-            </a:pPr>
-            <a:r>
-              <a:rPr sz="1000" b="0">
-                <a:solidFill>
-                  <a:srgbClr val="5F6F63"/>
-                </a:solidFill>
-                <a:latin typeface="Roboto"/>
-              </a:rPr>
-              <a:t>Sample Community Services Ltd · What does each program really cost?</a:t>
-            </a:r>
-          </a:p>
-        </p:txBody>
-      </p:sp>
-      <p:sp>
-        <p:nvSpPr>
-          <p:cNvPr id="4" name="TextBox 3"/>
-          <p:cNvSpPr txBox="1"/>
-          <p:nvPr/>
-        </p:nvSpPr>
-        <p:spPr>
-          <a:xfrm>
-            <a:off x="457200" y="411480"/>
-            <a:ext cx="11247120" cy="548640"/>
-          </a:xfrm>
-          <a:prstGeom prst="rect">
-            <a:avLst/>
-          </a:prstGeom>
-          <a:noFill/>
-        </p:spPr>
-        <p:txBody>
-          <a:bodyPr wrap="square">
-            <a:spAutoFit/>
-          </a:bodyPr>
-          <a:lstStyle/>
-          <a:p>
-            <a:pPr>
-              <a:defRPr>
-                <a:latin typeface="Roboto"/>
-              </a:defRPr>
-            </a:pPr>
-            <a:r>
-              <a:rPr sz="2400" b="1">
-                <a:solidFill>
-                  <a:srgbClr val="25342A"/>
-                </a:solidFill>
-                <a:latin typeface="Roboto"/>
-              </a:rPr>
-              <a:t>What it shows · Program: Volunteer coordinator</a:t>
-            </a:r>
-          </a:p>
-        </p:txBody>
-      </p:sp>
-      <p:sp>
-        <p:nvSpPr>
-          <p:cNvPr id="5" name="Rectangle 4"/>
-          <p:cNvSpPr/>
-          <p:nvPr/>
-        </p:nvSpPr>
-        <p:spPr>
-          <a:xfrm>
-            <a:off x="457200" y="1554480"/>
-            <a:ext cx="5501487" cy="4389120"/>
-          </a:xfrm>
-          <a:prstGeom prst="rect">
-            <a:avLst/>
-          </a:prstGeom>
-          <a:solidFill>
-            <a:srgbClr val="FFFFFF"/>
-          </a:solidFill>
-          <a:ln>
-            <a:solidFill>
-              <a:srgbClr val="DCE8DC"/>
-            </a:solidFill>
-          </a:ln>
-        </p:spPr>
-        <p:style>
-          <a:lnRef idx="1">
-            <a:schemeClr val="accent1"/>
-          </a:lnRef>
-          <a:fillRef idx="3">
-            <a:schemeClr val="accent1"/>
-          </a:fillRef>
-          <a:effectRef idx="2">
-            <a:schemeClr val="accent1"/>
-          </a:effectRef>
-          <a:fontRef idx="minor">
-            <a:schemeClr val="lt1"/>
-          </a:fontRef>
-        </p:style>
-        <p:txBody>
-          <a:bodyPr rtlCol="0" anchor="ctr"/>
-          <a:lstStyle/>
-          <a:p>
-            <a:pPr algn="ctr">
-              <a:defRPr>
-                <a:latin typeface="Roboto"/>
-              </a:defRPr>
-            </a:pPr>
-          </a:p>
-        </p:txBody>
-      </p:sp>
-      <p:sp>
-        <p:nvSpPr>
-          <p:cNvPr id="6" name="TextBox 5"/>
-          <p:cNvSpPr txBox="1"/>
-          <p:nvPr/>
-        </p:nvSpPr>
-        <p:spPr>
-          <a:xfrm>
-            <a:off x="685800" y="1691640"/>
-            <a:ext cx="5044287" cy="365760"/>
-          </a:xfrm>
-          <a:prstGeom prst="rect">
-            <a:avLst/>
-          </a:prstGeom>
-          <a:noFill/>
-        </p:spPr>
-        <p:txBody>
-          <a:bodyPr wrap="square">
-            <a:spAutoFit/>
-          </a:bodyPr>
-          <a:lstStyle/>
-          <a:p>
-            <a:pPr>
-              <a:defRPr>
-                <a:latin typeface="Roboto"/>
-              </a:defRPr>
-            </a:pPr>
-            <a:r>
-              <a:rPr sz="1100" b="1">
-                <a:solidFill>
-                  <a:srgbClr val="5F6F63"/>
-                </a:solidFill>
-                <a:latin typeface="Roboto"/>
-              </a:rPr>
-              <a:t>WHAT IT SHOWS</a:t>
-            </a:r>
-          </a:p>
-        </p:txBody>
-      </p:sp>
-      <p:sp>
-        <p:nvSpPr>
-          <p:cNvPr id="7" name="TextBox 6"/>
-          <p:cNvSpPr txBox="1"/>
-          <p:nvPr/>
-        </p:nvSpPr>
-        <p:spPr>
-          <a:xfrm>
-            <a:off x="685800" y="2103120"/>
-            <a:ext cx="5044287" cy="3749039"/>
-          </a:xfrm>
-          <a:prstGeom prst="rect">
-            <a:avLst/>
-          </a:prstGeom>
-          <a:noFill/>
-        </p:spPr>
-        <p:txBody>
-          <a:bodyPr wrap="square">
-            <a:spAutoFit/>
-          </a:bodyPr>
-          <a:lstStyle/>
-          <a:p>
-            <a:pPr>
-              <a:defRPr>
-                <a:latin typeface="Roboto"/>
-              </a:defRPr>
-            </a:pPr>
-            <a:r>
-              <a:rPr sz="1600" b="0">
-                <a:solidFill>
-                  <a:srgbClr val="25342A"/>
-                </a:solidFill>
-                <a:latin typeface="Roboto"/>
-              </a:rPr>
-              <a:t>Volunteer coordinator cost $1,061 in full in October so far: $429 paid by the State volunteering grant grant, and $632 of shared costs no grant covers. It has spent 89.3% of its budget to date, with $14,571 left and 4 months to go.</a:t>
-            </a:r>
-          </a:p>
-        </p:txBody>
-      </p:sp>
-      <p:sp>
-        <p:nvSpPr>
-          <p:cNvPr id="8" name="Rectangle 7"/>
-          <p:cNvSpPr/>
-          <p:nvPr/>
-        </p:nvSpPr>
-        <p:spPr>
-          <a:xfrm>
-            <a:off x="6233007" y="1554480"/>
-            <a:ext cx="5501487" cy="4389120"/>
-          </a:xfrm>
-          <a:prstGeom prst="rect">
-            <a:avLst/>
-          </a:prstGeom>
-          <a:solidFill>
-            <a:srgbClr val="EEF5F0"/>
-          </a:solidFill>
-          <a:ln>
-            <a:solidFill>
-              <a:srgbClr val="DCE8DC"/>
-            </a:solidFill>
-          </a:ln>
-        </p:spPr>
-        <p:style>
-          <a:lnRef idx="1">
-            <a:schemeClr val="accent1"/>
-          </a:lnRef>
-          <a:fillRef idx="3">
-            <a:schemeClr val="accent1"/>
-          </a:fillRef>
-          <a:effectRef idx="2">
-            <a:schemeClr val="accent1"/>
-          </a:effectRef>
-          <a:fontRef idx="minor">
-            <a:schemeClr val="lt1"/>
-          </a:fontRef>
-        </p:style>
-        <p:txBody>
-          <a:bodyPr rtlCol="0" anchor="ctr"/>
-          <a:lstStyle/>
-          <a:p>
-            <a:pPr algn="ctr">
-              <a:defRPr>
-                <a:latin typeface="Roboto"/>
-              </a:defRPr>
-            </a:pPr>
-          </a:p>
-        </p:txBody>
-      </p:sp>
-      <p:sp>
-        <p:nvSpPr>
-          <p:cNvPr id="9" name="TextBox 8"/>
-          <p:cNvSpPr txBox="1"/>
-          <p:nvPr/>
-        </p:nvSpPr>
-        <p:spPr>
-          <a:xfrm>
-            <a:off x="6461607" y="1691640"/>
-            <a:ext cx="5044287" cy="365760"/>
-          </a:xfrm>
-          <a:prstGeom prst="rect">
-            <a:avLst/>
-          </a:prstGeom>
-          <a:noFill/>
-        </p:spPr>
-        <p:txBody>
-          <a:bodyPr wrap="square">
-            <a:spAutoFit/>
-          </a:bodyPr>
-          <a:lstStyle/>
-          <a:p>
-            <a:pPr>
-              <a:defRPr>
-                <a:latin typeface="Roboto"/>
-              </a:defRPr>
-            </a:pPr>
-            <a:r>
-              <a:rPr sz="1100" b="1">
-                <a:solidFill>
-                  <a:srgbClr val="5F6F63"/>
-                </a:solidFill>
-                <a:latin typeface="Roboto"/>
-              </a:rPr>
-              <a:t>WHAT YOU'D DO ABOUT IT</a:t>
-            </a:r>
-          </a:p>
-        </p:txBody>
-      </p:sp>
-      <p:sp>
-        <p:nvSpPr>
-          <p:cNvPr id="10" name="TextBox 9"/>
-          <p:cNvSpPr txBox="1"/>
-          <p:nvPr/>
-        </p:nvSpPr>
-        <p:spPr>
-          <a:xfrm>
-            <a:off x="6461607" y="2103120"/>
-            <a:ext cx="5044287" cy="3749039"/>
-          </a:xfrm>
-          <a:prstGeom prst="rect">
-            <a:avLst/>
-          </a:prstGeom>
-          <a:noFill/>
-        </p:spPr>
-        <p:txBody>
-          <a:bodyPr wrap="square">
-            <a:spAutoFit/>
-          </a:bodyPr>
-          <a:lstStyle/>
-          <a:p>
-            <a:pPr>
-              <a:defRPr>
-                <a:latin typeface="Roboto"/>
-              </a:defRPr>
-            </a:pPr>
-            <a:r>
-              <a:rPr sz="1600" b="0">
-                <a:solidFill>
-                  <a:srgbClr val="25342A"/>
-                </a:solidFill>
-                <a:latin typeface="Roboto"/>
-              </a:rPr>
-              <a:t>The full cost is $1,061 a month; $632 of it is shared cost the grant doesn't pay for. Worth asking for as much of it as the funder allows at renewal.</a:t>
-            </a:r>
-          </a:p>
-        </p:txBody>
-      </p:sp>
-      <p:sp>
-        <p:nvSpPr>
-          <p:cNvPr id="11" name="TextBox 10"/>
-          <p:cNvSpPr txBox="1"/>
-          <p:nvPr/>
-        </p:nvSpPr>
-        <p:spPr>
-          <a:xfrm>
-            <a:off x="457200" y="6492240"/>
-            <a:ext cx="3657600" cy="274320"/>
-          </a:xfrm>
-          <a:prstGeom prst="rect">
-            <a:avLst/>
-          </a:prstGeom>
-          <a:noFill/>
-        </p:spPr>
-        <p:txBody>
-          <a:bodyPr wrap="square">
-            <a:spAutoFit/>
-          </a:bodyPr>
-          <a:lstStyle/>
-          <a:p>
-            <a:pPr>
-              <a:defRPr>
-                <a:latin typeface="Roboto"/>
-              </a:defRPr>
-            </a:pPr>
-            <a:r>
-              <a:rPr sz="900" b="0">
-                <a:solidFill>
-                  <a:srgbClr val="5F6F63"/>
-                </a:solidFill>
-                <a:latin typeface="Roboto"/>
-              </a:rPr>
-              <a:t>program-cost.pptx</a:t>
-            </a:r>
-          </a:p>
-        </p:txBody>
-      </p:sp>
-      <p:sp>
-        <p:nvSpPr>
-          <p:cNvPr id="12" name="TextBox 11"/>
-          <p:cNvSpPr txBox="1"/>
-          <p:nvPr/>
-        </p:nvSpPr>
-        <p:spPr>
-          <a:xfrm>
-            <a:off x="4297680" y="6492240"/>
-            <a:ext cx="3657600" cy="274320"/>
-          </a:xfrm>
-          <a:prstGeom prst="rect">
-            <a:avLst/>
-          </a:prstGeom>
-          <a:noFill/>
-        </p:spPr>
-        <p:txBody>
-          <a:bodyPr wrap="square">
-            <a:spAutoFit/>
-          </a:bodyPr>
-          <a:lstStyle/>
-          <a:p>
-            <a:pPr algn="ctr">
-              <a:defRPr>
-                <a:latin typeface="Roboto"/>
-              </a:defRPr>
-            </a:pPr>
-            <a:r>
-              <a:rPr sz="900" b="0">
-                <a:solidFill>
-                  <a:srgbClr val="5F6F63"/>
-                </a:solidFill>
-                <a:latin typeface="Roboto"/>
-              </a:rPr>
-              <a:t>Data retrieved 2pm, Tue 6 Oct 2026 · Sample data</a:t>
-            </a:r>
-          </a:p>
-        </p:txBody>
-      </p:sp>
-      <p:sp>
-        <p:nvSpPr>
-          <p:cNvPr id="13" name="TextBox 12"/>
-          <p:cNvSpPr txBox="1"/>
-          <p:nvPr/>
-        </p:nvSpPr>
-        <p:spPr>
-          <a:xfrm>
-            <a:off x="8503920" y="6492240"/>
-            <a:ext cx="3200400" cy="274320"/>
-          </a:xfrm>
-          <a:prstGeom prst="rect">
-            <a:avLst/>
-          </a:prstGeom>
-          <a:noFill/>
-        </p:spPr>
-        <p:txBody>
-          <a:bodyPr wrap="square">
-            <a:spAutoFit/>
-          </a:bodyPr>
-          <a:lstStyle/>
-          <a:p>
-            <a:pPr algn="r">
-              <a:defRPr>
-                <a:latin typeface="Roboto"/>
-              </a:defRPr>
-            </a:pPr>
-            <a:r>
-              <a:rPr sz="900" b="0">
-                <a:solidFill>
-                  <a:srgbClr val="5F6F63"/>
-                </a:solidFill>
-                <a:latin typeface="Roboto"/>
-              </a:rPr>
-              <a:t>Slide 10 of 11</a:t>
-            </a:r>
-          </a:p>
-        </p:txBody>
-      </p:sp>
-    </p:spTree>
-  </p:cSld>
-  <p:clrMapOvr>
-    <a:masterClrMapping/>
-  </p:clrMapOvr>
-</p:sld>
-</file>
-
-<file path=ppt/slides/slide11.xml><?xml version="1.0" encoding="utf-8"?>
-<p:sld xmlns:a="http://schemas.openxmlformats.org/drawingml/2006/main" xmlns:p="http://schemas.openxmlformats.org/presentationml/2006/main" xmlns:r="http://schemas.openxmlformats.org/officeDocument/2006/relationships">
-  <p:cSld>
-    <p:spTree>
-      <p:nvGrpSpPr>
-        <p:cNvPr id="1" name=""/>
-        <p:cNvGrpSpPr/>
-        <p:nvPr/>
-      </p:nvGrpSpPr>
-      <p:grpSpPr/>
-      <p:sp>
-        <p:nvSpPr>
-          <p:cNvPr id="2" name="Rectangle 1"/>
-          <p:cNvSpPr/>
-          <p:nvPr/>
-        </p:nvSpPr>
-        <p:spPr>
-          <a:xfrm>
-            <a:off x="0" y="0"/>
-            <a:ext cx="12191695" cy="73152"/>
-          </a:xfrm>
-          <a:prstGeom prst="rect">
-            <a:avLst/>
-          </a:prstGeom>
-          <a:solidFill>
-            <a:srgbClr val="2F7A5D"/>
-          </a:solidFill>
-          <a:ln>
-            <a:noFill/>
-          </a:ln>
-        </p:spPr>
-        <p:style>
-          <a:lnRef idx="1">
-            <a:schemeClr val="accent1"/>
-          </a:lnRef>
-          <a:fillRef idx="3">
-            <a:schemeClr val="accent1"/>
-          </a:fillRef>
-          <a:effectRef idx="2">
-            <a:schemeClr val="accent1"/>
-          </a:effectRef>
-          <a:fontRef idx="minor">
-            <a:schemeClr val="lt1"/>
-          </a:fontRef>
-        </p:style>
-        <p:txBody>
-          <a:bodyPr rtlCol="0" anchor="ctr"/>
-          <a:lstStyle/>
-          <a:p>
-            <a:pPr algn="ctr">
-              <a:defRPr>
-                <a:latin typeface="Roboto"/>
-              </a:defRPr>
-            </a:pPr>
-          </a:p>
-        </p:txBody>
-      </p:sp>
-      <p:sp>
-        <p:nvSpPr>
-          <p:cNvPr id="3" name="TextBox 2"/>
-          <p:cNvSpPr txBox="1"/>
-          <p:nvPr/>
-        </p:nvSpPr>
-        <p:spPr>
-          <a:xfrm>
-            <a:off x="457200" y="164592"/>
-            <a:ext cx="7315200" cy="274320"/>
-          </a:xfrm>
-          <a:prstGeom prst="rect">
-            <a:avLst/>
-          </a:prstGeom>
-          <a:noFill/>
-        </p:spPr>
-        <p:txBody>
-          <a:bodyPr wrap="square">
-            <a:spAutoFit/>
-          </a:bodyPr>
-          <a:lstStyle/>
-          <a:p>
-            <a:pPr>
-              <a:defRPr>
-                <a:latin typeface="Roboto"/>
-              </a:defRPr>
-            </a:pPr>
-            <a:r>
-              <a:rPr sz="1000" b="0">
-                <a:solidFill>
-                  <a:srgbClr val="5F6F63"/>
-                </a:solidFill>
-                <a:latin typeface="Roboto"/>
-              </a:rPr>
-              <a:t>Sample Community Services Ltd · What does each program really cost?</a:t>
-            </a:r>
-          </a:p>
-        </p:txBody>
-      </p:sp>
-      <p:sp>
-        <p:nvSpPr>
-          <p:cNvPr id="4" name="TextBox 3"/>
-          <p:cNvSpPr txBox="1"/>
-          <p:nvPr/>
-        </p:nvSpPr>
-        <p:spPr>
-          <a:xfrm>
-            <a:off x="457200" y="411480"/>
-            <a:ext cx="11247120" cy="548640"/>
-          </a:xfrm>
-          <a:prstGeom prst="rect">
-            <a:avLst/>
-          </a:prstGeom>
-          <a:noFill/>
-        </p:spPr>
-        <p:txBody>
-          <a:bodyPr wrap="square">
-            <a:spAutoFit/>
-          </a:bodyPr>
-          <a:lstStyle/>
-          <a:p>
-            <a:pPr>
-              <a:defRPr>
-                <a:latin typeface="Roboto"/>
-              </a:defRPr>
-            </a:pPr>
-            <a:r>
-              <a:rPr sz="2400" b="1">
-                <a:solidFill>
-                  <a:srgbClr val="25342A"/>
-                </a:solidFill>
-                <a:latin typeface="Roboto"/>
-              </a:rPr>
-              <a:t>Grant spending, by month · Spend $ · Every program at once</a:t>
-            </a:r>
-          </a:p>
-        </p:txBody>
-      </p:sp>
-      <p:sp>
-        <p:nvSpPr>
-          <p:cNvPr id="5" name="TextBox 4"/>
-          <p:cNvSpPr txBox="1"/>
-          <p:nvPr/>
-        </p:nvSpPr>
-        <p:spPr>
-          <a:xfrm>
-            <a:off x="457200" y="960120"/>
-            <a:ext cx="11247120" cy="457200"/>
-          </a:xfrm>
-          <a:prstGeom prst="rect">
-            <a:avLst/>
-          </a:prstGeom>
-          <a:noFill/>
-        </p:spPr>
-        <p:txBody>
-          <a:bodyPr wrap="square">
-            <a:spAutoFit/>
-          </a:bodyPr>
-          <a:lstStyle/>
-          <a:p>
-            <a:pPr>
-              <a:defRPr>
-                <a:latin typeface="Roboto"/>
-              </a:defRPr>
-            </a:pPr>
-            <a:r>
-              <a:rPr sz="1200" b="0">
-                <a:solidFill>
-                  <a:srgbClr val="5F6F63"/>
-                </a:solidFill>
-                <a:latin typeface="Roboto"/>
-              </a:rPr>
-              <a:t>Grant spending only (the program's direct cost). All programs includes grants that have finished.</a:t>
-            </a:r>
-          </a:p>
-        </p:txBody>
-      </p:sp>
-      <p:graphicFrame>
-        <p:nvGraphicFramePr>
-          <p:cNvPr id="6" name="Chart 5"/>
-          <p:cNvGraphicFramePr>
-            <a:graphicFrameLocks noGrp="1"/>
-          </p:cNvGraphicFramePr>
-          <p:nvPr/>
-        </p:nvGraphicFramePr>
-        <p:xfrm>
-          <a:off x="457200" y="1463040"/>
-          <a:ext cx="11247120" cy="4754880"/>
-        </p:xfrm>
-        <a:graphic>
-          <a:graphicData uri="http://schemas.openxmlformats.org/drawingml/2006/chart">
-            <c:chart xmlns:c="http://schemas.openxmlformats.org/drawingml/2006/chart" r:id="rId2"/>
-          </a:graphicData>
-        </a:graphic>
-      </p:graphicFrame>
-      <p:sp>
-        <p:nvSpPr>
-          <p:cNvPr id="7" name="TextBox 6"/>
-          <p:cNvSpPr txBox="1"/>
-          <p:nvPr/>
-        </p:nvSpPr>
-        <p:spPr>
-          <a:xfrm>
-            <a:off x="457200" y="6492240"/>
-            <a:ext cx="3657600" cy="274320"/>
-          </a:xfrm>
-          <a:prstGeom prst="rect">
-            <a:avLst/>
-          </a:prstGeom>
-          <a:noFill/>
-        </p:spPr>
-        <p:txBody>
-          <a:bodyPr wrap="square">
-            <a:spAutoFit/>
-          </a:bodyPr>
-          <a:lstStyle/>
-          <a:p>
-            <a:pPr>
-              <a:defRPr>
-                <a:latin typeface="Roboto"/>
-              </a:defRPr>
-            </a:pPr>
-            <a:r>
-              <a:rPr sz="900" b="0">
-                <a:solidFill>
-                  <a:srgbClr val="5F6F63"/>
-                </a:solidFill>
-                <a:latin typeface="Roboto"/>
-              </a:rPr>
-              <a:t>program-cost.pptx</a:t>
-            </a:r>
-          </a:p>
-        </p:txBody>
-      </p:sp>
-      <p:sp>
-        <p:nvSpPr>
-          <p:cNvPr id="8" name="TextBox 7"/>
-          <p:cNvSpPr txBox="1"/>
-          <p:nvPr/>
-        </p:nvSpPr>
-        <p:spPr>
-          <a:xfrm>
-            <a:off x="4297680" y="6492240"/>
-            <a:ext cx="3657600" cy="274320"/>
-          </a:xfrm>
-          <a:prstGeom prst="rect">
-            <a:avLst/>
-          </a:prstGeom>
-          <a:noFill/>
-        </p:spPr>
-        <p:txBody>
-          <a:bodyPr wrap="square">
-            <a:spAutoFit/>
-          </a:bodyPr>
-          <a:lstStyle/>
-          <a:p>
-            <a:pPr algn="ctr">
-              <a:defRPr>
-                <a:latin typeface="Roboto"/>
-              </a:defRPr>
-            </a:pPr>
-            <a:r>
-              <a:rPr sz="900" b="0">
-                <a:solidFill>
-                  <a:srgbClr val="5F6F63"/>
-                </a:solidFill>
-                <a:latin typeface="Roboto"/>
-              </a:rPr>
-              <a:t>Data retrieved 2pm, Tue 6 Oct 2026 · Sample data</a:t>
-            </a:r>
-          </a:p>
-        </p:txBody>
-      </p:sp>
-      <p:sp>
-        <p:nvSpPr>
-          <p:cNvPr id="9" name="TextBox 8"/>
-          <p:cNvSpPr txBox="1"/>
-          <p:nvPr/>
-        </p:nvSpPr>
-        <p:spPr>
-          <a:xfrm>
-            <a:off x="8503920" y="6492240"/>
-            <a:ext cx="3200400" cy="274320"/>
-          </a:xfrm>
-          <a:prstGeom prst="rect">
-            <a:avLst/>
-          </a:prstGeom>
-          <a:noFill/>
-        </p:spPr>
-        <p:txBody>
-          <a:bodyPr wrap="square">
-            <a:spAutoFit/>
-          </a:bodyPr>
-          <a:lstStyle/>
-          <a:p>
-            <a:pPr algn="r">
-              <a:defRPr>
-                <a:latin typeface="Roboto"/>
-              </a:defRPr>
-            </a:pPr>
-            <a:r>
-              <a:rPr sz="900" b="0">
-                <a:solidFill>
-                  <a:srgbClr val="5F6F63"/>
-                </a:solidFill>
-                <a:latin typeface="Roboto"/>
-              </a:rPr>
-              <a:t>Slide 11 of 11</a:t>
+              <a:t>Slide 1 of 8</a:t>
             </a:r>
           </a:p>
         </p:txBody>
@@ -5110,7 +6560,44 @@
       <p:grpSpPr/>
       <p:sp>
         <p:nvSpPr>
-          <p:cNvPr id="2" name="Rectangle 1"/>
+          <p:cNvPr id="2" name="Title 1"/>
+          <p:cNvSpPr>
+            <a:spLocks noGrp="1"/>
+          </p:cNvSpPr>
+          <p:nvPr>
+            <p:ph type="title"/>
+          </p:nvPr>
+        </p:nvSpPr>
+        <p:spPr>
+          <a:xfrm>
+            <a:off x="457200" y="384048"/>
+            <a:ext cx="11277295" cy="475488"/>
+          </a:xfrm>
+        </p:spPr>
+        <p:txBody>
+          <a:bodyPr wrap="square" lIns="45720" rIns="45720" tIns="0" bIns="0" anchor="t"/>
+          <a:lstStyle/>
+          <a:p>
+            <a:pPr algn="l">
+              <a:defRPr>
+                <a:latin typeface="Roboto"/>
+              </a:defRPr>
+            </a:pPr>
+            <a:r>
+              <a:rPr sz="2400" b="1">
+                <a:solidFill>
+                  <a:srgbClr val="25342A"/>
+                </a:solidFill>
+                <a:latin typeface="Roboto"/>
+              </a:rPr>
+              <a:t>All programs</a:t>
+            </a:r>
+          </a:p>
+        </p:txBody>
+      </p:sp>
+      <p:sp>
+        <p:nvSpPr>
+          <p:cNvPr id="3" name="Rectangle 2"/>
           <p:cNvSpPr/>
           <p:nvPr/>
         </p:nvSpPr>
@@ -5157,14 +6644,14 @@
       </p:sp>
       <p:sp>
         <p:nvSpPr>
-          <p:cNvPr id="3" name="TextBox 2"/>
+          <p:cNvPr id="4" name="TextBox 3"/>
           <p:cNvSpPr txBox="1"/>
           <p:nvPr/>
         </p:nvSpPr>
         <p:spPr>
           <a:xfrm>
-            <a:off x="457200" y="164592"/>
-            <a:ext cx="7315200" cy="274320"/>
+            <a:off x="457200" y="146304"/>
+            <a:ext cx="8229600" cy="256032"/>
           </a:xfrm>
           <a:prstGeom prst="rect">
             <a:avLst/>
@@ -5172,7 +6659,7 @@
           <a:noFill/>
         </p:spPr>
         <p:txBody>
-          <a:bodyPr wrap="square">
+          <a:bodyPr wrap="square" lIns="45720" rIns="45720">
             <a:spAutoFit/>
           </a:bodyPr>
           <a:lstStyle/>
@@ -5196,14 +6683,14 @@
       </p:sp>
       <p:sp>
         <p:nvSpPr>
-          <p:cNvPr id="4" name="TextBox 3"/>
+          <p:cNvPr id="5" name="TextBox 4"/>
           <p:cNvSpPr txBox="1"/>
           <p:nvPr/>
         </p:nvSpPr>
         <p:spPr>
           <a:xfrm>
-            <a:off x="457200" y="411480"/>
-            <a:ext cx="11247120" cy="548640"/>
+            <a:off x="457200" y="914400"/>
+            <a:ext cx="11277295" cy="263652"/>
           </a:xfrm>
           <a:prstGeom prst="rect">
             <a:avLst/>
@@ -5211,7 +6698,7 @@
           <a:noFill/>
         </p:spPr>
         <p:txBody>
-          <a:bodyPr wrap="square">
+          <a:bodyPr wrap="square" lIns="45720" rIns="45720">
             <a:spAutoFit/>
           </a:bodyPr>
           <a:lstStyle/>
@@ -5222,45 +6709,94 @@
               </a:defRPr>
             </a:pPr>
             <a:r>
-              <a:rPr sz="2400" b="1">
+              <a:rPr sz="1200" b="0">
                 <a:solidFill>
-                  <a:srgbClr val="25342A"/>
+                  <a:srgbClr val="5F6F63"/>
                 </a:solidFill>
                 <a:latin typeface="Roboto"/>
               </a:rPr>
-              <a:t>Full cost of each program, October 2026 to date · $ · Program: All programs</a:t>
+              <a:t>Full cost of each program, October 2026 to date</a:t>
             </a:r>
           </a:p>
         </p:txBody>
       </p:sp>
       <p:graphicFrame>
         <p:nvGraphicFramePr>
-          <p:cNvPr id="5" name="Chart 4"/>
+          <p:cNvPr id="6" name="Chart 5"/>
           <p:cNvGraphicFramePr>
             <a:graphicFrameLocks noGrp="1"/>
           </p:cNvGraphicFramePr>
           <p:nvPr/>
         </p:nvGraphicFramePr>
         <p:xfrm>
-          <a:off x="457200" y="1188720"/>
-          <a:ext cx="11247120" cy="5029200"/>
+          <a:off x="457200" y="1278636"/>
+          <a:ext cx="11277295" cy="3035808"/>
         </p:xfrm>
         <a:graphic>
           <a:graphicData uri="http://schemas.openxmlformats.org/drawingml/2006/chart">
-            <c:chart xmlns:c="http://schemas.openxmlformats.org/drawingml/2006/chart" r:id="rId2"/>
+            <c:chart xmlns:c="http://schemas.openxmlformats.org/drawingml/2006/chart" r:id="rId3"/>
           </a:graphicData>
         </a:graphic>
       </p:graphicFrame>
       <p:sp>
         <p:nvSpPr>
-          <p:cNvPr id="6" name="TextBox 5"/>
+          <p:cNvPr id="7" name="Rectangle 6"/>
+          <p:cNvSpPr/>
+          <p:nvPr/>
+        </p:nvSpPr>
+        <p:spPr>
+          <a:xfrm>
+            <a:off x="457200" y="4405884"/>
+            <a:ext cx="5501487" cy="1295400"/>
+          </a:xfrm>
+          <a:prstGeom prst="rect">
+            <a:avLst/>
+          </a:prstGeom>
+          <a:solidFill>
+            <a:srgbClr val="FFFFFF"/>
+          </a:solidFill>
+          <a:ln>
+            <a:solidFill>
+              <a:srgbClr val="DCE8DC"/>
+            </a:solidFill>
+          </a:ln>
+        </p:spPr>
+        <p:style>
+          <a:lnRef idx="1">
+            <a:schemeClr val="accent1"/>
+          </a:lnRef>
+          <a:fillRef idx="3">
+            <a:schemeClr val="accent1"/>
+          </a:fillRef>
+          <a:effectRef idx="2">
+            <a:schemeClr val="accent1"/>
+          </a:effectRef>
+          <a:fontRef idx="minor">
+            <a:schemeClr val="lt1"/>
+          </a:fontRef>
+        </p:style>
+        <p:txBody>
+          <a:bodyPr rtlCol="0" anchor="ctr"/>
+          <a:lstStyle/>
+          <a:p>
+            <a:pPr algn="ctr">
+              <a:defRPr>
+                <a:latin typeface="Roboto"/>
+              </a:defRPr>
+            </a:pPr>
+          </a:p>
+        </p:txBody>
+      </p:sp>
+      <p:sp>
+        <p:nvSpPr>
+          <p:cNvPr id="8" name="TextBox 7"/>
           <p:cNvSpPr txBox="1"/>
           <p:nvPr/>
         </p:nvSpPr>
         <p:spPr>
           <a:xfrm>
-            <a:off x="457200" y="6492240"/>
-            <a:ext cx="3657600" cy="274320"/>
+            <a:off x="594360" y="4460748"/>
+            <a:ext cx="5227167" cy="274320"/>
           </a:xfrm>
           <a:prstGeom prst="rect">
             <a:avLst/>
@@ -5268,7 +6804,212 @@
           <a:noFill/>
         </p:spPr>
         <p:txBody>
-          <a:bodyPr wrap="square">
+          <a:bodyPr wrap="square" lIns="45720" rIns="45720">
+            <a:spAutoFit/>
+          </a:bodyPr>
+          <a:lstStyle/>
+          <a:p>
+            <a:pPr>
+              <a:defRPr>
+                <a:latin typeface="Roboto"/>
+              </a:defRPr>
+            </a:pPr>
+            <a:r>
+              <a:rPr sz="1000" b="1">
+                <a:solidFill>
+                  <a:srgbClr val="5F6F63"/>
+                </a:solidFill>
+                <a:latin typeface="Roboto"/>
+              </a:rPr>
+              <a:t>WHAT IT SHOWS</a:t>
+            </a:r>
+          </a:p>
+        </p:txBody>
+      </p:sp>
+      <p:sp>
+        <p:nvSpPr>
+          <p:cNvPr id="9" name="TextBox 8"/>
+          <p:cNvSpPr txBox="1"/>
+          <p:nvPr/>
+        </p:nvSpPr>
+        <p:spPr>
+          <a:xfrm>
+            <a:off x="594360" y="4735068"/>
+            <a:ext cx="5227167" cy="929640"/>
+          </a:xfrm>
+          <a:prstGeom prst="rect">
+            <a:avLst/>
+          </a:prstGeom>
+          <a:noFill/>
+        </p:spPr>
+        <p:txBody>
+          <a:bodyPr wrap="square" lIns="45720" rIns="45720">
+            <a:spAutoFit/>
+          </a:bodyPr>
+          <a:lstStyle/>
+          <a:p>
+            <a:pPr>
+              <a:defRPr>
+                <a:latin typeface="Roboto"/>
+              </a:defRPr>
+            </a:pPr>
+            <a:r>
+              <a:rPr sz="1200" b="0">
+                <a:solidFill>
+                  <a:srgbClr val="25342A"/>
+                </a:solidFill>
+                <a:latin typeface="Roboto"/>
+              </a:rPr>
+              <a:t>Housing support is the biggest program: $11,022 in October so far once its share of untied program costs and administration is added to $4,458 of grant spending. Shared costs add 147.2% on top of grant spending across all programs.</a:t>
+            </a:r>
+          </a:p>
+        </p:txBody>
+      </p:sp>
+      <p:sp>
+        <p:nvSpPr>
+          <p:cNvPr id="10" name="Rectangle 9"/>
+          <p:cNvSpPr/>
+          <p:nvPr/>
+        </p:nvSpPr>
+        <p:spPr>
+          <a:xfrm>
+            <a:off x="6233007" y="4405884"/>
+            <a:ext cx="5501487" cy="1295400"/>
+          </a:xfrm>
+          <a:prstGeom prst="rect">
+            <a:avLst/>
+          </a:prstGeom>
+          <a:solidFill>
+            <a:srgbClr val="EEF5F0"/>
+          </a:solidFill>
+          <a:ln>
+            <a:solidFill>
+              <a:srgbClr val="DCE8DC"/>
+            </a:solidFill>
+          </a:ln>
+        </p:spPr>
+        <p:style>
+          <a:lnRef idx="1">
+            <a:schemeClr val="accent1"/>
+          </a:lnRef>
+          <a:fillRef idx="3">
+            <a:schemeClr val="accent1"/>
+          </a:fillRef>
+          <a:effectRef idx="2">
+            <a:schemeClr val="accent1"/>
+          </a:effectRef>
+          <a:fontRef idx="minor">
+            <a:schemeClr val="lt1"/>
+          </a:fontRef>
+        </p:style>
+        <p:txBody>
+          <a:bodyPr rtlCol="0" anchor="ctr"/>
+          <a:lstStyle/>
+          <a:p>
+            <a:pPr algn="ctr">
+              <a:defRPr>
+                <a:latin typeface="Roboto"/>
+              </a:defRPr>
+            </a:pPr>
+          </a:p>
+        </p:txBody>
+      </p:sp>
+      <p:sp>
+        <p:nvSpPr>
+          <p:cNvPr id="11" name="TextBox 10"/>
+          <p:cNvSpPr txBox="1"/>
+          <p:nvPr/>
+        </p:nvSpPr>
+        <p:spPr>
+          <a:xfrm>
+            <a:off x="6370167" y="4460748"/>
+            <a:ext cx="5227167" cy="274320"/>
+          </a:xfrm>
+          <a:prstGeom prst="rect">
+            <a:avLst/>
+          </a:prstGeom>
+          <a:noFill/>
+        </p:spPr>
+        <p:txBody>
+          <a:bodyPr wrap="square" lIns="45720" rIns="45720">
+            <a:spAutoFit/>
+          </a:bodyPr>
+          <a:lstStyle/>
+          <a:p>
+            <a:pPr>
+              <a:defRPr>
+                <a:latin typeface="Roboto"/>
+              </a:defRPr>
+            </a:pPr>
+            <a:r>
+              <a:rPr sz="1000" b="1">
+                <a:solidFill>
+                  <a:srgbClr val="5F6F63"/>
+                </a:solidFill>
+                <a:latin typeface="Roboto"/>
+              </a:rPr>
+              <a:t>WHAT YOU'D DO ABOUT IT</a:t>
+            </a:r>
+          </a:p>
+        </p:txBody>
+      </p:sp>
+      <p:sp>
+        <p:nvSpPr>
+          <p:cNvPr id="12" name="TextBox 11"/>
+          <p:cNvSpPr txBox="1"/>
+          <p:nvPr/>
+        </p:nvSpPr>
+        <p:spPr>
+          <a:xfrm>
+            <a:off x="6370167" y="4735068"/>
+            <a:ext cx="5227167" cy="929640"/>
+          </a:xfrm>
+          <a:prstGeom prst="rect">
+            <a:avLst/>
+          </a:prstGeom>
+          <a:noFill/>
+        </p:spPr>
+        <p:txBody>
+          <a:bodyPr wrap="square" lIns="45720" rIns="45720">
+            <a:spAutoFit/>
+          </a:bodyPr>
+          <a:lstStyle/>
+          <a:p>
+            <a:pPr>
+              <a:defRPr>
+                <a:latin typeface="Roboto"/>
+              </a:defRPr>
+            </a:pPr>
+            <a:r>
+              <a:rPr sz="1200" b="0">
+                <a:solidFill>
+                  <a:srgbClr val="25342A"/>
+                </a:solidFill>
+                <a:latin typeface="Roboto"/>
+              </a:rPr>
+              <a:t>The full cost (not just the grant line) is the number for renewal applications, where the funder lets you recover a share of overheads. Pick a program above to see it on its own.</a:t>
+            </a:r>
+          </a:p>
+        </p:txBody>
+      </p:sp>
+      <p:sp>
+        <p:nvSpPr>
+          <p:cNvPr id="13" name="TextBox 12"/>
+          <p:cNvSpPr txBox="1"/>
+          <p:nvPr/>
+        </p:nvSpPr>
+        <p:spPr>
+          <a:xfrm>
+            <a:off x="457200" y="6492240"/>
+            <a:ext cx="2926080" cy="274320"/>
+          </a:xfrm>
+          <a:prstGeom prst="rect">
+            <a:avLst/>
+          </a:prstGeom>
+          <a:noFill/>
+        </p:spPr>
+        <p:txBody>
+          <a:bodyPr wrap="square" lIns="45720" rIns="45720">
             <a:spAutoFit/>
           </a:bodyPr>
           <a:lstStyle/>
@@ -5292,14 +7033,14 @@
       </p:sp>
       <p:sp>
         <p:nvSpPr>
-          <p:cNvPr id="7" name="TextBox 6"/>
+          <p:cNvPr id="14" name="TextBox 13"/>
           <p:cNvSpPr txBox="1"/>
           <p:nvPr/>
         </p:nvSpPr>
         <p:spPr>
           <a:xfrm>
-            <a:off x="4297680" y="6492240"/>
-            <a:ext cx="3657600" cy="274320"/>
+            <a:off x="3108960" y="6492240"/>
+            <a:ext cx="5943600" cy="274320"/>
           </a:xfrm>
           <a:prstGeom prst="rect">
             <a:avLst/>
@@ -5307,7 +7048,7 @@
           <a:noFill/>
         </p:spPr>
         <p:txBody>
-          <a:bodyPr wrap="square">
+          <a:bodyPr wrap="square" lIns="45720" rIns="45720">
             <a:spAutoFit/>
           </a:bodyPr>
           <a:lstStyle/>
@@ -5324,14 +7065,14 @@
                 </a:solidFill>
                 <a:latin typeface="Roboto"/>
               </a:rPr>
-              <a:t>Data retrieved 2pm, Tue 6 Oct 2026 · Sample data</a:t>
-            </a:r>
-          </a:p>
-        </p:txBody>
-      </p:sp>
-      <p:sp>
-        <p:nvSpPr>
-          <p:cNvPr id="8" name="TextBox 7"/>
+              <a:t>Data retrieved 2pm, Tue 6 Oct 2026 · Generated 8 Oct 2026, 9:35am · Sample data · Made with Python (python-pptx)</a:t>
+            </a:r>
+          </a:p>
+        </p:txBody>
+      </p:sp>
+      <p:sp>
+        <p:nvSpPr>
+          <p:cNvPr id="15" name="TextBox 14"/>
           <p:cNvSpPr txBox="1"/>
           <p:nvPr/>
         </p:nvSpPr>
@@ -5346,7 +7087,7 @@
           <a:noFill/>
         </p:spPr>
         <p:txBody>
-          <a:bodyPr wrap="square">
+          <a:bodyPr wrap="square" lIns="45720" rIns="45720">
             <a:spAutoFit/>
           </a:bodyPr>
           <a:lstStyle/>
@@ -5363,7 +7104,7 @@
                 </a:solidFill>
                 <a:latin typeface="Roboto"/>
               </a:rPr>
-              <a:t>Slide 2 of 11</a:t>
+              <a:t>Slide 2 of 8</a:t>
             </a:r>
           </a:p>
         </p:txBody>
@@ -5388,7 +7129,44 @@
       <p:grpSpPr/>
       <p:sp>
         <p:nvSpPr>
-          <p:cNvPr id="2" name="Rectangle 1"/>
+          <p:cNvPr id="2" name="Title 1"/>
+          <p:cNvSpPr>
+            <a:spLocks noGrp="1"/>
+          </p:cNvSpPr>
+          <p:nvPr>
+            <p:ph type="title"/>
+          </p:nvPr>
+        </p:nvSpPr>
+        <p:spPr>
+          <a:xfrm>
+            <a:off x="457200" y="384048"/>
+            <a:ext cx="11277295" cy="475488"/>
+          </a:xfrm>
+        </p:spPr>
+        <p:txBody>
+          <a:bodyPr wrap="square" lIns="45720" rIns="45720" tIns="0" bIns="0" anchor="t"/>
+          <a:lstStyle/>
+          <a:p>
+            <a:pPr algn="l">
+              <a:defRPr>
+                <a:latin typeface="Roboto"/>
+              </a:defRPr>
+            </a:pPr>
+            <a:r>
+              <a:rPr sz="2400" b="1">
+                <a:solidFill>
+                  <a:srgbClr val="25342A"/>
+                </a:solidFill>
+                <a:latin typeface="Roboto"/>
+              </a:rPr>
+              <a:t>Housing support</a:t>
+            </a:r>
+          </a:p>
+        </p:txBody>
+      </p:sp>
+      <p:sp>
+        <p:nvSpPr>
+          <p:cNvPr id="3" name="Rectangle 2"/>
           <p:cNvSpPr/>
           <p:nvPr/>
         </p:nvSpPr>
@@ -5435,14 +7213,14 @@
       </p:sp>
       <p:sp>
         <p:nvSpPr>
-          <p:cNvPr id="3" name="TextBox 2"/>
+          <p:cNvPr id="4" name="TextBox 3"/>
           <p:cNvSpPr txBox="1"/>
           <p:nvPr/>
         </p:nvSpPr>
         <p:spPr>
           <a:xfrm>
-            <a:off x="457200" y="164592"/>
-            <a:ext cx="7315200" cy="274320"/>
+            <a:off x="457200" y="146304"/>
+            <a:ext cx="8229600" cy="256032"/>
           </a:xfrm>
           <a:prstGeom prst="rect">
             <a:avLst/>
@@ -5450,7 +7228,7 @@
           <a:noFill/>
         </p:spPr>
         <p:txBody>
-          <a:bodyPr wrap="square">
+          <a:bodyPr wrap="square" lIns="45720" rIns="45720">
             <a:spAutoFit/>
           </a:bodyPr>
           <a:lstStyle/>
@@ -5474,14 +7252,14 @@
       </p:sp>
       <p:sp>
         <p:nvSpPr>
-          <p:cNvPr id="4" name="TextBox 3"/>
+          <p:cNvPr id="5" name="TextBox 4"/>
           <p:cNvSpPr txBox="1"/>
           <p:nvPr/>
         </p:nvSpPr>
         <p:spPr>
           <a:xfrm>
-            <a:off x="457200" y="411480"/>
-            <a:ext cx="11247120" cy="548640"/>
+            <a:off x="457200" y="914400"/>
+            <a:ext cx="11277295" cy="263652"/>
           </a:xfrm>
           <a:prstGeom prst="rect">
             <a:avLst/>
@@ -5489,7 +7267,7 @@
           <a:noFill/>
         </p:spPr>
         <p:txBody>
-          <a:bodyPr wrap="square">
+          <a:bodyPr wrap="square" lIns="45720" rIns="45720">
             <a:spAutoFit/>
           </a:bodyPr>
           <a:lstStyle/>
@@ -5500,45 +7278,94 @@
               </a:defRPr>
             </a:pPr>
             <a:r>
-              <a:rPr sz="2400" b="1">
+              <a:rPr sz="1200" b="0">
                 <a:solidFill>
-                  <a:srgbClr val="25342A"/>
+                  <a:srgbClr val="5F6F63"/>
                 </a:solidFill>
                 <a:latin typeface="Roboto"/>
               </a:rPr>
-              <a:t>Full cost of each program, October 2026 to date · % of total · Program: All programs</a:t>
+              <a:t>Grant spending, by month · Housing support</a:t>
             </a:r>
           </a:p>
         </p:txBody>
       </p:sp>
       <p:graphicFrame>
         <p:nvGraphicFramePr>
-          <p:cNvPr id="5" name="Chart 4"/>
+          <p:cNvPr id="6" name="Chart 5"/>
           <p:cNvGraphicFramePr>
             <a:graphicFrameLocks noGrp="1"/>
           </p:cNvGraphicFramePr>
           <p:nvPr/>
         </p:nvGraphicFramePr>
         <p:xfrm>
-          <a:off x="457200" y="1188720"/>
-          <a:ext cx="11247120" cy="5029200"/>
+          <a:off x="457200" y="1278636"/>
+          <a:ext cx="11277295" cy="3643884"/>
         </p:xfrm>
         <a:graphic>
           <a:graphicData uri="http://schemas.openxmlformats.org/drawingml/2006/chart">
-            <c:chart xmlns:c="http://schemas.openxmlformats.org/drawingml/2006/chart" r:id="rId2"/>
+            <c:chart xmlns:c="http://schemas.openxmlformats.org/drawingml/2006/chart" r:id="rId3"/>
           </a:graphicData>
         </a:graphic>
       </p:graphicFrame>
       <p:sp>
         <p:nvSpPr>
-          <p:cNvPr id="6" name="TextBox 5"/>
+          <p:cNvPr id="7" name="Rectangle 6"/>
+          <p:cNvSpPr/>
+          <p:nvPr/>
+        </p:nvSpPr>
+        <p:spPr>
+          <a:xfrm>
+            <a:off x="457200" y="5013960"/>
+            <a:ext cx="5501487" cy="1295400"/>
+          </a:xfrm>
+          <a:prstGeom prst="rect">
+            <a:avLst/>
+          </a:prstGeom>
+          <a:solidFill>
+            <a:srgbClr val="FFFFFF"/>
+          </a:solidFill>
+          <a:ln>
+            <a:solidFill>
+              <a:srgbClr val="DCE8DC"/>
+            </a:solidFill>
+          </a:ln>
+        </p:spPr>
+        <p:style>
+          <a:lnRef idx="1">
+            <a:schemeClr val="accent1"/>
+          </a:lnRef>
+          <a:fillRef idx="3">
+            <a:schemeClr val="accent1"/>
+          </a:fillRef>
+          <a:effectRef idx="2">
+            <a:schemeClr val="accent1"/>
+          </a:effectRef>
+          <a:fontRef idx="minor">
+            <a:schemeClr val="lt1"/>
+          </a:fontRef>
+        </p:style>
+        <p:txBody>
+          <a:bodyPr rtlCol="0" anchor="ctr"/>
+          <a:lstStyle/>
+          <a:p>
+            <a:pPr algn="ctr">
+              <a:defRPr>
+                <a:latin typeface="Roboto"/>
+              </a:defRPr>
+            </a:pPr>
+          </a:p>
+        </p:txBody>
+      </p:sp>
+      <p:sp>
+        <p:nvSpPr>
+          <p:cNvPr id="8" name="TextBox 7"/>
           <p:cNvSpPr txBox="1"/>
           <p:nvPr/>
         </p:nvSpPr>
         <p:spPr>
           <a:xfrm>
-            <a:off x="457200" y="6492240"/>
-            <a:ext cx="3657600" cy="274320"/>
+            <a:off x="594360" y="5068824"/>
+            <a:ext cx="5227167" cy="274320"/>
           </a:xfrm>
           <a:prstGeom prst="rect">
             <a:avLst/>
@@ -5546,7 +7373,212 @@
           <a:noFill/>
         </p:spPr>
         <p:txBody>
-          <a:bodyPr wrap="square">
+          <a:bodyPr wrap="square" lIns="45720" rIns="45720">
+            <a:spAutoFit/>
+          </a:bodyPr>
+          <a:lstStyle/>
+          <a:p>
+            <a:pPr>
+              <a:defRPr>
+                <a:latin typeface="Roboto"/>
+              </a:defRPr>
+            </a:pPr>
+            <a:r>
+              <a:rPr sz="1000" b="1">
+                <a:solidFill>
+                  <a:srgbClr val="5F6F63"/>
+                </a:solidFill>
+                <a:latin typeface="Roboto"/>
+              </a:rPr>
+              <a:t>WHAT IT SHOWS</a:t>
+            </a:r>
+          </a:p>
+        </p:txBody>
+      </p:sp>
+      <p:sp>
+        <p:nvSpPr>
+          <p:cNvPr id="9" name="TextBox 8"/>
+          <p:cNvSpPr txBox="1"/>
+          <p:nvPr/>
+        </p:nvSpPr>
+        <p:spPr>
+          <a:xfrm>
+            <a:off x="594360" y="5343144"/>
+            <a:ext cx="5227167" cy="929640"/>
+          </a:xfrm>
+          <a:prstGeom prst="rect">
+            <a:avLst/>
+          </a:prstGeom>
+          <a:noFill/>
+        </p:spPr>
+        <p:txBody>
+          <a:bodyPr wrap="square" lIns="45720" rIns="45720">
+            <a:spAutoFit/>
+          </a:bodyPr>
+          <a:lstStyle/>
+          <a:p>
+            <a:pPr>
+              <a:defRPr>
+                <a:latin typeface="Roboto"/>
+              </a:defRPr>
+            </a:pPr>
+            <a:r>
+              <a:rPr sz="1200" b="0">
+                <a:solidFill>
+                  <a:srgbClr val="25342A"/>
+                </a:solidFill>
+                <a:latin typeface="Roboto"/>
+              </a:rPr>
+              <a:t>Housing support cost $11,022 in full in October so far: $4,458 paid by the State Housing Program grant, and $6,564 of shared costs no grant covers. It has spent 87.4% of its budget to date, with $97,842 left and 2 months to go.</a:t>
+            </a:r>
+          </a:p>
+        </p:txBody>
+      </p:sp>
+      <p:sp>
+        <p:nvSpPr>
+          <p:cNvPr id="10" name="Rectangle 9"/>
+          <p:cNvSpPr/>
+          <p:nvPr/>
+        </p:nvSpPr>
+        <p:spPr>
+          <a:xfrm>
+            <a:off x="6233007" y="5013960"/>
+            <a:ext cx="5501487" cy="1295400"/>
+          </a:xfrm>
+          <a:prstGeom prst="rect">
+            <a:avLst/>
+          </a:prstGeom>
+          <a:solidFill>
+            <a:srgbClr val="EEF5F0"/>
+          </a:solidFill>
+          <a:ln>
+            <a:solidFill>
+              <a:srgbClr val="DCE8DC"/>
+            </a:solidFill>
+          </a:ln>
+        </p:spPr>
+        <p:style>
+          <a:lnRef idx="1">
+            <a:schemeClr val="accent1"/>
+          </a:lnRef>
+          <a:fillRef idx="3">
+            <a:schemeClr val="accent1"/>
+          </a:fillRef>
+          <a:effectRef idx="2">
+            <a:schemeClr val="accent1"/>
+          </a:effectRef>
+          <a:fontRef idx="minor">
+            <a:schemeClr val="lt1"/>
+          </a:fontRef>
+        </p:style>
+        <p:txBody>
+          <a:bodyPr rtlCol="0" anchor="ctr"/>
+          <a:lstStyle/>
+          <a:p>
+            <a:pPr algn="ctr">
+              <a:defRPr>
+                <a:latin typeface="Roboto"/>
+              </a:defRPr>
+            </a:pPr>
+          </a:p>
+        </p:txBody>
+      </p:sp>
+      <p:sp>
+        <p:nvSpPr>
+          <p:cNvPr id="11" name="TextBox 10"/>
+          <p:cNvSpPr txBox="1"/>
+          <p:nvPr/>
+        </p:nvSpPr>
+        <p:spPr>
+          <a:xfrm>
+            <a:off x="6370167" y="5068824"/>
+            <a:ext cx="5227167" cy="274320"/>
+          </a:xfrm>
+          <a:prstGeom prst="rect">
+            <a:avLst/>
+          </a:prstGeom>
+          <a:noFill/>
+        </p:spPr>
+        <p:txBody>
+          <a:bodyPr wrap="square" lIns="45720" rIns="45720">
+            <a:spAutoFit/>
+          </a:bodyPr>
+          <a:lstStyle/>
+          <a:p>
+            <a:pPr>
+              <a:defRPr>
+                <a:latin typeface="Roboto"/>
+              </a:defRPr>
+            </a:pPr>
+            <a:r>
+              <a:rPr sz="1000" b="1">
+                <a:solidFill>
+                  <a:srgbClr val="5F6F63"/>
+                </a:solidFill>
+                <a:latin typeface="Roboto"/>
+              </a:rPr>
+              <a:t>WHAT YOU'D DO ABOUT IT</a:t>
+            </a:r>
+          </a:p>
+        </p:txBody>
+      </p:sp>
+      <p:sp>
+        <p:nvSpPr>
+          <p:cNvPr id="12" name="TextBox 11"/>
+          <p:cNvSpPr txBox="1"/>
+          <p:nvPr/>
+        </p:nvSpPr>
+        <p:spPr>
+          <a:xfrm>
+            <a:off x="6370167" y="5343144"/>
+            <a:ext cx="5227167" cy="929640"/>
+          </a:xfrm>
+          <a:prstGeom prst="rect">
+            <a:avLst/>
+          </a:prstGeom>
+          <a:noFill/>
+        </p:spPr>
+        <p:txBody>
+          <a:bodyPr wrap="square" lIns="45720" rIns="45720">
+            <a:spAutoFit/>
+          </a:bodyPr>
+          <a:lstStyle/>
+          <a:p>
+            <a:pPr>
+              <a:defRPr>
+                <a:latin typeface="Roboto"/>
+              </a:defRPr>
+            </a:pPr>
+            <a:r>
+              <a:rPr sz="1200" b="0">
+                <a:solidFill>
+                  <a:srgbClr val="25342A"/>
+                </a:solidFill>
+                <a:latin typeface="Roboto"/>
+              </a:rPr>
+              <a:t>The full cost is $11,022 a month; $6,564 of it is shared cost the grant doesn't pay for. Worth asking for as much of it as the funder allows at renewal.</a:t>
+            </a:r>
+          </a:p>
+        </p:txBody>
+      </p:sp>
+      <p:sp>
+        <p:nvSpPr>
+          <p:cNvPr id="13" name="TextBox 12"/>
+          <p:cNvSpPr txBox="1"/>
+          <p:nvPr/>
+        </p:nvSpPr>
+        <p:spPr>
+          <a:xfrm>
+            <a:off x="457200" y="6492240"/>
+            <a:ext cx="2926080" cy="274320"/>
+          </a:xfrm>
+          <a:prstGeom prst="rect">
+            <a:avLst/>
+          </a:prstGeom>
+          <a:noFill/>
+        </p:spPr>
+        <p:txBody>
+          <a:bodyPr wrap="square" lIns="45720" rIns="45720">
             <a:spAutoFit/>
           </a:bodyPr>
           <a:lstStyle/>
@@ -5570,14 +7602,14 @@
       </p:sp>
       <p:sp>
         <p:nvSpPr>
-          <p:cNvPr id="7" name="TextBox 6"/>
+          <p:cNvPr id="14" name="TextBox 13"/>
           <p:cNvSpPr txBox="1"/>
           <p:nvPr/>
         </p:nvSpPr>
         <p:spPr>
           <a:xfrm>
-            <a:off x="4297680" y="6492240"/>
-            <a:ext cx="3657600" cy="274320"/>
+            <a:off x="3108960" y="6492240"/>
+            <a:ext cx="5943600" cy="274320"/>
           </a:xfrm>
           <a:prstGeom prst="rect">
             <a:avLst/>
@@ -5585,7 +7617,7 @@
           <a:noFill/>
         </p:spPr>
         <p:txBody>
-          <a:bodyPr wrap="square">
+          <a:bodyPr wrap="square" lIns="45720" rIns="45720">
             <a:spAutoFit/>
           </a:bodyPr>
           <a:lstStyle/>
@@ -5602,14 +7634,14 @@
                 </a:solidFill>
                 <a:latin typeface="Roboto"/>
               </a:rPr>
-              <a:t>Data retrieved 2pm, Tue 6 Oct 2026 · Sample data</a:t>
-            </a:r>
-          </a:p>
-        </p:txBody>
-      </p:sp>
-      <p:sp>
-        <p:nvSpPr>
-          <p:cNvPr id="8" name="TextBox 7"/>
+              <a:t>Data retrieved 2pm, Tue 6 Oct 2026 · Generated 8 Oct 2026, 9:35am · Sample data · Made with Python (python-pptx)</a:t>
+            </a:r>
+          </a:p>
+        </p:txBody>
+      </p:sp>
+      <p:sp>
+        <p:nvSpPr>
+          <p:cNvPr id="15" name="TextBox 14"/>
           <p:cNvSpPr txBox="1"/>
           <p:nvPr/>
         </p:nvSpPr>
@@ -5624,7 +7656,7 @@
           <a:noFill/>
         </p:spPr>
         <p:txBody>
-          <a:bodyPr wrap="square">
+          <a:bodyPr wrap="square" lIns="45720" rIns="45720">
             <a:spAutoFit/>
           </a:bodyPr>
           <a:lstStyle/>
@@ -5641,7 +7673,7 @@
                 </a:solidFill>
                 <a:latin typeface="Roboto"/>
               </a:rPr>
-              <a:t>Slide 3 of 11</a:t>
+              <a:t>Slide 3 of 8</a:t>
             </a:r>
           </a:p>
         </p:txBody>
@@ -5666,7 +7698,44 @@
       <p:grpSpPr/>
       <p:sp>
         <p:nvSpPr>
-          <p:cNvPr id="2" name="Rectangle 1"/>
+          <p:cNvPr id="2" name="Title 1"/>
+          <p:cNvSpPr>
+            <a:spLocks noGrp="1"/>
+          </p:cNvSpPr>
+          <p:nvPr>
+            <p:ph type="title"/>
+          </p:nvPr>
+        </p:nvSpPr>
+        <p:spPr>
+          <a:xfrm>
+            <a:off x="457200" y="384048"/>
+            <a:ext cx="11277295" cy="475488"/>
+          </a:xfrm>
+        </p:spPr>
+        <p:txBody>
+          <a:bodyPr wrap="square" lIns="45720" rIns="45720" tIns="0" bIns="0" anchor="t"/>
+          <a:lstStyle/>
+          <a:p>
+            <a:pPr algn="l">
+              <a:defRPr>
+                <a:latin typeface="Roboto"/>
+              </a:defRPr>
+            </a:pPr>
+            <a:r>
+              <a:rPr sz="2400" b="1">
+                <a:solidFill>
+                  <a:srgbClr val="25342A"/>
+                </a:solidFill>
+                <a:latin typeface="Roboto"/>
+              </a:rPr>
+              <a:t>Youth outreach</a:t>
+            </a:r>
+          </a:p>
+        </p:txBody>
+      </p:sp>
+      <p:sp>
+        <p:nvSpPr>
+          <p:cNvPr id="3" name="Rectangle 2"/>
           <p:cNvSpPr/>
           <p:nvPr/>
         </p:nvSpPr>
@@ -5713,14 +7782,14 @@
       </p:sp>
       <p:sp>
         <p:nvSpPr>
-          <p:cNvPr id="3" name="TextBox 2"/>
+          <p:cNvPr id="4" name="TextBox 3"/>
           <p:cNvSpPr txBox="1"/>
           <p:nvPr/>
         </p:nvSpPr>
         <p:spPr>
           <a:xfrm>
-            <a:off x="457200" y="164592"/>
-            <a:ext cx="7315200" cy="274320"/>
+            <a:off x="457200" y="146304"/>
+            <a:ext cx="8229600" cy="256032"/>
           </a:xfrm>
           <a:prstGeom prst="rect">
             <a:avLst/>
@@ -5728,7 +7797,7 @@
           <a:noFill/>
         </p:spPr>
         <p:txBody>
-          <a:bodyPr wrap="square">
+          <a:bodyPr wrap="square" lIns="45720" rIns="45720">
             <a:spAutoFit/>
           </a:bodyPr>
           <a:lstStyle/>
@@ -5752,14 +7821,14 @@
       </p:sp>
       <p:sp>
         <p:nvSpPr>
-          <p:cNvPr id="4" name="TextBox 3"/>
+          <p:cNvPr id="5" name="TextBox 4"/>
           <p:cNvSpPr txBox="1"/>
           <p:nvPr/>
         </p:nvSpPr>
         <p:spPr>
           <a:xfrm>
-            <a:off x="457200" y="411480"/>
-            <a:ext cx="11247120" cy="548640"/>
+            <a:off x="457200" y="914400"/>
+            <a:ext cx="11277295" cy="263652"/>
           </a:xfrm>
           <a:prstGeom prst="rect">
             <a:avLst/>
@@ -5767,7 +7836,7 @@
           <a:noFill/>
         </p:spPr>
         <p:txBody>
-          <a:bodyPr wrap="square">
+          <a:bodyPr wrap="square" lIns="45720" rIns="45720">
             <a:spAutoFit/>
           </a:bodyPr>
           <a:lstStyle/>
@@ -5778,27 +7847,45 @@
               </a:defRPr>
             </a:pPr>
             <a:r>
-              <a:rPr sz="2400" b="1">
+              <a:rPr sz="1200" b="0">
                 <a:solidFill>
-                  <a:srgbClr val="25342A"/>
+                  <a:srgbClr val="5F6F63"/>
                 </a:solidFill>
                 <a:latin typeface="Roboto"/>
               </a:rPr>
-              <a:t>What it shows · Program: All programs</a:t>
-            </a:r>
-          </a:p>
-        </p:txBody>
-      </p:sp>
-      <p:sp>
-        <p:nvSpPr>
-          <p:cNvPr id="5" name="Rectangle 4"/>
+              <a:t>Grant spending, by month · Youth outreach</a:t>
+            </a:r>
+          </a:p>
+        </p:txBody>
+      </p:sp>
+      <p:graphicFrame>
+        <p:nvGraphicFramePr>
+          <p:cNvPr id="6" name="Chart 5"/>
+          <p:cNvGraphicFramePr>
+            <a:graphicFrameLocks noGrp="1"/>
+          </p:cNvGraphicFramePr>
+          <p:nvPr/>
+        </p:nvGraphicFramePr>
+        <p:xfrm>
+          <a:off x="457200" y="1278636"/>
+          <a:ext cx="11277295" cy="3643884"/>
+        </p:xfrm>
+        <a:graphic>
+          <a:graphicData uri="http://schemas.openxmlformats.org/drawingml/2006/chart">
+            <c:chart xmlns:c="http://schemas.openxmlformats.org/drawingml/2006/chart" r:id="rId3"/>
+          </a:graphicData>
+        </a:graphic>
+      </p:graphicFrame>
+      <p:sp>
+        <p:nvSpPr>
+          <p:cNvPr id="7" name="Rectangle 6"/>
           <p:cNvSpPr/>
           <p:nvPr/>
         </p:nvSpPr>
         <p:spPr>
           <a:xfrm>
-            <a:off x="457200" y="1554480"/>
-            <a:ext cx="5501487" cy="4389120"/>
+            <a:off x="457200" y="5013960"/>
+            <a:ext cx="5501487" cy="1295400"/>
           </a:xfrm>
           <a:prstGeom prst="rect">
             <a:avLst/>
@@ -5840,14 +7927,14 @@
       </p:sp>
       <p:sp>
         <p:nvSpPr>
-          <p:cNvPr id="6" name="TextBox 5"/>
+          <p:cNvPr id="8" name="TextBox 7"/>
           <p:cNvSpPr txBox="1"/>
           <p:nvPr/>
         </p:nvSpPr>
         <p:spPr>
           <a:xfrm>
-            <a:off x="685800" y="1691640"/>
-            <a:ext cx="5044287" cy="365760"/>
+            <a:off x="594360" y="5068824"/>
+            <a:ext cx="5227167" cy="274320"/>
           </a:xfrm>
           <a:prstGeom prst="rect">
             <a:avLst/>
@@ -5855,7 +7942,7 @@
           <a:noFill/>
         </p:spPr>
         <p:txBody>
-          <a:bodyPr wrap="square">
+          <a:bodyPr wrap="square" lIns="45720" rIns="45720">
             <a:spAutoFit/>
           </a:bodyPr>
           <a:lstStyle/>
@@ -5866,7 +7953,7 @@
               </a:defRPr>
             </a:pPr>
             <a:r>
-              <a:rPr sz="1100" b="1">
+              <a:rPr sz="1000" b="1">
                 <a:solidFill>
                   <a:srgbClr val="5F6F63"/>
                 </a:solidFill>
@@ -5879,14 +7966,14 @@
       </p:sp>
       <p:sp>
         <p:nvSpPr>
-          <p:cNvPr id="7" name="TextBox 6"/>
+          <p:cNvPr id="9" name="TextBox 8"/>
           <p:cNvSpPr txBox="1"/>
           <p:nvPr/>
         </p:nvSpPr>
         <p:spPr>
           <a:xfrm>
-            <a:off x="685800" y="2103120"/>
-            <a:ext cx="5044287" cy="3749039"/>
+            <a:off x="594360" y="5343144"/>
+            <a:ext cx="5227167" cy="929640"/>
           </a:xfrm>
           <a:prstGeom prst="rect">
             <a:avLst/>
@@ -5894,7 +7981,7 @@
           <a:noFill/>
         </p:spPr>
         <p:txBody>
-          <a:bodyPr wrap="square">
+          <a:bodyPr wrap="square" lIns="45720" rIns="45720">
             <a:spAutoFit/>
           </a:bodyPr>
           <a:lstStyle/>
@@ -5905,27 +7992,27 @@
               </a:defRPr>
             </a:pPr>
             <a:r>
-              <a:rPr sz="1600" b="0">
+              <a:rPr sz="1200" b="0">
                 <a:solidFill>
                   <a:srgbClr val="25342A"/>
                 </a:solidFill>
                 <a:latin typeface="Roboto"/>
               </a:rPr>
-              <a:t>Housing support is the biggest program: $11,022 in October so far once its share of untied program costs and administration is added to $4,458 of grant spending. Shared costs add 147.2% on top of grant spending across all programs.</a:t>
-            </a:r>
-          </a:p>
-        </p:txBody>
-      </p:sp>
-      <p:sp>
-        <p:nvSpPr>
-          <p:cNvPr id="8" name="Rectangle 7"/>
+              <a:t>Youth outreach cost $8,055 in full in October so far: $3,258 paid by the State Department of Families grant, and $4,797 of shared costs no grant covers. It has spent 96.7% of its budget to date, with $170,442 left and 8 months to go.</a:t>
+            </a:r>
+          </a:p>
+        </p:txBody>
+      </p:sp>
+      <p:sp>
+        <p:nvSpPr>
+          <p:cNvPr id="10" name="Rectangle 9"/>
           <p:cNvSpPr/>
           <p:nvPr/>
         </p:nvSpPr>
         <p:spPr>
           <a:xfrm>
-            <a:off x="6233007" y="1554480"/>
-            <a:ext cx="5501487" cy="4389120"/>
+            <a:off x="6233007" y="5013960"/>
+            <a:ext cx="5501487" cy="1295400"/>
           </a:xfrm>
           <a:prstGeom prst="rect">
             <a:avLst/>
@@ -5967,14 +8054,14 @@
       </p:sp>
       <p:sp>
         <p:nvSpPr>
-          <p:cNvPr id="9" name="TextBox 8"/>
+          <p:cNvPr id="11" name="TextBox 10"/>
           <p:cNvSpPr txBox="1"/>
           <p:nvPr/>
         </p:nvSpPr>
         <p:spPr>
           <a:xfrm>
-            <a:off x="6461607" y="1691640"/>
-            <a:ext cx="5044287" cy="365760"/>
+            <a:off x="6370167" y="5068824"/>
+            <a:ext cx="5227167" cy="274320"/>
           </a:xfrm>
           <a:prstGeom prst="rect">
             <a:avLst/>
@@ -5982,7 +8069,7 @@
           <a:noFill/>
         </p:spPr>
         <p:txBody>
-          <a:bodyPr wrap="square">
+          <a:bodyPr wrap="square" lIns="45720" rIns="45720">
             <a:spAutoFit/>
           </a:bodyPr>
           <a:lstStyle/>
@@ -5993,7 +8080,7 @@
               </a:defRPr>
             </a:pPr>
             <a:r>
-              <a:rPr sz="1100" b="1">
+              <a:rPr sz="1000" b="1">
                 <a:solidFill>
                   <a:srgbClr val="5F6F63"/>
                 </a:solidFill>
@@ -6006,14 +8093,14 @@
       </p:sp>
       <p:sp>
         <p:nvSpPr>
-          <p:cNvPr id="10" name="TextBox 9"/>
+          <p:cNvPr id="12" name="TextBox 11"/>
           <p:cNvSpPr txBox="1"/>
           <p:nvPr/>
         </p:nvSpPr>
         <p:spPr>
           <a:xfrm>
-            <a:off x="6461607" y="2103120"/>
-            <a:ext cx="5044287" cy="3749039"/>
+            <a:off x="6370167" y="5343144"/>
+            <a:ext cx="5227167" cy="929640"/>
           </a:xfrm>
           <a:prstGeom prst="rect">
             <a:avLst/>
@@ -6021,7 +8108,7 @@
           <a:noFill/>
         </p:spPr>
         <p:txBody>
-          <a:bodyPr wrap="square">
+          <a:bodyPr wrap="square" lIns="45720" rIns="45720">
             <a:spAutoFit/>
           </a:bodyPr>
           <a:lstStyle/>
@@ -6032,27 +8119,27 @@
               </a:defRPr>
             </a:pPr>
             <a:r>
-              <a:rPr sz="1600" b="0">
+              <a:rPr sz="1200" b="0">
                 <a:solidFill>
                   <a:srgbClr val="25342A"/>
                 </a:solidFill>
                 <a:latin typeface="Roboto"/>
               </a:rPr>
-              <a:t>The full cost (not just the grant line) is the number for renewal applications, where the funder lets you recover a share of overheads. Pick a program above to see it on its own.</a:t>
-            </a:r>
-          </a:p>
-        </p:txBody>
-      </p:sp>
-      <p:sp>
-        <p:nvSpPr>
-          <p:cNvPr id="11" name="TextBox 10"/>
+              <a:t>The full cost is $8,055 a month; $4,797 of it is shared cost the grant doesn't pay for. Worth asking for as much of it as the funder allows at renewal.</a:t>
+            </a:r>
+          </a:p>
+        </p:txBody>
+      </p:sp>
+      <p:sp>
+        <p:nvSpPr>
+          <p:cNvPr id="13" name="TextBox 12"/>
           <p:cNvSpPr txBox="1"/>
           <p:nvPr/>
         </p:nvSpPr>
         <p:spPr>
           <a:xfrm>
             <a:off x="457200" y="6492240"/>
-            <a:ext cx="3657600" cy="274320"/>
+            <a:ext cx="2926080" cy="274320"/>
           </a:xfrm>
           <a:prstGeom prst="rect">
             <a:avLst/>
@@ -6060,7 +8147,7 @@
           <a:noFill/>
         </p:spPr>
         <p:txBody>
-          <a:bodyPr wrap="square">
+          <a:bodyPr wrap="square" lIns="45720" rIns="45720">
             <a:spAutoFit/>
           </a:bodyPr>
           <a:lstStyle/>
@@ -6084,14 +8171,14 @@
       </p:sp>
       <p:sp>
         <p:nvSpPr>
-          <p:cNvPr id="12" name="TextBox 11"/>
+          <p:cNvPr id="14" name="TextBox 13"/>
           <p:cNvSpPr txBox="1"/>
           <p:nvPr/>
         </p:nvSpPr>
         <p:spPr>
           <a:xfrm>
-            <a:off x="4297680" y="6492240"/>
-            <a:ext cx="3657600" cy="274320"/>
+            <a:off x="3108960" y="6492240"/>
+            <a:ext cx="5943600" cy="274320"/>
           </a:xfrm>
           <a:prstGeom prst="rect">
             <a:avLst/>
@@ -6099,7 +8186,7 @@
           <a:noFill/>
         </p:spPr>
         <p:txBody>
-          <a:bodyPr wrap="square">
+          <a:bodyPr wrap="square" lIns="45720" rIns="45720">
             <a:spAutoFit/>
           </a:bodyPr>
           <a:lstStyle/>
@@ -6116,14 +8203,14 @@
                 </a:solidFill>
                 <a:latin typeface="Roboto"/>
               </a:rPr>
-              <a:t>Data retrieved 2pm, Tue 6 Oct 2026 · Sample data</a:t>
-            </a:r>
-          </a:p>
-        </p:txBody>
-      </p:sp>
-      <p:sp>
-        <p:nvSpPr>
-          <p:cNvPr id="13" name="TextBox 12"/>
+              <a:t>Data retrieved 2pm, Tue 6 Oct 2026 · Generated 8 Oct 2026, 9:35am · Sample data · Made with Python (python-pptx)</a:t>
+            </a:r>
+          </a:p>
+        </p:txBody>
+      </p:sp>
+      <p:sp>
+        <p:nvSpPr>
+          <p:cNvPr id="15" name="TextBox 14"/>
           <p:cNvSpPr txBox="1"/>
           <p:nvPr/>
         </p:nvSpPr>
@@ -6138,7 +8225,7 @@
           <a:noFill/>
         </p:spPr>
         <p:txBody>
-          <a:bodyPr wrap="square">
+          <a:bodyPr wrap="square" lIns="45720" rIns="45720">
             <a:spAutoFit/>
           </a:bodyPr>
           <a:lstStyle/>
@@ -6155,7 +8242,7 @@
                 </a:solidFill>
                 <a:latin typeface="Roboto"/>
               </a:rPr>
-              <a:t>Slide 4 of 11</a:t>
+              <a:t>Slide 4 of 8</a:t>
             </a:r>
           </a:p>
         </p:txBody>
@@ -6180,7 +8267,44 @@
       <p:grpSpPr/>
       <p:sp>
         <p:nvSpPr>
-          <p:cNvPr id="2" name="Rectangle 1"/>
+          <p:cNvPr id="2" name="Title 1"/>
+          <p:cNvSpPr>
+            <a:spLocks noGrp="1"/>
+          </p:cNvSpPr>
+          <p:nvPr>
+            <p:ph type="title"/>
+          </p:nvPr>
+        </p:nvSpPr>
+        <p:spPr>
+          <a:xfrm>
+            <a:off x="457200" y="384048"/>
+            <a:ext cx="11277295" cy="475488"/>
+          </a:xfrm>
+        </p:spPr>
+        <p:txBody>
+          <a:bodyPr wrap="square" lIns="45720" rIns="45720" tIns="0" bIns="0" anchor="t"/>
+          <a:lstStyle/>
+          <a:p>
+            <a:pPr algn="l">
+              <a:defRPr>
+                <a:latin typeface="Roboto"/>
+              </a:defRPr>
+            </a:pPr>
+            <a:r>
+              <a:rPr sz="2400" b="1">
+                <a:solidFill>
+                  <a:srgbClr val="25342A"/>
+                </a:solidFill>
+                <a:latin typeface="Roboto"/>
+              </a:rPr>
+              <a:t>Mental health first aid</a:t>
+            </a:r>
+          </a:p>
+        </p:txBody>
+      </p:sp>
+      <p:sp>
+        <p:nvSpPr>
+          <p:cNvPr id="3" name="Rectangle 2"/>
           <p:cNvSpPr/>
           <p:nvPr/>
         </p:nvSpPr>
@@ -6227,14 +8351,14 @@
       </p:sp>
       <p:sp>
         <p:nvSpPr>
-          <p:cNvPr id="3" name="TextBox 2"/>
+          <p:cNvPr id="4" name="TextBox 3"/>
           <p:cNvSpPr txBox="1"/>
           <p:nvPr/>
         </p:nvSpPr>
         <p:spPr>
           <a:xfrm>
-            <a:off x="457200" y="164592"/>
-            <a:ext cx="7315200" cy="274320"/>
+            <a:off x="457200" y="146304"/>
+            <a:ext cx="8229600" cy="256032"/>
           </a:xfrm>
           <a:prstGeom prst="rect">
             <a:avLst/>
@@ -6242,7 +8366,7 @@
           <a:noFill/>
         </p:spPr>
         <p:txBody>
-          <a:bodyPr wrap="square">
+          <a:bodyPr wrap="square" lIns="45720" rIns="45720">
             <a:spAutoFit/>
           </a:bodyPr>
           <a:lstStyle/>
@@ -6266,14 +8390,14 @@
       </p:sp>
       <p:sp>
         <p:nvSpPr>
-          <p:cNvPr id="4" name="TextBox 3"/>
+          <p:cNvPr id="5" name="TextBox 4"/>
           <p:cNvSpPr txBox="1"/>
           <p:nvPr/>
         </p:nvSpPr>
         <p:spPr>
           <a:xfrm>
-            <a:off x="457200" y="411480"/>
-            <a:ext cx="11247120" cy="548640"/>
+            <a:off x="457200" y="914400"/>
+            <a:ext cx="11277295" cy="263652"/>
           </a:xfrm>
           <a:prstGeom prst="rect">
             <a:avLst/>
@@ -6281,7 +8405,7 @@
           <a:noFill/>
         </p:spPr>
         <p:txBody>
-          <a:bodyPr wrap="square">
+          <a:bodyPr wrap="square" lIns="45720" rIns="45720">
             <a:spAutoFit/>
           </a:bodyPr>
           <a:lstStyle/>
@@ -6292,27 +8416,45 @@
               </a:defRPr>
             </a:pPr>
             <a:r>
-              <a:rPr sz="2400" b="1">
+              <a:rPr sz="1200" b="0">
                 <a:solidFill>
-                  <a:srgbClr val="25342A"/>
+                  <a:srgbClr val="5F6F63"/>
                 </a:solidFill>
                 <a:latin typeface="Roboto"/>
               </a:rPr>
-              <a:t>What it shows · Program: Housing support</a:t>
-            </a:r>
-          </a:p>
-        </p:txBody>
-      </p:sp>
-      <p:sp>
-        <p:nvSpPr>
-          <p:cNvPr id="5" name="Rectangle 4"/>
+              <a:t>Grant spending, by month · Mental health first aid</a:t>
+            </a:r>
+          </a:p>
+        </p:txBody>
+      </p:sp>
+      <p:graphicFrame>
+        <p:nvGraphicFramePr>
+          <p:cNvPr id="6" name="Chart 5"/>
+          <p:cNvGraphicFramePr>
+            <a:graphicFrameLocks noGrp="1"/>
+          </p:cNvGraphicFramePr>
+          <p:nvPr/>
+        </p:nvGraphicFramePr>
+        <p:xfrm>
+          <a:off x="457200" y="1278636"/>
+          <a:ext cx="11277295" cy="3643884"/>
+        </p:xfrm>
+        <a:graphic>
+          <a:graphicData uri="http://schemas.openxmlformats.org/drawingml/2006/chart">
+            <c:chart xmlns:c="http://schemas.openxmlformats.org/drawingml/2006/chart" r:id="rId3"/>
+          </a:graphicData>
+        </a:graphic>
+      </p:graphicFrame>
+      <p:sp>
+        <p:nvSpPr>
+          <p:cNvPr id="7" name="Rectangle 6"/>
           <p:cNvSpPr/>
           <p:nvPr/>
         </p:nvSpPr>
         <p:spPr>
           <a:xfrm>
-            <a:off x="457200" y="1554480"/>
-            <a:ext cx="5501487" cy="4389120"/>
+            <a:off x="457200" y="5013960"/>
+            <a:ext cx="5501487" cy="1295400"/>
           </a:xfrm>
           <a:prstGeom prst="rect">
             <a:avLst/>
@@ -6354,14 +8496,14 @@
       </p:sp>
       <p:sp>
         <p:nvSpPr>
-          <p:cNvPr id="6" name="TextBox 5"/>
+          <p:cNvPr id="8" name="TextBox 7"/>
           <p:cNvSpPr txBox="1"/>
           <p:nvPr/>
         </p:nvSpPr>
         <p:spPr>
           <a:xfrm>
-            <a:off x="685800" y="1691640"/>
-            <a:ext cx="5044287" cy="365760"/>
+            <a:off x="594360" y="5068824"/>
+            <a:ext cx="5227167" cy="274320"/>
           </a:xfrm>
           <a:prstGeom prst="rect">
             <a:avLst/>
@@ -6369,7 +8511,7 @@
           <a:noFill/>
         </p:spPr>
         <p:txBody>
-          <a:bodyPr wrap="square">
+          <a:bodyPr wrap="square" lIns="45720" rIns="45720">
             <a:spAutoFit/>
           </a:bodyPr>
           <a:lstStyle/>
@@ -6380,7 +8522,7 @@
               </a:defRPr>
             </a:pPr>
             <a:r>
-              <a:rPr sz="1100" b="1">
+              <a:rPr sz="1000" b="1">
                 <a:solidFill>
                   <a:srgbClr val="5F6F63"/>
                 </a:solidFill>
@@ -6393,14 +8535,14 @@
       </p:sp>
       <p:sp>
         <p:nvSpPr>
-          <p:cNvPr id="7" name="TextBox 6"/>
+          <p:cNvPr id="9" name="TextBox 8"/>
           <p:cNvSpPr txBox="1"/>
           <p:nvPr/>
         </p:nvSpPr>
         <p:spPr>
           <a:xfrm>
-            <a:off x="685800" y="2103120"/>
-            <a:ext cx="5044287" cy="3749039"/>
+            <a:off x="594360" y="5343144"/>
+            <a:ext cx="5227167" cy="929640"/>
           </a:xfrm>
           <a:prstGeom prst="rect">
             <a:avLst/>
@@ -6408,7 +8550,7 @@
           <a:noFill/>
         </p:spPr>
         <p:txBody>
-          <a:bodyPr wrap="square">
+          <a:bodyPr wrap="square" lIns="45720" rIns="45720">
             <a:spAutoFit/>
           </a:bodyPr>
           <a:lstStyle/>
@@ -6419,27 +8561,27 @@
               </a:defRPr>
             </a:pPr>
             <a:r>
-              <a:rPr sz="1600" b="0">
+              <a:rPr sz="1200" b="0">
                 <a:solidFill>
                   <a:srgbClr val="25342A"/>
                 </a:solidFill>
                 <a:latin typeface="Roboto"/>
               </a:rPr>
-              <a:t>Housing support cost $11,022 in full in October so far: $4,458 paid by the State Housing Program grant, and $6,564 of shared costs no grant covers. It has spent 87.4% of its budget to date, with $97,842 left and 2 months to go.</a:t>
-            </a:r>
-          </a:p>
-        </p:txBody>
-      </p:sp>
-      <p:sp>
-        <p:nvSpPr>
-          <p:cNvPr id="8" name="Rectangle 7"/>
+              <a:t>Mental health first aid cost $3,820 in full in October so far: $1,545 paid by the Federal health program grant, and $2,275 of shared costs no grant covers. It has spent 83.9% of its budget to date, with $61,255 left and 5 months to go.</a:t>
+            </a:r>
+          </a:p>
+        </p:txBody>
+      </p:sp>
+      <p:sp>
+        <p:nvSpPr>
+          <p:cNvPr id="10" name="Rectangle 9"/>
           <p:cNvSpPr/>
           <p:nvPr/>
         </p:nvSpPr>
         <p:spPr>
           <a:xfrm>
-            <a:off x="6233007" y="1554480"/>
-            <a:ext cx="5501487" cy="4389120"/>
+            <a:off x="6233007" y="5013960"/>
+            <a:ext cx="5501487" cy="1295400"/>
           </a:xfrm>
           <a:prstGeom prst="rect">
             <a:avLst/>
@@ -6481,14 +8623,14 @@
       </p:sp>
       <p:sp>
         <p:nvSpPr>
-          <p:cNvPr id="9" name="TextBox 8"/>
+          <p:cNvPr id="11" name="TextBox 10"/>
           <p:cNvSpPr txBox="1"/>
           <p:nvPr/>
         </p:nvSpPr>
         <p:spPr>
           <a:xfrm>
-            <a:off x="6461607" y="1691640"/>
-            <a:ext cx="5044287" cy="365760"/>
+            <a:off x="6370167" y="5068824"/>
+            <a:ext cx="5227167" cy="274320"/>
           </a:xfrm>
           <a:prstGeom prst="rect">
             <a:avLst/>
@@ -6496,7 +8638,7 @@
           <a:noFill/>
         </p:spPr>
         <p:txBody>
-          <a:bodyPr wrap="square">
+          <a:bodyPr wrap="square" lIns="45720" rIns="45720">
             <a:spAutoFit/>
           </a:bodyPr>
           <a:lstStyle/>
@@ -6507,7 +8649,7 @@
               </a:defRPr>
             </a:pPr>
             <a:r>
-              <a:rPr sz="1100" b="1">
+              <a:rPr sz="1000" b="1">
                 <a:solidFill>
                   <a:srgbClr val="5F6F63"/>
                 </a:solidFill>
@@ -6520,14 +8662,14 @@
       </p:sp>
       <p:sp>
         <p:nvSpPr>
-          <p:cNvPr id="10" name="TextBox 9"/>
+          <p:cNvPr id="12" name="TextBox 11"/>
           <p:cNvSpPr txBox="1"/>
           <p:nvPr/>
         </p:nvSpPr>
         <p:spPr>
           <a:xfrm>
-            <a:off x="6461607" y="2103120"/>
-            <a:ext cx="5044287" cy="3749039"/>
+            <a:off x="6370167" y="5343144"/>
+            <a:ext cx="5227167" cy="929640"/>
           </a:xfrm>
           <a:prstGeom prst="rect">
             <a:avLst/>
@@ -6535,7 +8677,7 @@
           <a:noFill/>
         </p:spPr>
         <p:txBody>
-          <a:bodyPr wrap="square">
+          <a:bodyPr wrap="square" lIns="45720" rIns="45720">
             <a:spAutoFit/>
           </a:bodyPr>
           <a:lstStyle/>
@@ -6546,27 +8688,27 @@
               </a:defRPr>
             </a:pPr>
             <a:r>
-              <a:rPr sz="1600" b="0">
+              <a:rPr sz="1200" b="0">
                 <a:solidFill>
                   <a:srgbClr val="25342A"/>
                 </a:solidFill>
                 <a:latin typeface="Roboto"/>
               </a:rPr>
-              <a:t>The full cost is $11,022 a month; $6,564 of it is shared cost the grant doesn't pay for. Worth asking for as much of it as the funder allows at renewal.</a:t>
-            </a:r>
-          </a:p>
-        </p:txBody>
-      </p:sp>
-      <p:sp>
-        <p:nvSpPr>
-          <p:cNvPr id="11" name="TextBox 10"/>
+              <a:t>The full cost is $3,820 a month; $2,275 of it is shared cost the grant doesn't pay for. Worth asking for as much of it as the funder allows at renewal.</a:t>
+            </a:r>
+          </a:p>
+        </p:txBody>
+      </p:sp>
+      <p:sp>
+        <p:nvSpPr>
+          <p:cNvPr id="13" name="TextBox 12"/>
           <p:cNvSpPr txBox="1"/>
           <p:nvPr/>
         </p:nvSpPr>
         <p:spPr>
           <a:xfrm>
             <a:off x="457200" y="6492240"/>
-            <a:ext cx="3657600" cy="274320"/>
+            <a:ext cx="2926080" cy="274320"/>
           </a:xfrm>
           <a:prstGeom prst="rect">
             <a:avLst/>
@@ -6574,7 +8716,7 @@
           <a:noFill/>
         </p:spPr>
         <p:txBody>
-          <a:bodyPr wrap="square">
+          <a:bodyPr wrap="square" lIns="45720" rIns="45720">
             <a:spAutoFit/>
           </a:bodyPr>
           <a:lstStyle/>
@@ -6598,14 +8740,14 @@
       </p:sp>
       <p:sp>
         <p:nvSpPr>
-          <p:cNvPr id="12" name="TextBox 11"/>
+          <p:cNvPr id="14" name="TextBox 13"/>
           <p:cNvSpPr txBox="1"/>
           <p:nvPr/>
         </p:nvSpPr>
         <p:spPr>
           <a:xfrm>
-            <a:off x="4297680" y="6492240"/>
-            <a:ext cx="3657600" cy="274320"/>
+            <a:off x="3108960" y="6492240"/>
+            <a:ext cx="5943600" cy="274320"/>
           </a:xfrm>
           <a:prstGeom prst="rect">
             <a:avLst/>
@@ -6613,7 +8755,7 @@
           <a:noFill/>
         </p:spPr>
         <p:txBody>
-          <a:bodyPr wrap="square">
+          <a:bodyPr wrap="square" lIns="45720" rIns="45720">
             <a:spAutoFit/>
           </a:bodyPr>
           <a:lstStyle/>
@@ -6630,14 +8772,14 @@
                 </a:solidFill>
                 <a:latin typeface="Roboto"/>
               </a:rPr>
-              <a:t>Data retrieved 2pm, Tue 6 Oct 2026 · Sample data</a:t>
-            </a:r>
-          </a:p>
-        </p:txBody>
-      </p:sp>
-      <p:sp>
-        <p:nvSpPr>
-          <p:cNvPr id="13" name="TextBox 12"/>
+              <a:t>Data retrieved 2pm, Tue 6 Oct 2026 · Generated 8 Oct 2026, 9:35am · Sample data · Made with Python (python-pptx)</a:t>
+            </a:r>
+          </a:p>
+        </p:txBody>
+      </p:sp>
+      <p:sp>
+        <p:nvSpPr>
+          <p:cNvPr id="15" name="TextBox 14"/>
           <p:cNvSpPr txBox="1"/>
           <p:nvPr/>
         </p:nvSpPr>
@@ -6652,7 +8794,7 @@
           <a:noFill/>
         </p:spPr>
         <p:txBody>
-          <a:bodyPr wrap="square">
+          <a:bodyPr wrap="square" lIns="45720" rIns="45720">
             <a:spAutoFit/>
           </a:bodyPr>
           <a:lstStyle/>
@@ -6669,7 +8811,7 @@
                 </a:solidFill>
                 <a:latin typeface="Roboto"/>
               </a:rPr>
-              <a:t>Slide 5 of 11</a:t>
+              <a:t>Slide 5 of 8</a:t>
             </a:r>
           </a:p>
         </p:txBody>
@@ -6694,7 +8836,44 @@
       <p:grpSpPr/>
       <p:sp>
         <p:nvSpPr>
-          <p:cNvPr id="2" name="Rectangle 1"/>
+          <p:cNvPr id="2" name="Title 1"/>
+          <p:cNvSpPr>
+            <a:spLocks noGrp="1"/>
+          </p:cNvSpPr>
+          <p:nvPr>
+            <p:ph type="title"/>
+          </p:nvPr>
+        </p:nvSpPr>
+        <p:spPr>
+          <a:xfrm>
+            <a:off x="457200" y="384048"/>
+            <a:ext cx="11277295" cy="475488"/>
+          </a:xfrm>
+        </p:spPr>
+        <p:txBody>
+          <a:bodyPr wrap="square" lIns="45720" rIns="45720" tIns="0" bIns="0" anchor="t"/>
+          <a:lstStyle/>
+          <a:p>
+            <a:pPr algn="l">
+              <a:defRPr>
+                <a:latin typeface="Roboto"/>
+              </a:defRPr>
+            </a:pPr>
+            <a:r>
+              <a:rPr sz="2400" b="1">
+                <a:solidFill>
+                  <a:srgbClr val="25342A"/>
+                </a:solidFill>
+                <a:latin typeface="Roboto"/>
+              </a:rPr>
+              <a:t>Digital literacy</a:t>
+            </a:r>
+          </a:p>
+        </p:txBody>
+      </p:sp>
+      <p:sp>
+        <p:nvSpPr>
+          <p:cNvPr id="3" name="Rectangle 2"/>
           <p:cNvSpPr/>
           <p:nvPr/>
         </p:nvSpPr>
@@ -6741,14 +8920,14 @@
       </p:sp>
       <p:sp>
         <p:nvSpPr>
-          <p:cNvPr id="3" name="TextBox 2"/>
+          <p:cNvPr id="4" name="TextBox 3"/>
           <p:cNvSpPr txBox="1"/>
           <p:nvPr/>
         </p:nvSpPr>
         <p:spPr>
           <a:xfrm>
-            <a:off x="457200" y="164592"/>
-            <a:ext cx="7315200" cy="274320"/>
+            <a:off x="457200" y="146304"/>
+            <a:ext cx="8229600" cy="256032"/>
           </a:xfrm>
           <a:prstGeom prst="rect">
             <a:avLst/>
@@ -6756,7 +8935,7 @@
           <a:noFill/>
         </p:spPr>
         <p:txBody>
-          <a:bodyPr wrap="square">
+          <a:bodyPr wrap="square" lIns="45720" rIns="45720">
             <a:spAutoFit/>
           </a:bodyPr>
           <a:lstStyle/>
@@ -6780,14 +8959,14 @@
       </p:sp>
       <p:sp>
         <p:nvSpPr>
-          <p:cNvPr id="4" name="TextBox 3"/>
+          <p:cNvPr id="5" name="TextBox 4"/>
           <p:cNvSpPr txBox="1"/>
           <p:nvPr/>
         </p:nvSpPr>
         <p:spPr>
           <a:xfrm>
-            <a:off x="457200" y="411480"/>
-            <a:ext cx="11247120" cy="548640"/>
+            <a:off x="457200" y="914400"/>
+            <a:ext cx="11277295" cy="263652"/>
           </a:xfrm>
           <a:prstGeom prst="rect">
             <a:avLst/>
@@ -6795,7 +8974,7 @@
           <a:noFill/>
         </p:spPr>
         <p:txBody>
-          <a:bodyPr wrap="square">
+          <a:bodyPr wrap="square" lIns="45720" rIns="45720">
             <a:spAutoFit/>
           </a:bodyPr>
           <a:lstStyle/>
@@ -6806,27 +8985,45 @@
               </a:defRPr>
             </a:pPr>
             <a:r>
-              <a:rPr sz="2400" b="1">
+              <a:rPr sz="1200" b="0">
                 <a:solidFill>
-                  <a:srgbClr val="25342A"/>
+                  <a:srgbClr val="5F6F63"/>
                 </a:solidFill>
                 <a:latin typeface="Roboto"/>
               </a:rPr>
-              <a:t>What it shows · Program: Youth outreach</a:t>
-            </a:r>
-          </a:p>
-        </p:txBody>
-      </p:sp>
-      <p:sp>
-        <p:nvSpPr>
-          <p:cNvPr id="5" name="Rectangle 4"/>
+              <a:t>Grant spending, by month · Digital literacy</a:t>
+            </a:r>
+          </a:p>
+        </p:txBody>
+      </p:sp>
+      <p:graphicFrame>
+        <p:nvGraphicFramePr>
+          <p:cNvPr id="6" name="Chart 5"/>
+          <p:cNvGraphicFramePr>
+            <a:graphicFrameLocks noGrp="1"/>
+          </p:cNvGraphicFramePr>
+          <p:nvPr/>
+        </p:nvGraphicFramePr>
+        <p:xfrm>
+          <a:off x="457200" y="1278636"/>
+          <a:ext cx="11277295" cy="3643884"/>
+        </p:xfrm>
+        <a:graphic>
+          <a:graphicData uri="http://schemas.openxmlformats.org/drawingml/2006/chart">
+            <c:chart xmlns:c="http://schemas.openxmlformats.org/drawingml/2006/chart" r:id="rId3"/>
+          </a:graphicData>
+        </a:graphic>
+      </p:graphicFrame>
+      <p:sp>
+        <p:nvSpPr>
+          <p:cNvPr id="7" name="Rectangle 6"/>
           <p:cNvSpPr/>
           <p:nvPr/>
         </p:nvSpPr>
         <p:spPr>
           <a:xfrm>
-            <a:off x="457200" y="1554480"/>
-            <a:ext cx="5501487" cy="4389120"/>
+            <a:off x="457200" y="5013960"/>
+            <a:ext cx="5501487" cy="1295400"/>
           </a:xfrm>
           <a:prstGeom prst="rect">
             <a:avLst/>
@@ -6868,14 +9065,14 @@
       </p:sp>
       <p:sp>
         <p:nvSpPr>
-          <p:cNvPr id="6" name="TextBox 5"/>
+          <p:cNvPr id="8" name="TextBox 7"/>
           <p:cNvSpPr txBox="1"/>
           <p:nvPr/>
         </p:nvSpPr>
         <p:spPr>
           <a:xfrm>
-            <a:off x="685800" y="1691640"/>
-            <a:ext cx="5044287" cy="365760"/>
+            <a:off x="594360" y="5068824"/>
+            <a:ext cx="5227167" cy="274320"/>
           </a:xfrm>
           <a:prstGeom prst="rect">
             <a:avLst/>
@@ -6883,7 +9080,7 @@
           <a:noFill/>
         </p:spPr>
         <p:txBody>
-          <a:bodyPr wrap="square">
+          <a:bodyPr wrap="square" lIns="45720" rIns="45720">
             <a:spAutoFit/>
           </a:bodyPr>
           <a:lstStyle/>
@@ -6894,7 +9091,7 @@
               </a:defRPr>
             </a:pPr>
             <a:r>
-              <a:rPr sz="1100" b="1">
+              <a:rPr sz="1000" b="1">
                 <a:solidFill>
                   <a:srgbClr val="5F6F63"/>
                 </a:solidFill>
@@ -6907,14 +9104,14 @@
       </p:sp>
       <p:sp>
         <p:nvSpPr>
-          <p:cNvPr id="7" name="TextBox 6"/>
+          <p:cNvPr id="9" name="TextBox 8"/>
           <p:cNvSpPr txBox="1"/>
           <p:nvPr/>
         </p:nvSpPr>
         <p:spPr>
           <a:xfrm>
-            <a:off x="685800" y="2103120"/>
-            <a:ext cx="5044287" cy="3749039"/>
+            <a:off x="594360" y="5343144"/>
+            <a:ext cx="5227167" cy="929640"/>
           </a:xfrm>
           <a:prstGeom prst="rect">
             <a:avLst/>
@@ -6922,7 +9119,7 @@
           <a:noFill/>
         </p:spPr>
         <p:txBody>
-          <a:bodyPr wrap="square">
+          <a:bodyPr wrap="square" lIns="45720" rIns="45720">
             <a:spAutoFit/>
           </a:bodyPr>
           <a:lstStyle/>
@@ -6933,27 +9130,27 @@
               </a:defRPr>
             </a:pPr>
             <a:r>
-              <a:rPr sz="1600" b="0">
+              <a:rPr sz="1200" b="0">
                 <a:solidFill>
                   <a:srgbClr val="25342A"/>
                 </a:solidFill>
                 <a:latin typeface="Roboto"/>
               </a:rPr>
-              <a:t>Youth outreach cost $8,055 in full in October so far: $3,258 paid by the State Department of Families grant, and $4,797 of shared costs no grant covers. It has spent 96.7% of its budget to date, with $170,442 left and 8 months to go.</a:t>
-            </a:r>
-          </a:p>
-        </p:txBody>
-      </p:sp>
-      <p:sp>
-        <p:nvSpPr>
-          <p:cNvPr id="8" name="Rectangle 7"/>
+              <a:t>Digital literacy cost $1,736 in full in October so far: $702 paid by the Philanthropic foundation grant, and $1,034 of shared costs no grant covers. It has spent 92.8% of its budget to date, with $29,698 left and 5 months to go.</a:t>
+            </a:r>
+          </a:p>
+        </p:txBody>
+      </p:sp>
+      <p:sp>
+        <p:nvSpPr>
+          <p:cNvPr id="10" name="Rectangle 9"/>
           <p:cNvSpPr/>
           <p:nvPr/>
         </p:nvSpPr>
         <p:spPr>
           <a:xfrm>
-            <a:off x="6233007" y="1554480"/>
-            <a:ext cx="5501487" cy="4389120"/>
+            <a:off x="6233007" y="5013960"/>
+            <a:ext cx="5501487" cy="1295400"/>
           </a:xfrm>
           <a:prstGeom prst="rect">
             <a:avLst/>
@@ -6995,14 +9192,14 @@
       </p:sp>
       <p:sp>
         <p:nvSpPr>
-          <p:cNvPr id="9" name="TextBox 8"/>
+          <p:cNvPr id="11" name="TextBox 10"/>
           <p:cNvSpPr txBox="1"/>
           <p:nvPr/>
         </p:nvSpPr>
         <p:spPr>
           <a:xfrm>
-            <a:off x="6461607" y="1691640"/>
-            <a:ext cx="5044287" cy="365760"/>
+            <a:off x="6370167" y="5068824"/>
+            <a:ext cx="5227167" cy="274320"/>
           </a:xfrm>
           <a:prstGeom prst="rect">
             <a:avLst/>
@@ -7010,7 +9207,7 @@
           <a:noFill/>
         </p:spPr>
         <p:txBody>
-          <a:bodyPr wrap="square">
+          <a:bodyPr wrap="square" lIns="45720" rIns="45720">
             <a:spAutoFit/>
           </a:bodyPr>
           <a:lstStyle/>
@@ -7021,7 +9218,7 @@
               </a:defRPr>
             </a:pPr>
             <a:r>
-              <a:rPr sz="1100" b="1">
+              <a:rPr sz="1000" b="1">
                 <a:solidFill>
                   <a:srgbClr val="5F6F63"/>
                 </a:solidFill>
@@ -7034,14 +9231,14 @@
       </p:sp>
       <p:sp>
         <p:nvSpPr>
-          <p:cNvPr id="10" name="TextBox 9"/>
+          <p:cNvPr id="12" name="TextBox 11"/>
           <p:cNvSpPr txBox="1"/>
           <p:nvPr/>
         </p:nvSpPr>
         <p:spPr>
           <a:xfrm>
-            <a:off x="6461607" y="2103120"/>
-            <a:ext cx="5044287" cy="3749039"/>
+            <a:off x="6370167" y="5343144"/>
+            <a:ext cx="5227167" cy="929640"/>
           </a:xfrm>
           <a:prstGeom prst="rect">
             <a:avLst/>
@@ -7049,7 +9246,7 @@
           <a:noFill/>
         </p:spPr>
         <p:txBody>
-          <a:bodyPr wrap="square">
+          <a:bodyPr wrap="square" lIns="45720" rIns="45720">
             <a:spAutoFit/>
           </a:bodyPr>
           <a:lstStyle/>
@@ -7060,27 +9257,27 @@
               </a:defRPr>
             </a:pPr>
             <a:r>
-              <a:rPr sz="1600" b="0">
+              <a:rPr sz="1200" b="0">
                 <a:solidFill>
                   <a:srgbClr val="25342A"/>
                 </a:solidFill>
                 <a:latin typeface="Roboto"/>
               </a:rPr>
-              <a:t>The full cost is $8,055 a month; $4,797 of it is shared cost the grant doesn't pay for. Worth asking for as much of it as the funder allows at renewal.</a:t>
-            </a:r>
-          </a:p>
-        </p:txBody>
-      </p:sp>
-      <p:sp>
-        <p:nvSpPr>
-          <p:cNvPr id="11" name="TextBox 10"/>
+              <a:t>The full cost is $1,736 a month; $1,034 of it is shared cost the grant doesn't pay for. Worth asking for as much of it as the funder allows at renewal.</a:t>
+            </a:r>
+          </a:p>
+        </p:txBody>
+      </p:sp>
+      <p:sp>
+        <p:nvSpPr>
+          <p:cNvPr id="13" name="TextBox 12"/>
           <p:cNvSpPr txBox="1"/>
           <p:nvPr/>
         </p:nvSpPr>
         <p:spPr>
           <a:xfrm>
             <a:off x="457200" y="6492240"/>
-            <a:ext cx="3657600" cy="274320"/>
+            <a:ext cx="2926080" cy="274320"/>
           </a:xfrm>
           <a:prstGeom prst="rect">
             <a:avLst/>
@@ -7088,7 +9285,7 @@
           <a:noFill/>
         </p:spPr>
         <p:txBody>
-          <a:bodyPr wrap="square">
+          <a:bodyPr wrap="square" lIns="45720" rIns="45720">
             <a:spAutoFit/>
           </a:bodyPr>
           <a:lstStyle/>
@@ -7112,14 +9309,14 @@
       </p:sp>
       <p:sp>
         <p:nvSpPr>
-          <p:cNvPr id="12" name="TextBox 11"/>
+          <p:cNvPr id="14" name="TextBox 13"/>
           <p:cNvSpPr txBox="1"/>
           <p:nvPr/>
         </p:nvSpPr>
         <p:spPr>
           <a:xfrm>
-            <a:off x="4297680" y="6492240"/>
-            <a:ext cx="3657600" cy="274320"/>
+            <a:off x="3108960" y="6492240"/>
+            <a:ext cx="5943600" cy="274320"/>
           </a:xfrm>
           <a:prstGeom prst="rect">
             <a:avLst/>
@@ -7127,7 +9324,7 @@
           <a:noFill/>
         </p:spPr>
         <p:txBody>
-          <a:bodyPr wrap="square">
+          <a:bodyPr wrap="square" lIns="45720" rIns="45720">
             <a:spAutoFit/>
           </a:bodyPr>
           <a:lstStyle/>
@@ -7144,14 +9341,14 @@
                 </a:solidFill>
                 <a:latin typeface="Roboto"/>
               </a:rPr>
-              <a:t>Data retrieved 2pm, Tue 6 Oct 2026 · Sample data</a:t>
-            </a:r>
-          </a:p>
-        </p:txBody>
-      </p:sp>
-      <p:sp>
-        <p:nvSpPr>
-          <p:cNvPr id="13" name="TextBox 12"/>
+              <a:t>Data retrieved 2pm, Tue 6 Oct 2026 · Generated 8 Oct 2026, 9:35am · Sample data · Made with Python (python-pptx)</a:t>
+            </a:r>
+          </a:p>
+        </p:txBody>
+      </p:sp>
+      <p:sp>
+        <p:nvSpPr>
+          <p:cNvPr id="15" name="TextBox 14"/>
           <p:cNvSpPr txBox="1"/>
           <p:nvPr/>
         </p:nvSpPr>
@@ -7166,7 +9363,7 @@
           <a:noFill/>
         </p:spPr>
         <p:txBody>
-          <a:bodyPr wrap="square">
+          <a:bodyPr wrap="square" lIns="45720" rIns="45720">
             <a:spAutoFit/>
           </a:bodyPr>
           <a:lstStyle/>
@@ -7183,7 +9380,7 @@
                 </a:solidFill>
                 <a:latin typeface="Roboto"/>
               </a:rPr>
-              <a:t>Slide 6 of 11</a:t>
+              <a:t>Slide 6 of 8</a:t>
             </a:r>
           </a:p>
         </p:txBody>
@@ -7208,7 +9405,44 @@
       <p:grpSpPr/>
       <p:sp>
         <p:nvSpPr>
-          <p:cNvPr id="2" name="Rectangle 1"/>
+          <p:cNvPr id="2" name="Title 1"/>
+          <p:cNvSpPr>
+            <a:spLocks noGrp="1"/>
+          </p:cNvSpPr>
+          <p:nvPr>
+            <p:ph type="title"/>
+          </p:nvPr>
+        </p:nvSpPr>
+        <p:spPr>
+          <a:xfrm>
+            <a:off x="457200" y="384048"/>
+            <a:ext cx="11277295" cy="475488"/>
+          </a:xfrm>
+        </p:spPr>
+        <p:txBody>
+          <a:bodyPr wrap="square" lIns="45720" rIns="45720" tIns="0" bIns="0" anchor="t"/>
+          <a:lstStyle/>
+          <a:p>
+            <a:pPr algn="l">
+              <a:defRPr>
+                <a:latin typeface="Roboto"/>
+              </a:defRPr>
+            </a:pPr>
+            <a:r>
+              <a:rPr sz="2400" b="1">
+                <a:solidFill>
+                  <a:srgbClr val="25342A"/>
+                </a:solidFill>
+                <a:latin typeface="Roboto"/>
+              </a:rPr>
+              <a:t>Community meals</a:t>
+            </a:r>
+          </a:p>
+        </p:txBody>
+      </p:sp>
+      <p:sp>
+        <p:nvSpPr>
+          <p:cNvPr id="3" name="Rectangle 2"/>
           <p:cNvSpPr/>
           <p:nvPr/>
         </p:nvSpPr>
@@ -7255,14 +9489,14 @@
       </p:sp>
       <p:sp>
         <p:nvSpPr>
-          <p:cNvPr id="3" name="TextBox 2"/>
+          <p:cNvPr id="4" name="TextBox 3"/>
           <p:cNvSpPr txBox="1"/>
           <p:nvPr/>
         </p:nvSpPr>
         <p:spPr>
           <a:xfrm>
-            <a:off x="457200" y="164592"/>
-            <a:ext cx="7315200" cy="274320"/>
+            <a:off x="457200" y="146304"/>
+            <a:ext cx="8229600" cy="256032"/>
           </a:xfrm>
           <a:prstGeom prst="rect">
             <a:avLst/>
@@ -7270,7 +9504,7 @@
           <a:noFill/>
         </p:spPr>
         <p:txBody>
-          <a:bodyPr wrap="square">
+          <a:bodyPr wrap="square" lIns="45720" rIns="45720">
             <a:spAutoFit/>
           </a:bodyPr>
           <a:lstStyle/>
@@ -7294,14 +9528,14 @@
       </p:sp>
       <p:sp>
         <p:nvSpPr>
-          <p:cNvPr id="4" name="TextBox 3"/>
+          <p:cNvPr id="5" name="TextBox 4"/>
           <p:cNvSpPr txBox="1"/>
           <p:nvPr/>
         </p:nvSpPr>
         <p:spPr>
           <a:xfrm>
-            <a:off x="457200" y="411480"/>
-            <a:ext cx="11247120" cy="548640"/>
+            <a:off x="457200" y="914400"/>
+            <a:ext cx="11277295" cy="263652"/>
           </a:xfrm>
           <a:prstGeom prst="rect">
             <a:avLst/>
@@ -7309,7 +9543,7 @@
           <a:noFill/>
         </p:spPr>
         <p:txBody>
-          <a:bodyPr wrap="square">
+          <a:bodyPr wrap="square" lIns="45720" rIns="45720">
             <a:spAutoFit/>
           </a:bodyPr>
           <a:lstStyle/>
@@ -7320,27 +9554,45 @@
               </a:defRPr>
             </a:pPr>
             <a:r>
-              <a:rPr sz="2400" b="1">
+              <a:rPr sz="1200" b="0">
                 <a:solidFill>
-                  <a:srgbClr val="25342A"/>
+                  <a:srgbClr val="5F6F63"/>
                 </a:solidFill>
                 <a:latin typeface="Roboto"/>
               </a:rPr>
-              <a:t>What it shows · Program: Mental health first aid</a:t>
-            </a:r>
-          </a:p>
-        </p:txBody>
-      </p:sp>
-      <p:sp>
-        <p:nvSpPr>
-          <p:cNvPr id="5" name="Rectangle 4"/>
+              <a:t>Grant spending, by month · Community meals</a:t>
+            </a:r>
+          </a:p>
+        </p:txBody>
+      </p:sp>
+      <p:graphicFrame>
+        <p:nvGraphicFramePr>
+          <p:cNvPr id="6" name="Chart 5"/>
+          <p:cNvGraphicFramePr>
+            <a:graphicFrameLocks noGrp="1"/>
+          </p:cNvGraphicFramePr>
+          <p:nvPr/>
+        </p:nvGraphicFramePr>
+        <p:xfrm>
+          <a:off x="457200" y="1278636"/>
+          <a:ext cx="11277295" cy="3643884"/>
+        </p:xfrm>
+        <a:graphic>
+          <a:graphicData uri="http://schemas.openxmlformats.org/drawingml/2006/chart">
+            <c:chart xmlns:c="http://schemas.openxmlformats.org/drawingml/2006/chart" r:id="rId3"/>
+          </a:graphicData>
+        </a:graphic>
+      </p:graphicFrame>
+      <p:sp>
+        <p:nvSpPr>
+          <p:cNvPr id="7" name="Rectangle 6"/>
           <p:cNvSpPr/>
           <p:nvPr/>
         </p:nvSpPr>
         <p:spPr>
           <a:xfrm>
-            <a:off x="457200" y="1554480"/>
-            <a:ext cx="5501487" cy="4389120"/>
+            <a:off x="457200" y="5013960"/>
+            <a:ext cx="5501487" cy="1295400"/>
           </a:xfrm>
           <a:prstGeom prst="rect">
             <a:avLst/>
@@ -7382,14 +9634,14 @@
       </p:sp>
       <p:sp>
         <p:nvSpPr>
-          <p:cNvPr id="6" name="TextBox 5"/>
+          <p:cNvPr id="8" name="TextBox 7"/>
           <p:cNvSpPr txBox="1"/>
           <p:nvPr/>
         </p:nvSpPr>
         <p:spPr>
           <a:xfrm>
-            <a:off x="685800" y="1691640"/>
-            <a:ext cx="5044287" cy="365760"/>
+            <a:off x="594360" y="5068824"/>
+            <a:ext cx="5227167" cy="274320"/>
           </a:xfrm>
           <a:prstGeom prst="rect">
             <a:avLst/>
@@ -7397,7 +9649,7 @@
           <a:noFill/>
         </p:spPr>
         <p:txBody>
-          <a:bodyPr wrap="square">
+          <a:bodyPr wrap="square" lIns="45720" rIns="45720">
             <a:spAutoFit/>
           </a:bodyPr>
           <a:lstStyle/>
@@ -7408,7 +9660,7 @@
               </a:defRPr>
             </a:pPr>
             <a:r>
-              <a:rPr sz="1100" b="1">
+              <a:rPr sz="1000" b="1">
                 <a:solidFill>
                   <a:srgbClr val="5F6F63"/>
                 </a:solidFill>
@@ -7421,14 +9673,14 @@
       </p:sp>
       <p:sp>
         <p:nvSpPr>
-          <p:cNvPr id="7" name="TextBox 6"/>
+          <p:cNvPr id="9" name="TextBox 8"/>
           <p:cNvSpPr txBox="1"/>
           <p:nvPr/>
         </p:nvSpPr>
         <p:spPr>
           <a:xfrm>
-            <a:off x="685800" y="2103120"/>
-            <a:ext cx="5044287" cy="3749039"/>
+            <a:off x="594360" y="5343144"/>
+            <a:ext cx="5227167" cy="929640"/>
           </a:xfrm>
           <a:prstGeom prst="rect">
             <a:avLst/>
@@ -7436,7 +9688,7 @@
           <a:noFill/>
         </p:spPr>
         <p:txBody>
-          <a:bodyPr wrap="square">
+          <a:bodyPr wrap="square" lIns="45720" rIns="45720">
             <a:spAutoFit/>
           </a:bodyPr>
           <a:lstStyle/>
@@ -7447,27 +9699,27 @@
               </a:defRPr>
             </a:pPr>
             <a:r>
-              <a:rPr sz="1600" b="0">
+              <a:rPr sz="1200" b="0">
                 <a:solidFill>
                   <a:srgbClr val="25342A"/>
                 </a:solidFill>
                 <a:latin typeface="Roboto"/>
               </a:rPr>
-              <a:t>Mental health first aid cost $3,820 in full in October so far: $1,545 paid by the Federal health program grant, and $2,275 of shared costs no grant covers. It has spent 83.9% of its budget to date, with $61,255 left and 5 months to go.</a:t>
-            </a:r>
-          </a:p>
-        </p:txBody>
-      </p:sp>
-      <p:sp>
-        <p:nvSpPr>
-          <p:cNvPr id="8" name="Rectangle 7"/>
+              <a:t>Community meals cost $1,521 in full in October so far: $615 paid by the Local council community grant grant, and $906 of shared costs no grant covers. It has spent 78.8% of its budget to date, with $35,385 left and 8 months to go.</a:t>
+            </a:r>
+          </a:p>
+        </p:txBody>
+      </p:sp>
+      <p:sp>
+        <p:nvSpPr>
+          <p:cNvPr id="10" name="Rectangle 9"/>
           <p:cNvSpPr/>
           <p:nvPr/>
         </p:nvSpPr>
         <p:spPr>
           <a:xfrm>
-            <a:off x="6233007" y="1554480"/>
-            <a:ext cx="5501487" cy="4389120"/>
+            <a:off x="6233007" y="5013960"/>
+            <a:ext cx="5501487" cy="1295400"/>
           </a:xfrm>
           <a:prstGeom prst="rect">
             <a:avLst/>
@@ -7509,14 +9761,14 @@
       </p:sp>
       <p:sp>
         <p:nvSpPr>
-          <p:cNvPr id="9" name="TextBox 8"/>
+          <p:cNvPr id="11" name="TextBox 10"/>
           <p:cNvSpPr txBox="1"/>
           <p:nvPr/>
         </p:nvSpPr>
         <p:spPr>
           <a:xfrm>
-            <a:off x="6461607" y="1691640"/>
-            <a:ext cx="5044287" cy="365760"/>
+            <a:off x="6370167" y="5068824"/>
+            <a:ext cx="5227167" cy="274320"/>
           </a:xfrm>
           <a:prstGeom prst="rect">
             <a:avLst/>
@@ -7524,7 +9776,7 @@
           <a:noFill/>
         </p:spPr>
         <p:txBody>
-          <a:bodyPr wrap="square">
+          <a:bodyPr wrap="square" lIns="45720" rIns="45720">
             <a:spAutoFit/>
           </a:bodyPr>
           <a:lstStyle/>
@@ -7535,7 +9787,7 @@
               </a:defRPr>
             </a:pPr>
             <a:r>
-              <a:rPr sz="1100" b="1">
+              <a:rPr sz="1000" b="1">
                 <a:solidFill>
                   <a:srgbClr val="5F6F63"/>
                 </a:solidFill>
@@ -7548,14 +9800,14 @@
       </p:sp>
       <p:sp>
         <p:nvSpPr>
-          <p:cNvPr id="10" name="TextBox 9"/>
+          <p:cNvPr id="12" name="TextBox 11"/>
           <p:cNvSpPr txBox="1"/>
           <p:nvPr/>
         </p:nvSpPr>
         <p:spPr>
           <a:xfrm>
-            <a:off x="6461607" y="2103120"/>
-            <a:ext cx="5044287" cy="3749039"/>
+            <a:off x="6370167" y="5343144"/>
+            <a:ext cx="5227167" cy="929640"/>
           </a:xfrm>
           <a:prstGeom prst="rect">
             <a:avLst/>
@@ -7563,7 +9815,7 @@
           <a:noFill/>
         </p:spPr>
         <p:txBody>
-          <a:bodyPr wrap="square">
+          <a:bodyPr wrap="square" lIns="45720" rIns="45720">
             <a:spAutoFit/>
           </a:bodyPr>
           <a:lstStyle/>
@@ -7574,27 +9826,27 @@
               </a:defRPr>
             </a:pPr>
             <a:r>
-              <a:rPr sz="1600" b="0">
+              <a:rPr sz="1200" b="0">
                 <a:solidFill>
                   <a:srgbClr val="25342A"/>
                 </a:solidFill>
                 <a:latin typeface="Roboto"/>
               </a:rPr>
-              <a:t>The full cost is $3,820 a month; $2,275 of it is shared cost the grant doesn't pay for. Worth asking for as much of it as the funder allows at renewal.</a:t>
-            </a:r>
-          </a:p>
-        </p:txBody>
-      </p:sp>
-      <p:sp>
-        <p:nvSpPr>
-          <p:cNvPr id="11" name="TextBox 10"/>
+              <a:t>The full cost is $1,521 a month; $906 of it is shared cost the grant doesn't pay for. Worth asking for as much of it as the funder allows at renewal.</a:t>
+            </a:r>
+          </a:p>
+        </p:txBody>
+      </p:sp>
+      <p:sp>
+        <p:nvSpPr>
+          <p:cNvPr id="13" name="TextBox 12"/>
           <p:cNvSpPr txBox="1"/>
           <p:nvPr/>
         </p:nvSpPr>
         <p:spPr>
           <a:xfrm>
             <a:off x="457200" y="6492240"/>
-            <a:ext cx="3657600" cy="274320"/>
+            <a:ext cx="2926080" cy="274320"/>
           </a:xfrm>
           <a:prstGeom prst="rect">
             <a:avLst/>
@@ -7602,7 +9854,7 @@
           <a:noFill/>
         </p:spPr>
         <p:txBody>
-          <a:bodyPr wrap="square">
+          <a:bodyPr wrap="square" lIns="45720" rIns="45720">
             <a:spAutoFit/>
           </a:bodyPr>
           <a:lstStyle/>
@@ -7626,14 +9878,14 @@
       </p:sp>
       <p:sp>
         <p:nvSpPr>
-          <p:cNvPr id="12" name="TextBox 11"/>
+          <p:cNvPr id="14" name="TextBox 13"/>
           <p:cNvSpPr txBox="1"/>
           <p:nvPr/>
         </p:nvSpPr>
         <p:spPr>
           <a:xfrm>
-            <a:off x="4297680" y="6492240"/>
-            <a:ext cx="3657600" cy="274320"/>
+            <a:off x="3108960" y="6492240"/>
+            <a:ext cx="5943600" cy="274320"/>
           </a:xfrm>
           <a:prstGeom prst="rect">
             <a:avLst/>
@@ -7641,7 +9893,7 @@
           <a:noFill/>
         </p:spPr>
         <p:txBody>
-          <a:bodyPr wrap="square">
+          <a:bodyPr wrap="square" lIns="45720" rIns="45720">
             <a:spAutoFit/>
           </a:bodyPr>
           <a:lstStyle/>
@@ -7658,14 +9910,14 @@
                 </a:solidFill>
                 <a:latin typeface="Roboto"/>
               </a:rPr>
-              <a:t>Data retrieved 2pm, Tue 6 Oct 2026 · Sample data</a:t>
-            </a:r>
-          </a:p>
-        </p:txBody>
-      </p:sp>
-      <p:sp>
-        <p:nvSpPr>
-          <p:cNvPr id="13" name="TextBox 12"/>
+              <a:t>Data retrieved 2pm, Tue 6 Oct 2026 · Generated 8 Oct 2026, 9:35am · Sample data · Made with Python (python-pptx)</a:t>
+            </a:r>
+          </a:p>
+        </p:txBody>
+      </p:sp>
+      <p:sp>
+        <p:nvSpPr>
+          <p:cNvPr id="15" name="TextBox 14"/>
           <p:cNvSpPr txBox="1"/>
           <p:nvPr/>
         </p:nvSpPr>
@@ -7680,7 +9932,7 @@
           <a:noFill/>
         </p:spPr>
         <p:txBody>
-          <a:bodyPr wrap="square">
+          <a:bodyPr wrap="square" lIns="45720" rIns="45720">
             <a:spAutoFit/>
           </a:bodyPr>
           <a:lstStyle/>
@@ -7697,7 +9949,7 @@
                 </a:solidFill>
                 <a:latin typeface="Roboto"/>
               </a:rPr>
-              <a:t>Slide 7 of 11</a:t>
+              <a:t>Slide 7 of 8</a:t>
             </a:r>
           </a:p>
         </p:txBody>
@@ -7722,7 +9974,44 @@
       <p:grpSpPr/>
       <p:sp>
         <p:nvSpPr>
-          <p:cNvPr id="2" name="Rectangle 1"/>
+          <p:cNvPr id="2" name="Title 1"/>
+          <p:cNvSpPr>
+            <a:spLocks noGrp="1"/>
+          </p:cNvSpPr>
+          <p:nvPr>
+            <p:ph type="title"/>
+          </p:nvPr>
+        </p:nvSpPr>
+        <p:spPr>
+          <a:xfrm>
+            <a:off x="457200" y="384048"/>
+            <a:ext cx="11277295" cy="475488"/>
+          </a:xfrm>
+        </p:spPr>
+        <p:txBody>
+          <a:bodyPr wrap="square" lIns="45720" rIns="45720" tIns="0" bIns="0" anchor="t"/>
+          <a:lstStyle/>
+          <a:p>
+            <a:pPr algn="l">
+              <a:defRPr>
+                <a:latin typeface="Roboto"/>
+              </a:defRPr>
+            </a:pPr>
+            <a:r>
+              <a:rPr sz="2400" b="1">
+                <a:solidFill>
+                  <a:srgbClr val="25342A"/>
+                </a:solidFill>
+                <a:latin typeface="Roboto"/>
+              </a:rPr>
+              <a:t>Volunteer coordinator</a:t>
+            </a:r>
+          </a:p>
+        </p:txBody>
+      </p:sp>
+      <p:sp>
+        <p:nvSpPr>
+          <p:cNvPr id="3" name="Rectangle 2"/>
           <p:cNvSpPr/>
           <p:nvPr/>
         </p:nvSpPr>
@@ -7769,14 +10058,14 @@
       </p:sp>
       <p:sp>
         <p:nvSpPr>
-          <p:cNvPr id="3" name="TextBox 2"/>
+          <p:cNvPr id="4" name="TextBox 3"/>
           <p:cNvSpPr txBox="1"/>
           <p:nvPr/>
         </p:nvSpPr>
         <p:spPr>
           <a:xfrm>
-            <a:off x="457200" y="164592"/>
-            <a:ext cx="7315200" cy="274320"/>
+            <a:off x="457200" y="146304"/>
+            <a:ext cx="8229600" cy="256032"/>
           </a:xfrm>
           <a:prstGeom prst="rect">
             <a:avLst/>
@@ -7784,7 +10073,7 @@
           <a:noFill/>
         </p:spPr>
         <p:txBody>
-          <a:bodyPr wrap="square">
+          <a:bodyPr wrap="square" lIns="45720" rIns="45720">
             <a:spAutoFit/>
           </a:bodyPr>
           <a:lstStyle/>
@@ -7808,14 +10097,14 @@
       </p:sp>
       <p:sp>
         <p:nvSpPr>
-          <p:cNvPr id="4" name="TextBox 3"/>
+          <p:cNvPr id="5" name="TextBox 4"/>
           <p:cNvSpPr txBox="1"/>
           <p:nvPr/>
         </p:nvSpPr>
         <p:spPr>
           <a:xfrm>
-            <a:off x="457200" y="411480"/>
-            <a:ext cx="11247120" cy="548640"/>
+            <a:off x="457200" y="914400"/>
+            <a:ext cx="11277295" cy="263652"/>
           </a:xfrm>
           <a:prstGeom prst="rect">
             <a:avLst/>
@@ -7823,7 +10112,7 @@
           <a:noFill/>
         </p:spPr>
         <p:txBody>
-          <a:bodyPr wrap="square">
+          <a:bodyPr wrap="square" lIns="45720" rIns="45720">
             <a:spAutoFit/>
           </a:bodyPr>
           <a:lstStyle/>
@@ -7834,27 +10123,45 @@
               </a:defRPr>
             </a:pPr>
             <a:r>
-              <a:rPr sz="2400" b="1">
+              <a:rPr sz="1200" b="0">
                 <a:solidFill>
-                  <a:srgbClr val="25342A"/>
+                  <a:srgbClr val="5F6F63"/>
                 </a:solidFill>
                 <a:latin typeface="Roboto"/>
               </a:rPr>
-              <a:t>What it shows · Program: Digital literacy</a:t>
-            </a:r>
-          </a:p>
-        </p:txBody>
-      </p:sp>
-      <p:sp>
-        <p:nvSpPr>
-          <p:cNvPr id="5" name="Rectangle 4"/>
+              <a:t>Grant spending, by month · Volunteer coordinator</a:t>
+            </a:r>
+          </a:p>
+        </p:txBody>
+      </p:sp>
+      <p:graphicFrame>
+        <p:nvGraphicFramePr>
+          <p:cNvPr id="6" name="Chart 5"/>
+          <p:cNvGraphicFramePr>
+            <a:graphicFrameLocks noGrp="1"/>
+          </p:cNvGraphicFramePr>
+          <p:nvPr/>
+        </p:nvGraphicFramePr>
+        <p:xfrm>
+          <a:off x="457200" y="1278636"/>
+          <a:ext cx="11277295" cy="3643884"/>
+        </p:xfrm>
+        <a:graphic>
+          <a:graphicData uri="http://schemas.openxmlformats.org/drawingml/2006/chart">
+            <c:chart xmlns:c="http://schemas.openxmlformats.org/drawingml/2006/chart" r:id="rId3"/>
+          </a:graphicData>
+        </a:graphic>
+      </p:graphicFrame>
+      <p:sp>
+        <p:nvSpPr>
+          <p:cNvPr id="7" name="Rectangle 6"/>
           <p:cNvSpPr/>
           <p:nvPr/>
         </p:nvSpPr>
         <p:spPr>
           <a:xfrm>
-            <a:off x="457200" y="1554480"/>
-            <a:ext cx="5501487" cy="4389120"/>
+            <a:off x="457200" y="5013960"/>
+            <a:ext cx="5501487" cy="1295400"/>
           </a:xfrm>
           <a:prstGeom prst="rect">
             <a:avLst/>
@@ -7896,14 +10203,14 @@
       </p:sp>
       <p:sp>
         <p:nvSpPr>
-          <p:cNvPr id="6" name="TextBox 5"/>
+          <p:cNvPr id="8" name="TextBox 7"/>
           <p:cNvSpPr txBox="1"/>
           <p:nvPr/>
         </p:nvSpPr>
         <p:spPr>
           <a:xfrm>
-            <a:off x="685800" y="1691640"/>
-            <a:ext cx="5044287" cy="365760"/>
+            <a:off x="594360" y="5068824"/>
+            <a:ext cx="5227167" cy="274320"/>
           </a:xfrm>
           <a:prstGeom prst="rect">
             <a:avLst/>
@@ -7911,7 +10218,7 @@
           <a:noFill/>
         </p:spPr>
         <p:txBody>
-          <a:bodyPr wrap="square">
+          <a:bodyPr wrap="square" lIns="45720" rIns="45720">
             <a:spAutoFit/>
           </a:bodyPr>
           <a:lstStyle/>
@@ -7922,7 +10229,7 @@
               </a:defRPr>
             </a:pPr>
             <a:r>
-              <a:rPr sz="1100" b="1">
+              <a:rPr sz="1000" b="1">
                 <a:solidFill>
                   <a:srgbClr val="5F6F63"/>
                 </a:solidFill>
@@ -7935,14 +10242,14 @@
       </p:sp>
       <p:sp>
         <p:nvSpPr>
-          <p:cNvPr id="7" name="TextBox 6"/>
+          <p:cNvPr id="9" name="TextBox 8"/>
           <p:cNvSpPr txBox="1"/>
           <p:nvPr/>
         </p:nvSpPr>
         <p:spPr>
           <a:xfrm>
-            <a:off x="685800" y="2103120"/>
-            <a:ext cx="5044287" cy="3749039"/>
+            <a:off x="594360" y="5343144"/>
+            <a:ext cx="5227167" cy="929640"/>
           </a:xfrm>
           <a:prstGeom prst="rect">
             <a:avLst/>
@@ -7950,7 +10257,7 @@
           <a:noFill/>
         </p:spPr>
         <p:txBody>
-          <a:bodyPr wrap="square">
+          <a:bodyPr wrap="square" lIns="45720" rIns="45720">
             <a:spAutoFit/>
           </a:bodyPr>
           <a:lstStyle/>
@@ -7961,27 +10268,27 @@
               </a:defRPr>
             </a:pPr>
             <a:r>
-              <a:rPr sz="1600" b="0">
+              <a:rPr sz="1200" b="0">
                 <a:solidFill>
                   <a:srgbClr val="25342A"/>
                 </a:solidFill>
                 <a:latin typeface="Roboto"/>
               </a:rPr>
-              <a:t>Digital literacy cost $1,736 in full in October so far: $702 paid by the Philanthropic foundation grant, and $1,034 of shared costs no grant covers. It has spent 92.8% of its budget to date, with $29,698 left and 5 months to go.</a:t>
-            </a:r>
-          </a:p>
-        </p:txBody>
-      </p:sp>
-      <p:sp>
-        <p:nvSpPr>
-          <p:cNvPr id="8" name="Rectangle 7"/>
+              <a:t>Volunteer coordinator cost $1,061 in full in October so far: $429 paid by the State volunteering grant grant, and $632 of shared costs no grant covers. It has spent 89.3% of its budget to date, with $14,571 left and 4 months to go.</a:t>
+            </a:r>
+          </a:p>
+        </p:txBody>
+      </p:sp>
+      <p:sp>
+        <p:nvSpPr>
+          <p:cNvPr id="10" name="Rectangle 9"/>
           <p:cNvSpPr/>
           <p:nvPr/>
         </p:nvSpPr>
         <p:spPr>
           <a:xfrm>
-            <a:off x="6233007" y="1554480"/>
-            <a:ext cx="5501487" cy="4389120"/>
+            <a:off x="6233007" y="5013960"/>
+            <a:ext cx="5501487" cy="1295400"/>
           </a:xfrm>
           <a:prstGeom prst="rect">
             <a:avLst/>
@@ -8023,14 +10330,14 @@
       </p:sp>
       <p:sp>
         <p:nvSpPr>
-          <p:cNvPr id="9" name="TextBox 8"/>
+          <p:cNvPr id="11" name="TextBox 10"/>
           <p:cNvSpPr txBox="1"/>
           <p:nvPr/>
         </p:nvSpPr>
         <p:spPr>
           <a:xfrm>
-            <a:off x="6461607" y="1691640"/>
-            <a:ext cx="5044287" cy="365760"/>
+            <a:off x="6370167" y="5068824"/>
+            <a:ext cx="5227167" cy="274320"/>
           </a:xfrm>
           <a:prstGeom prst="rect">
             <a:avLst/>
@@ -8038,7 +10345,7 @@
           <a:noFill/>
         </p:spPr>
         <p:txBody>
-          <a:bodyPr wrap="square">
+          <a:bodyPr wrap="square" lIns="45720" rIns="45720">
             <a:spAutoFit/>
           </a:bodyPr>
           <a:lstStyle/>
@@ -8049,7 +10356,7 @@
               </a:defRPr>
             </a:pPr>
             <a:r>
-              <a:rPr sz="1100" b="1">
+              <a:rPr sz="1000" b="1">
                 <a:solidFill>
                   <a:srgbClr val="5F6F63"/>
                 </a:solidFill>
@@ -8062,14 +10369,14 @@
       </p:sp>
       <p:sp>
         <p:nvSpPr>
-          <p:cNvPr id="10" name="TextBox 9"/>
+          <p:cNvPr id="12" name="TextBox 11"/>
           <p:cNvSpPr txBox="1"/>
           <p:nvPr/>
         </p:nvSpPr>
         <p:spPr>
           <a:xfrm>
-            <a:off x="6461607" y="2103120"/>
-            <a:ext cx="5044287" cy="3749039"/>
+            <a:off x="6370167" y="5343144"/>
+            <a:ext cx="5227167" cy="929640"/>
           </a:xfrm>
           <a:prstGeom prst="rect">
             <a:avLst/>
@@ -8077,7 +10384,7 @@
           <a:noFill/>
         </p:spPr>
         <p:txBody>
-          <a:bodyPr wrap="square">
+          <a:bodyPr wrap="square" lIns="45720" rIns="45720">
             <a:spAutoFit/>
           </a:bodyPr>
           <a:lstStyle/>
@@ -8088,27 +10395,27 @@
               </a:defRPr>
             </a:pPr>
             <a:r>
-              <a:rPr sz="1600" b="0">
+              <a:rPr sz="1200" b="0">
                 <a:solidFill>
                   <a:srgbClr val="25342A"/>
                 </a:solidFill>
                 <a:latin typeface="Roboto"/>
               </a:rPr>
-              <a:t>The full cost is $1,736 a month; $1,034 of it is shared cost the grant doesn't pay for. Worth asking for as much of it as the funder allows at renewal.</a:t>
-            </a:r>
-          </a:p>
-        </p:txBody>
-      </p:sp>
-      <p:sp>
-        <p:nvSpPr>
-          <p:cNvPr id="11" name="TextBox 10"/>
+              <a:t>The full cost is $1,061 a month; $632 of it is shared cost the grant doesn't pay for. Worth asking for as much of it as the funder allows at renewal.</a:t>
+            </a:r>
+          </a:p>
+        </p:txBody>
+      </p:sp>
+      <p:sp>
+        <p:nvSpPr>
+          <p:cNvPr id="13" name="TextBox 12"/>
           <p:cNvSpPr txBox="1"/>
           <p:nvPr/>
         </p:nvSpPr>
         <p:spPr>
           <a:xfrm>
             <a:off x="457200" y="6492240"/>
-            <a:ext cx="3657600" cy="274320"/>
+            <a:ext cx="2926080" cy="274320"/>
           </a:xfrm>
           <a:prstGeom prst="rect">
             <a:avLst/>
@@ -8116,7 +10423,7 @@
           <a:noFill/>
         </p:spPr>
         <p:txBody>
-          <a:bodyPr wrap="square">
+          <a:bodyPr wrap="square" lIns="45720" rIns="45720">
             <a:spAutoFit/>
           </a:bodyPr>
           <a:lstStyle/>
@@ -8140,14 +10447,14 @@
       </p:sp>
       <p:sp>
         <p:nvSpPr>
-          <p:cNvPr id="12" name="TextBox 11"/>
+          <p:cNvPr id="14" name="TextBox 13"/>
           <p:cNvSpPr txBox="1"/>
           <p:nvPr/>
         </p:nvSpPr>
         <p:spPr>
           <a:xfrm>
-            <a:off x="4297680" y="6492240"/>
-            <a:ext cx="3657600" cy="274320"/>
+            <a:off x="3108960" y="6492240"/>
+            <a:ext cx="5943600" cy="274320"/>
           </a:xfrm>
           <a:prstGeom prst="rect">
             <a:avLst/>
@@ -8155,7 +10462,7 @@
           <a:noFill/>
         </p:spPr>
         <p:txBody>
-          <a:bodyPr wrap="square">
+          <a:bodyPr wrap="square" lIns="45720" rIns="45720">
             <a:spAutoFit/>
           </a:bodyPr>
           <a:lstStyle/>
@@ -8172,14 +10479,14 @@
                 </a:solidFill>
                 <a:latin typeface="Roboto"/>
               </a:rPr>
-              <a:t>Data retrieved 2pm, Tue 6 Oct 2026 · Sample data</a:t>
-            </a:r>
-          </a:p>
-        </p:txBody>
-      </p:sp>
-      <p:sp>
-        <p:nvSpPr>
-          <p:cNvPr id="13" name="TextBox 12"/>
+              <a:t>Data retrieved 2pm, Tue 6 Oct 2026 · Generated 8 Oct 2026, 9:35am · Sample data · Made with Python (python-pptx)</a:t>
+            </a:r>
+          </a:p>
+        </p:txBody>
+      </p:sp>
+      <p:sp>
+        <p:nvSpPr>
+          <p:cNvPr id="15" name="TextBox 14"/>
           <p:cNvSpPr txBox="1"/>
           <p:nvPr/>
         </p:nvSpPr>
@@ -8194,7 +10501,7 @@
           <a:noFill/>
         </p:spPr>
         <p:txBody>
-          <a:bodyPr wrap="square">
+          <a:bodyPr wrap="square" lIns="45720" rIns="45720">
             <a:spAutoFit/>
           </a:bodyPr>
           <a:lstStyle/>
@@ -8211,521 +10518,7 @@
                 </a:solidFill>
                 <a:latin typeface="Roboto"/>
               </a:rPr>
-              <a:t>Slide 8 of 11</a:t>
-            </a:r>
-          </a:p>
-        </p:txBody>
-      </p:sp>
-    </p:spTree>
-  </p:cSld>
-  <p:clrMapOvr>
-    <a:masterClrMapping/>
-  </p:clrMapOvr>
-</p:sld>
-</file>
-
-<file path=ppt/slides/slide9.xml><?xml version="1.0" encoding="utf-8"?>
-<p:sld xmlns:a="http://schemas.openxmlformats.org/drawingml/2006/main" xmlns:p="http://schemas.openxmlformats.org/presentationml/2006/main" xmlns:r="http://schemas.openxmlformats.org/officeDocument/2006/relationships">
-  <p:cSld>
-    <p:spTree>
-      <p:nvGrpSpPr>
-        <p:cNvPr id="1" name=""/>
-        <p:cNvGrpSpPr/>
-        <p:nvPr/>
-      </p:nvGrpSpPr>
-      <p:grpSpPr/>
-      <p:sp>
-        <p:nvSpPr>
-          <p:cNvPr id="2" name="Rectangle 1"/>
-          <p:cNvSpPr/>
-          <p:nvPr/>
-        </p:nvSpPr>
-        <p:spPr>
-          <a:xfrm>
-            <a:off x="0" y="0"/>
-            <a:ext cx="12191695" cy="73152"/>
-          </a:xfrm>
-          <a:prstGeom prst="rect">
-            <a:avLst/>
-          </a:prstGeom>
-          <a:solidFill>
-            <a:srgbClr val="2F7A5D"/>
-          </a:solidFill>
-          <a:ln>
-            <a:noFill/>
-          </a:ln>
-        </p:spPr>
-        <p:style>
-          <a:lnRef idx="1">
-            <a:schemeClr val="accent1"/>
-          </a:lnRef>
-          <a:fillRef idx="3">
-            <a:schemeClr val="accent1"/>
-          </a:fillRef>
-          <a:effectRef idx="2">
-            <a:schemeClr val="accent1"/>
-          </a:effectRef>
-          <a:fontRef idx="minor">
-            <a:schemeClr val="lt1"/>
-          </a:fontRef>
-        </p:style>
-        <p:txBody>
-          <a:bodyPr rtlCol="0" anchor="ctr"/>
-          <a:lstStyle/>
-          <a:p>
-            <a:pPr algn="ctr">
-              <a:defRPr>
-                <a:latin typeface="Roboto"/>
-              </a:defRPr>
-            </a:pPr>
-          </a:p>
-        </p:txBody>
-      </p:sp>
-      <p:sp>
-        <p:nvSpPr>
-          <p:cNvPr id="3" name="TextBox 2"/>
-          <p:cNvSpPr txBox="1"/>
-          <p:nvPr/>
-        </p:nvSpPr>
-        <p:spPr>
-          <a:xfrm>
-            <a:off x="457200" y="164592"/>
-            <a:ext cx="7315200" cy="274320"/>
-          </a:xfrm>
-          <a:prstGeom prst="rect">
-            <a:avLst/>
-          </a:prstGeom>
-          <a:noFill/>
-        </p:spPr>
-        <p:txBody>
-          <a:bodyPr wrap="square">
-            <a:spAutoFit/>
-          </a:bodyPr>
-          <a:lstStyle/>
-          <a:p>
-            <a:pPr>
-              <a:defRPr>
-                <a:latin typeface="Roboto"/>
-              </a:defRPr>
-            </a:pPr>
-            <a:r>
-              <a:rPr sz="1000" b="0">
-                <a:solidFill>
-                  <a:srgbClr val="5F6F63"/>
-                </a:solidFill>
-                <a:latin typeface="Roboto"/>
-              </a:rPr>
-              <a:t>Sample Community Services Ltd · What does each program really cost?</a:t>
-            </a:r>
-          </a:p>
-        </p:txBody>
-      </p:sp>
-      <p:sp>
-        <p:nvSpPr>
-          <p:cNvPr id="4" name="TextBox 3"/>
-          <p:cNvSpPr txBox="1"/>
-          <p:nvPr/>
-        </p:nvSpPr>
-        <p:spPr>
-          <a:xfrm>
-            <a:off x="457200" y="411480"/>
-            <a:ext cx="11247120" cy="548640"/>
-          </a:xfrm>
-          <a:prstGeom prst="rect">
-            <a:avLst/>
-          </a:prstGeom>
-          <a:noFill/>
-        </p:spPr>
-        <p:txBody>
-          <a:bodyPr wrap="square">
-            <a:spAutoFit/>
-          </a:bodyPr>
-          <a:lstStyle/>
-          <a:p>
-            <a:pPr>
-              <a:defRPr>
-                <a:latin typeface="Roboto"/>
-              </a:defRPr>
-            </a:pPr>
-            <a:r>
-              <a:rPr sz="2400" b="1">
-                <a:solidFill>
-                  <a:srgbClr val="25342A"/>
-                </a:solidFill>
-                <a:latin typeface="Roboto"/>
-              </a:rPr>
-              <a:t>What it shows · Program: Community meals</a:t>
-            </a:r>
-          </a:p>
-        </p:txBody>
-      </p:sp>
-      <p:sp>
-        <p:nvSpPr>
-          <p:cNvPr id="5" name="Rectangle 4"/>
-          <p:cNvSpPr/>
-          <p:nvPr/>
-        </p:nvSpPr>
-        <p:spPr>
-          <a:xfrm>
-            <a:off x="457200" y="1554480"/>
-            <a:ext cx="5501487" cy="4389120"/>
-          </a:xfrm>
-          <a:prstGeom prst="rect">
-            <a:avLst/>
-          </a:prstGeom>
-          <a:solidFill>
-            <a:srgbClr val="FFFFFF"/>
-          </a:solidFill>
-          <a:ln>
-            <a:solidFill>
-              <a:srgbClr val="DCE8DC"/>
-            </a:solidFill>
-          </a:ln>
-        </p:spPr>
-        <p:style>
-          <a:lnRef idx="1">
-            <a:schemeClr val="accent1"/>
-          </a:lnRef>
-          <a:fillRef idx="3">
-            <a:schemeClr val="accent1"/>
-          </a:fillRef>
-          <a:effectRef idx="2">
-            <a:schemeClr val="accent1"/>
-          </a:effectRef>
-          <a:fontRef idx="minor">
-            <a:schemeClr val="lt1"/>
-          </a:fontRef>
-        </p:style>
-        <p:txBody>
-          <a:bodyPr rtlCol="0" anchor="ctr"/>
-          <a:lstStyle/>
-          <a:p>
-            <a:pPr algn="ctr">
-              <a:defRPr>
-                <a:latin typeface="Roboto"/>
-              </a:defRPr>
-            </a:pPr>
-          </a:p>
-        </p:txBody>
-      </p:sp>
-      <p:sp>
-        <p:nvSpPr>
-          <p:cNvPr id="6" name="TextBox 5"/>
-          <p:cNvSpPr txBox="1"/>
-          <p:nvPr/>
-        </p:nvSpPr>
-        <p:spPr>
-          <a:xfrm>
-            <a:off x="685800" y="1691640"/>
-            <a:ext cx="5044287" cy="365760"/>
-          </a:xfrm>
-          <a:prstGeom prst="rect">
-            <a:avLst/>
-          </a:prstGeom>
-          <a:noFill/>
-        </p:spPr>
-        <p:txBody>
-          <a:bodyPr wrap="square">
-            <a:spAutoFit/>
-          </a:bodyPr>
-          <a:lstStyle/>
-          <a:p>
-            <a:pPr>
-              <a:defRPr>
-                <a:latin typeface="Roboto"/>
-              </a:defRPr>
-            </a:pPr>
-            <a:r>
-              <a:rPr sz="1100" b="1">
-                <a:solidFill>
-                  <a:srgbClr val="5F6F63"/>
-                </a:solidFill>
-                <a:latin typeface="Roboto"/>
-              </a:rPr>
-              <a:t>WHAT IT SHOWS</a:t>
-            </a:r>
-          </a:p>
-        </p:txBody>
-      </p:sp>
-      <p:sp>
-        <p:nvSpPr>
-          <p:cNvPr id="7" name="TextBox 6"/>
-          <p:cNvSpPr txBox="1"/>
-          <p:nvPr/>
-        </p:nvSpPr>
-        <p:spPr>
-          <a:xfrm>
-            <a:off x="685800" y="2103120"/>
-            <a:ext cx="5044287" cy="3749039"/>
-          </a:xfrm>
-          <a:prstGeom prst="rect">
-            <a:avLst/>
-          </a:prstGeom>
-          <a:noFill/>
-        </p:spPr>
-        <p:txBody>
-          <a:bodyPr wrap="square">
-            <a:spAutoFit/>
-          </a:bodyPr>
-          <a:lstStyle/>
-          <a:p>
-            <a:pPr>
-              <a:defRPr>
-                <a:latin typeface="Roboto"/>
-              </a:defRPr>
-            </a:pPr>
-            <a:r>
-              <a:rPr sz="1600" b="0">
-                <a:solidFill>
-                  <a:srgbClr val="25342A"/>
-                </a:solidFill>
-                <a:latin typeface="Roboto"/>
-              </a:rPr>
-              <a:t>Community meals cost $1,521 in full in October so far: $615 paid by the Local council community grant grant, and $906 of shared costs no grant covers. It has spent 78.8% of its budget to date, with $35,385 left and 8 months to go.</a:t>
-            </a:r>
-          </a:p>
-        </p:txBody>
-      </p:sp>
-      <p:sp>
-        <p:nvSpPr>
-          <p:cNvPr id="8" name="Rectangle 7"/>
-          <p:cNvSpPr/>
-          <p:nvPr/>
-        </p:nvSpPr>
-        <p:spPr>
-          <a:xfrm>
-            <a:off x="6233007" y="1554480"/>
-            <a:ext cx="5501487" cy="4389120"/>
-          </a:xfrm>
-          <a:prstGeom prst="rect">
-            <a:avLst/>
-          </a:prstGeom>
-          <a:solidFill>
-            <a:srgbClr val="EEF5F0"/>
-          </a:solidFill>
-          <a:ln>
-            <a:solidFill>
-              <a:srgbClr val="DCE8DC"/>
-            </a:solidFill>
-          </a:ln>
-        </p:spPr>
-        <p:style>
-          <a:lnRef idx="1">
-            <a:schemeClr val="accent1"/>
-          </a:lnRef>
-          <a:fillRef idx="3">
-            <a:schemeClr val="accent1"/>
-          </a:fillRef>
-          <a:effectRef idx="2">
-            <a:schemeClr val="accent1"/>
-          </a:effectRef>
-          <a:fontRef idx="minor">
-            <a:schemeClr val="lt1"/>
-          </a:fontRef>
-        </p:style>
-        <p:txBody>
-          <a:bodyPr rtlCol="0" anchor="ctr"/>
-          <a:lstStyle/>
-          <a:p>
-            <a:pPr algn="ctr">
-              <a:defRPr>
-                <a:latin typeface="Roboto"/>
-              </a:defRPr>
-            </a:pPr>
-          </a:p>
-        </p:txBody>
-      </p:sp>
-      <p:sp>
-        <p:nvSpPr>
-          <p:cNvPr id="9" name="TextBox 8"/>
-          <p:cNvSpPr txBox="1"/>
-          <p:nvPr/>
-        </p:nvSpPr>
-        <p:spPr>
-          <a:xfrm>
-            <a:off x="6461607" y="1691640"/>
-            <a:ext cx="5044287" cy="365760"/>
-          </a:xfrm>
-          <a:prstGeom prst="rect">
-            <a:avLst/>
-          </a:prstGeom>
-          <a:noFill/>
-        </p:spPr>
-        <p:txBody>
-          <a:bodyPr wrap="square">
-            <a:spAutoFit/>
-          </a:bodyPr>
-          <a:lstStyle/>
-          <a:p>
-            <a:pPr>
-              <a:defRPr>
-                <a:latin typeface="Roboto"/>
-              </a:defRPr>
-            </a:pPr>
-            <a:r>
-              <a:rPr sz="1100" b="1">
-                <a:solidFill>
-                  <a:srgbClr val="5F6F63"/>
-                </a:solidFill>
-                <a:latin typeface="Roboto"/>
-              </a:rPr>
-              <a:t>WHAT YOU'D DO ABOUT IT</a:t>
-            </a:r>
-          </a:p>
-        </p:txBody>
-      </p:sp>
-      <p:sp>
-        <p:nvSpPr>
-          <p:cNvPr id="10" name="TextBox 9"/>
-          <p:cNvSpPr txBox="1"/>
-          <p:nvPr/>
-        </p:nvSpPr>
-        <p:spPr>
-          <a:xfrm>
-            <a:off x="6461607" y="2103120"/>
-            <a:ext cx="5044287" cy="3749039"/>
-          </a:xfrm>
-          <a:prstGeom prst="rect">
-            <a:avLst/>
-          </a:prstGeom>
-          <a:noFill/>
-        </p:spPr>
-        <p:txBody>
-          <a:bodyPr wrap="square">
-            <a:spAutoFit/>
-          </a:bodyPr>
-          <a:lstStyle/>
-          <a:p>
-            <a:pPr>
-              <a:defRPr>
-                <a:latin typeface="Roboto"/>
-              </a:defRPr>
-            </a:pPr>
-            <a:r>
-              <a:rPr sz="1600" b="0">
-                <a:solidFill>
-                  <a:srgbClr val="25342A"/>
-                </a:solidFill>
-                <a:latin typeface="Roboto"/>
-              </a:rPr>
-              <a:t>The full cost is $1,521 a month; $906 of it is shared cost the grant doesn't pay for. Worth asking for as much of it as the funder allows at renewal.</a:t>
-            </a:r>
-          </a:p>
-        </p:txBody>
-      </p:sp>
-      <p:sp>
-        <p:nvSpPr>
-          <p:cNvPr id="11" name="TextBox 10"/>
-          <p:cNvSpPr txBox="1"/>
-          <p:nvPr/>
-        </p:nvSpPr>
-        <p:spPr>
-          <a:xfrm>
-            <a:off x="457200" y="6492240"/>
-            <a:ext cx="3657600" cy="274320"/>
-          </a:xfrm>
-          <a:prstGeom prst="rect">
-            <a:avLst/>
-          </a:prstGeom>
-          <a:noFill/>
-        </p:spPr>
-        <p:txBody>
-          <a:bodyPr wrap="square">
-            <a:spAutoFit/>
-          </a:bodyPr>
-          <a:lstStyle/>
-          <a:p>
-            <a:pPr>
-              <a:defRPr>
-                <a:latin typeface="Roboto"/>
-              </a:defRPr>
-            </a:pPr>
-            <a:r>
-              <a:rPr sz="900" b="0">
-                <a:solidFill>
-                  <a:srgbClr val="5F6F63"/>
-                </a:solidFill>
-                <a:latin typeface="Roboto"/>
-              </a:rPr>
-              <a:t>program-cost.pptx</a:t>
-            </a:r>
-          </a:p>
-        </p:txBody>
-      </p:sp>
-      <p:sp>
-        <p:nvSpPr>
-          <p:cNvPr id="12" name="TextBox 11"/>
-          <p:cNvSpPr txBox="1"/>
-          <p:nvPr/>
-        </p:nvSpPr>
-        <p:spPr>
-          <a:xfrm>
-            <a:off x="4297680" y="6492240"/>
-            <a:ext cx="3657600" cy="274320"/>
-          </a:xfrm>
-          <a:prstGeom prst="rect">
-            <a:avLst/>
-          </a:prstGeom>
-          <a:noFill/>
-        </p:spPr>
-        <p:txBody>
-          <a:bodyPr wrap="square">
-            <a:spAutoFit/>
-          </a:bodyPr>
-          <a:lstStyle/>
-          <a:p>
-            <a:pPr algn="ctr">
-              <a:defRPr>
-                <a:latin typeface="Roboto"/>
-              </a:defRPr>
-            </a:pPr>
-            <a:r>
-              <a:rPr sz="900" b="0">
-                <a:solidFill>
-                  <a:srgbClr val="5F6F63"/>
-                </a:solidFill>
-                <a:latin typeface="Roboto"/>
-              </a:rPr>
-              <a:t>Data retrieved 2pm, Tue 6 Oct 2026 · Sample data</a:t>
-            </a:r>
-          </a:p>
-        </p:txBody>
-      </p:sp>
-      <p:sp>
-        <p:nvSpPr>
-          <p:cNvPr id="13" name="TextBox 12"/>
-          <p:cNvSpPr txBox="1"/>
-          <p:nvPr/>
-        </p:nvSpPr>
-        <p:spPr>
-          <a:xfrm>
-            <a:off x="8503920" y="6492240"/>
-            <a:ext cx="3200400" cy="274320"/>
-          </a:xfrm>
-          <a:prstGeom prst="rect">
-            <a:avLst/>
-          </a:prstGeom>
-          <a:noFill/>
-        </p:spPr>
-        <p:txBody>
-          <a:bodyPr wrap="square">
-            <a:spAutoFit/>
-          </a:bodyPr>
-          <a:lstStyle/>
-          <a:p>
-            <a:pPr algn="r">
-              <a:defRPr>
-                <a:latin typeface="Roboto"/>
-              </a:defRPr>
-            </a:pPr>
-            <a:r>
-              <a:rPr sz="900" b="0">
-                <a:solidFill>
-                  <a:srgbClr val="5F6F63"/>
-                </a:solidFill>
-                <a:latin typeface="Roboto"/>
-              </a:rPr>
-              <a:t>Slide 9 of 11</a:t>
+              <a:t>Slide 8 of 8</a:t>
             </a:r>
           </a:p>
         </p:txBody>
@@ -8739,6 +10532,326 @@
 </file>
 
 <file path=ppt/theme/theme1.xml><?xml version="1.0" encoding="utf-8"?>
+<a:theme xmlns:a="http://schemas.openxmlformats.org/drawingml/2006/main" name="Office Theme">
+  <a:themeElements>
+    <a:clrScheme name="Office">
+      <a:dk1>
+        <a:sysClr val="windowText" lastClr="000000"/>
+      </a:dk1>
+      <a:lt1>
+        <a:sysClr val="window" lastClr="FFFFFF"/>
+      </a:lt1>
+      <a:dk2>
+        <a:srgbClr val="25342A"/>
+      </a:dk2>
+      <a:lt2>
+        <a:srgbClr val="F4F7F2"/>
+      </a:lt2>
+      <a:accent1>
+        <a:srgbClr val="2F7A5D"/>
+      </a:accent1>
+      <a:accent2>
+        <a:srgbClr val="0E9F6E"/>
+      </a:accent2>
+      <a:accent3>
+        <a:srgbClr val="7D8790"/>
+      </a:accent3>
+      <a:accent4>
+        <a:srgbClr val="8A6D3B"/>
+      </a:accent4>
+      <a:accent5>
+        <a:srgbClr val="B42318"/>
+      </a:accent5>
+      <a:accent6>
+        <a:srgbClr val="8E9CAB"/>
+      </a:accent6>
+      <a:hlink>
+        <a:srgbClr val="0000FF"/>
+      </a:hlink>
+      <a:folHlink>
+        <a:srgbClr val="800080"/>
+      </a:folHlink>
+    </a:clrScheme>
+    <a:fontScheme name="Office">
+      <a:majorFont>
+        <a:latin typeface="Roboto"/>
+        <a:ea typeface=""/>
+        <a:cs typeface=""/>
+        <a:font script="Jpan" typeface="ＭＳ Ｐゴシック"/>
+        <a:font script="Hang" typeface="맑은 고딕"/>
+        <a:font script="Hans" typeface="宋体"/>
+        <a:font script="Hant" typeface="新細明體"/>
+        <a:font script="Arab" typeface="Times New Roman"/>
+        <a:font script="Hebr" typeface="Times New Roman"/>
+        <a:font script="Thai" typeface="Angsana New"/>
+        <a:font script="Ethi" typeface="Nyala"/>
+        <a:font script="Beng" typeface="Vrinda"/>
+        <a:font script="Gujr" typeface="Shruti"/>
+        <a:font script="Khmr" typeface="MoolBoran"/>
+        <a:font script="Knda" typeface="Tunga"/>
+        <a:font script="Guru" typeface="Raavi"/>
+        <a:font script="Cans" typeface="Euphemia"/>
+        <a:font script="Cher" typeface="Plantagenet Cherokee"/>
+        <a:font script="Yiii" typeface="Microsoft Yi Baiti"/>
+        <a:font script="Tibt" typeface="Microsoft Himalaya"/>
+        <a:font script="Thaa" typeface="MV Boli"/>
+        <a:font script="Deva" typeface="Mangal"/>
+        <a:font script="Telu" typeface="Gautami"/>
+        <a:font script="Taml" typeface="Latha"/>
+        <a:font script="Syrc" typeface="Estrangelo Edessa"/>
+        <a:font script="Orya" typeface="Kalinga"/>
+        <a:font script="Mlym" typeface="Kartika"/>
+        <a:font script="Laoo" typeface="DokChampa"/>
+        <a:font script="Sinh" typeface="Iskoola Pota"/>
+        <a:font script="Mong" typeface="Mongolian Baiti"/>
+        <a:font script="Viet" typeface="Times New Roman"/>
+        <a:font script="Uigh" typeface="Microsoft Uighur"/>
+        <a:font script="Geor" typeface="Sylfaen"/>
+      </a:majorFont>
+      <a:minorFont>
+        <a:latin typeface="Roboto"/>
+        <a:ea typeface=""/>
+        <a:cs typeface=""/>
+        <a:font script="Jpan" typeface="ＭＳ Ｐゴシック"/>
+        <a:font script="Hang" typeface="맑은 고딕"/>
+        <a:font script="Hans" typeface="宋体"/>
+        <a:font script="Hant" typeface="新細明體"/>
+        <a:font script="Arab" typeface="Arial"/>
+        <a:font script="Hebr" typeface="Arial"/>
+        <a:font script="Thai" typeface="Cordia New"/>
+        <a:font script="Ethi" typeface="Nyala"/>
+        <a:font script="Beng" typeface="Vrinda"/>
+        <a:font script="Gujr" typeface="Shruti"/>
+        <a:font script="Khmr" typeface="DaunPenh"/>
+        <a:font script="Knda" typeface="Tunga"/>
+        <a:font script="Guru" typeface="Raavi"/>
+        <a:font script="Cans" typeface="Euphemia"/>
+        <a:font script="Cher" typeface="Plantagenet Cherokee"/>
+        <a:font script="Yiii" typeface="Microsoft Yi Baiti"/>
+        <a:font script="Tibt" typeface="Microsoft Himalaya"/>
+        <a:font script="Thaa" typeface="MV Boli"/>
+        <a:font script="Deva" typeface="Mangal"/>
+        <a:font script="Telu" typeface="Gautami"/>
+        <a:font script="Taml" typeface="Latha"/>
+        <a:font script="Syrc" typeface="Estrangelo Edessa"/>
+        <a:font script="Orya" typeface="Kalinga"/>
+        <a:font script="Mlym" typeface="Kartika"/>
+        <a:font script="Laoo" typeface="DokChampa"/>
+        <a:font script="Sinh" typeface="Iskoola Pota"/>
+        <a:font script="Mong" typeface="Mongolian Baiti"/>
+        <a:font script="Viet" typeface="Arial"/>
+        <a:font script="Uigh" typeface="Microsoft Uighur"/>
+        <a:font script="Geor" typeface="Sylfaen"/>
+      </a:minorFont>
+    </a:fontScheme>
+    <a:fmtScheme name="Office">
+      <a:fillStyleLst>
+        <a:solidFill>
+          <a:schemeClr val="phClr"/>
+        </a:solidFill>
+        <a:gradFill rotWithShape="1">
+          <a:gsLst>
+            <a:gs pos="0">
+              <a:schemeClr val="phClr">
+                <a:tint val="50000"/>
+                <a:satMod val="300000"/>
+              </a:schemeClr>
+            </a:gs>
+            <a:gs pos="35000">
+              <a:schemeClr val="phClr">
+                <a:tint val="37000"/>
+                <a:satMod val="300000"/>
+              </a:schemeClr>
+            </a:gs>
+            <a:gs pos="100000">
+              <a:schemeClr val="phClr">
+                <a:tint val="15000"/>
+                <a:satMod val="350000"/>
+              </a:schemeClr>
+            </a:gs>
+          </a:gsLst>
+          <a:lin ang="16200000" scaled="1"/>
+        </a:gradFill>
+        <a:gradFill rotWithShape="1">
+          <a:gsLst>
+            <a:gs pos="0">
+              <a:schemeClr val="phClr">
+                <a:tint val="100000"/>
+                <a:shade val="100000"/>
+                <a:satMod val="130000"/>
+              </a:schemeClr>
+            </a:gs>
+            <a:gs pos="100000">
+              <a:schemeClr val="phClr">
+                <a:tint val="50000"/>
+                <a:shade val="100000"/>
+                <a:satMod val="350000"/>
+              </a:schemeClr>
+            </a:gs>
+          </a:gsLst>
+          <a:lin ang="16200000" scaled="0"/>
+        </a:gradFill>
+      </a:fillStyleLst>
+      <a:lnStyleLst>
+        <a:ln w="9525" cap="flat" cmpd="sng" algn="ctr">
+          <a:solidFill>
+            <a:schemeClr val="phClr">
+              <a:shade val="95000"/>
+              <a:satMod val="105000"/>
+            </a:schemeClr>
+          </a:solidFill>
+          <a:prstDash val="solid"/>
+        </a:ln>
+        <a:ln w="25400" cap="flat" cmpd="sng" algn="ctr">
+          <a:solidFill>
+            <a:schemeClr val="phClr"/>
+          </a:solidFill>
+          <a:prstDash val="solid"/>
+        </a:ln>
+        <a:ln w="38100" cap="flat" cmpd="sng" algn="ctr">
+          <a:solidFill>
+            <a:schemeClr val="phClr"/>
+          </a:solidFill>
+          <a:prstDash val="solid"/>
+        </a:ln>
+      </a:lnStyleLst>
+      <a:effectStyleLst>
+        <a:effectStyle>
+          <a:effectLst>
+            <a:outerShdw blurRad="40000" dist="20000" dir="5400000" rotWithShape="0">
+              <a:srgbClr val="000000">
+                <a:alpha val="38000"/>
+              </a:srgbClr>
+            </a:outerShdw>
+          </a:effectLst>
+        </a:effectStyle>
+        <a:effectStyle>
+          <a:effectLst>
+            <a:outerShdw blurRad="40000" dist="23000" dir="5400000" rotWithShape="0">
+              <a:srgbClr val="000000">
+                <a:alpha val="35000"/>
+              </a:srgbClr>
+            </a:outerShdw>
+          </a:effectLst>
+        </a:effectStyle>
+        <a:effectStyle>
+          <a:effectLst>
+            <a:outerShdw blurRad="40000" dist="23000" dir="5400000" rotWithShape="0">
+              <a:srgbClr val="000000">
+                <a:alpha val="35000"/>
+              </a:srgbClr>
+            </a:outerShdw>
+          </a:effectLst>
+          <a:scene3d>
+            <a:camera prst="orthographicFront">
+              <a:rot lat="0" lon="0" rev="0"/>
+            </a:camera>
+            <a:lightRig rig="threePt" dir="t">
+              <a:rot lat="0" lon="0" rev="1200000"/>
+            </a:lightRig>
+          </a:scene3d>
+          <a:sp3d>
+            <a:bevelT w="63500" h="25400"/>
+          </a:sp3d>
+        </a:effectStyle>
+      </a:effectStyleLst>
+      <a:bgFillStyleLst>
+        <a:solidFill>
+          <a:schemeClr val="phClr"/>
+        </a:solidFill>
+        <a:gradFill rotWithShape="1">
+          <a:gsLst>
+            <a:gs pos="0">
+              <a:schemeClr val="phClr">
+                <a:tint val="40000"/>
+                <a:satMod val="350000"/>
+              </a:schemeClr>
+            </a:gs>
+            <a:gs pos="40000">
+              <a:schemeClr val="phClr">
+                <a:tint val="45000"/>
+                <a:shade val="99000"/>
+                <a:satMod val="350000"/>
+              </a:schemeClr>
+            </a:gs>
+            <a:gs pos="100000">
+              <a:schemeClr val="phClr">
+                <a:shade val="20000"/>
+                <a:satMod val="255000"/>
+              </a:schemeClr>
+            </a:gs>
+          </a:gsLst>
+          <a:path path="circle">
+            <a:fillToRect l="50000" t="-80000" r="50000" b="180000"/>
+          </a:path>
+        </a:gradFill>
+        <a:gradFill rotWithShape="1">
+          <a:gsLst>
+            <a:gs pos="0">
+              <a:schemeClr val="phClr">
+                <a:tint val="80000"/>
+                <a:satMod val="300000"/>
+              </a:schemeClr>
+            </a:gs>
+            <a:gs pos="100000">
+              <a:schemeClr val="phClr">
+                <a:shade val="30000"/>
+                <a:satMod val="200000"/>
+              </a:schemeClr>
+            </a:gs>
+          </a:gsLst>
+          <a:path path="circle">
+            <a:fillToRect l="50000" t="50000" r="50000" b="50000"/>
+          </a:path>
+        </a:gradFill>
+      </a:bgFillStyleLst>
+    </a:fmtScheme>
+  </a:themeElements>
+  <a:objectDefaults>
+    <a:spDef>
+      <a:spPr/>
+      <a:bodyPr/>
+      <a:lstStyle/>
+      <a:style>
+        <a:lnRef idx="1">
+          <a:schemeClr val="accent1"/>
+        </a:lnRef>
+        <a:fillRef idx="3">
+          <a:schemeClr val="accent1"/>
+        </a:fillRef>
+        <a:effectRef idx="2">
+          <a:schemeClr val="accent1"/>
+        </a:effectRef>
+        <a:fontRef idx="minor">
+          <a:schemeClr val="lt1"/>
+        </a:fontRef>
+      </a:style>
+    </a:spDef>
+    <a:lnDef>
+      <a:spPr/>
+      <a:bodyPr/>
+      <a:lstStyle/>
+      <a:style>
+        <a:lnRef idx="2">
+          <a:schemeClr val="accent1"/>
+        </a:lnRef>
+        <a:fillRef idx="0">
+          <a:schemeClr val="accent1"/>
+        </a:fillRef>
+        <a:effectRef idx="1">
+          <a:schemeClr val="accent1"/>
+        </a:effectRef>
+        <a:fontRef idx="minor">
+          <a:schemeClr val="tx1"/>
+        </a:fontRef>
+      </a:style>
+    </a:lnDef>
+  </a:objectDefaults>
+  <a:extraClrSchemeLst/>
+</a:theme>
+</file>
+
+<file path=ppt/theme/theme2.xml><?xml version="1.0" encoding="utf-8"?>
 <a:theme xmlns:a="http://schemas.openxmlformats.org/drawingml/2006/main" name="Office Theme">
   <a:themeElements>
     <a:clrScheme name="Office">

--- a/media/exports/reports/2026-10/program-cost.pptx
+++ b/media/exports/reports/2026-10/program-cost.pptx
@@ -2607,7 +2607,7 @@
           <a:lstStyle/>
           <a:p>
             <a:r>
-              <a:t>What does each program really cost?. Sample Community Services Ltd. Period: October 2026 to date. Each program's full cost: what its grant pays for, plus its fair share of the costs no single grant covers (untied program costs and administration, shared by grant spending). Pick a program and every chart and note follows it.</a:t>
+              <a:t>What does each program really cost?. Sample Community Services Ltd. Period: October 2026 to date. In short: Housing support costs $11,022 in full in October so far: $6,564 more than its grant spending, once its share of shared costs is added. Each program's full cost: what its grant pays for, plus its fair share of the costs no single grant covers (untied program costs and administration, shared by grant spending). Pick a program and every chart and note follows it.</a:t>
             </a:r>
           </a:p>
         </p:txBody>
@@ -6322,7 +6322,7 @@
         <p:spPr>
           <a:xfrm>
             <a:off x="457200" y="3703320"/>
-            <a:ext cx="11277295" cy="758190"/>
+            <a:ext cx="11277295" cy="980440"/>
           </a:xfrm>
           <a:prstGeom prst="rect">
             <a:avLst/>
@@ -6347,7 +6347,7 @@
                 </a:solidFill>
                 <a:latin typeface="Roboto"/>
               </a:rPr>
-              <a:t>Period: October 2026 to date. Each program's full cost: what its grant pays for, plus its fair share of the costs no single grant covers (untied program costs and administration, shared by grant spending). Pick a program and every chart and note follows it.</a:t>
+              <a:t>Period: October 2026 to date. In short: Housing support costs $11,022 in full in October so far: $6,564 more than its grant spending, once its share of shared costs is added. Each program's full cost: what its grant pays for, plus its fair share of the costs no single grant covers (untied program costs and administration, shared by grant spending). Pick a program and every chart and note follows it.</a:t>
             </a:r>
           </a:p>
         </p:txBody>
@@ -6360,7 +6360,7 @@
         </p:nvSpPr>
         <p:spPr>
           <a:xfrm>
-            <a:off x="457200" y="4552950"/>
+            <a:off x="457200" y="4775200"/>
             <a:ext cx="11277295" cy="1097280"/>
           </a:xfrm>
           <a:prstGeom prst="rect">
@@ -6496,7 +6496,7 @@
                 </a:solidFill>
                 <a:latin typeface="Roboto"/>
               </a:rPr>
-              <a:t>Data retrieved 2pm, Tue 6 Oct 2026 · Generated 8 Oct 2026, 9:35am · Sample data · Made with Python (python-pptx)</a:t>
+              <a:t>Data retrieved 2pm, Tue 6 Oct 2026 · Generated 10 Oct 2026, 9:55pm · Sample data · Made with Python (python-pptx)</a:t>
             </a:r>
           </a:p>
         </p:txBody>
@@ -7065,7 +7065,7 @@
                 </a:solidFill>
                 <a:latin typeface="Roboto"/>
               </a:rPr>
-              <a:t>Data retrieved 2pm, Tue 6 Oct 2026 · Generated 8 Oct 2026, 9:35am · Sample data · Made with Python (python-pptx)</a:t>
+              <a:t>Data retrieved 2pm, Tue 6 Oct 2026 · Generated 10 Oct 2026, 9:55pm · Sample data · Made with Python (python-pptx)</a:t>
             </a:r>
           </a:p>
         </p:txBody>
@@ -7634,7 +7634,7 @@
                 </a:solidFill>
                 <a:latin typeface="Roboto"/>
               </a:rPr>
-              <a:t>Data retrieved 2pm, Tue 6 Oct 2026 · Generated 8 Oct 2026, 9:35am · Sample data · Made with Python (python-pptx)</a:t>
+              <a:t>Data retrieved 2pm, Tue 6 Oct 2026 · Generated 10 Oct 2026, 9:55pm · Sample data · Made with Python (python-pptx)</a:t>
             </a:r>
           </a:p>
         </p:txBody>
@@ -8203,7 +8203,7 @@
                 </a:solidFill>
                 <a:latin typeface="Roboto"/>
               </a:rPr>
-              <a:t>Data retrieved 2pm, Tue 6 Oct 2026 · Generated 8 Oct 2026, 9:35am · Sample data · Made with Python (python-pptx)</a:t>
+              <a:t>Data retrieved 2pm, Tue 6 Oct 2026 · Generated 10 Oct 2026, 9:55pm · Sample data · Made with Python (python-pptx)</a:t>
             </a:r>
           </a:p>
         </p:txBody>
@@ -8772,7 +8772,7 @@
                 </a:solidFill>
                 <a:latin typeface="Roboto"/>
               </a:rPr>
-              <a:t>Data retrieved 2pm, Tue 6 Oct 2026 · Generated 8 Oct 2026, 9:35am · Sample data · Made with Python (python-pptx)</a:t>
+              <a:t>Data retrieved 2pm, Tue 6 Oct 2026 · Generated 10 Oct 2026, 9:55pm · Sample data · Made with Python (python-pptx)</a:t>
             </a:r>
           </a:p>
         </p:txBody>
@@ -9341,7 +9341,7 @@
                 </a:solidFill>
                 <a:latin typeface="Roboto"/>
               </a:rPr>
-              <a:t>Data retrieved 2pm, Tue 6 Oct 2026 · Generated 8 Oct 2026, 9:35am · Sample data · Made with Python (python-pptx)</a:t>
+              <a:t>Data retrieved 2pm, Tue 6 Oct 2026 · Generated 10 Oct 2026, 9:55pm · Sample data · Made with Python (python-pptx)</a:t>
             </a:r>
           </a:p>
         </p:txBody>
@@ -9910,7 +9910,7 @@
                 </a:solidFill>
                 <a:latin typeface="Roboto"/>
               </a:rPr>
-              <a:t>Data retrieved 2pm, Tue 6 Oct 2026 · Generated 8 Oct 2026, 9:35am · Sample data · Made with Python (python-pptx)</a:t>
+              <a:t>Data retrieved 2pm, Tue 6 Oct 2026 · Generated 10 Oct 2026, 9:55pm · Sample data · Made with Python (python-pptx)</a:t>
             </a:r>
           </a:p>
         </p:txBody>
@@ -10479,7 +10479,7 @@
                 </a:solidFill>
                 <a:latin typeface="Roboto"/>
               </a:rPr>
-              <a:t>Data retrieved 2pm, Tue 6 Oct 2026 · Generated 8 Oct 2026, 9:35am · Sample data · Made with Python (python-pptx)</a:t>
+              <a:t>Data retrieved 2pm, Tue 6 Oct 2026 · Generated 10 Oct 2026, 9:55pm · Sample data · Made with Python (python-pptx)</a:t>
             </a:r>
           </a:p>
         </p:txBody>
